--- a/presentation/Euro_Air_Quality_Pipeline_FH_10Folien_v2.pptx
+++ b/presentation/Euro_Air_Quality_Pipeline_FH_10Folien_v2.pptx
@@ -5,18 +5,18 @@
     <p:sldMasterId id="2147483648" r:id="rId1"/>
   </p:sldMasterIdLst>
   <p:sldIdLst>
-    <p:sldId id="256" r:id="rId7"/>
-    <p:sldId id="257" r:id="rId8"/>
-    <p:sldId id="258" r:id="rId9"/>
-    <p:sldId id="259" r:id="rId10"/>
-    <p:sldId id="260" r:id="rId11"/>
-    <p:sldId id="261" r:id="rId12"/>
-    <p:sldId id="262" r:id="rId13"/>
-    <p:sldId id="263" r:id="rId14"/>
-    <p:sldId id="264" r:id="rId15"/>
-    <p:sldId id="265" r:id="rId16"/>
+    <p:sldId id="256" r:id="rId2"/>
+    <p:sldId id="257" r:id="rId3"/>
+    <p:sldId id="258" r:id="rId4"/>
+    <p:sldId id="259" r:id="rId5"/>
+    <p:sldId id="260" r:id="rId6"/>
+    <p:sldId id="261" r:id="rId7"/>
+    <p:sldId id="262" r:id="rId8"/>
+    <p:sldId id="263" r:id="rId9"/>
+    <p:sldId id="264" r:id="rId10"/>
+    <p:sldId id="265" r:id="rId11"/>
   </p:sldIdLst>
-  <p:sldSz cx="12191695" cy="6858000" type="screen4x3"/>
+  <p:sldSz cx="12192000" cy="6858000"/>
   <p:notesSz cx="6858000" cy="9144000"/>
   <p:defaultTextStyle>
     <a:defPPr>
@@ -113,6 +113,22 @@
       </a:defRPr>
     </a:lvl9pPr>
   </p:defaultTextStyle>
+  <p:extLst>
+    <p:ext uri="{EFAFB233-063F-42B5-8137-9DF3F51BA10A}">
+      <p15:sldGuideLst xmlns:p15="http://schemas.microsoft.com/office/powerpoint/2012/main">
+        <p15:guide id="1" orient="horz" pos="2160">
+          <p15:clr>
+            <a:srgbClr val="A4A3A4"/>
+          </p15:clr>
+        </p15:guide>
+        <p15:guide id="2" pos="2880">
+          <p15:clr>
+            <a:srgbClr val="A4A3A4"/>
+          </p15:clr>
+        </p15:guide>
+      </p15:sldGuideLst>
+    </p:ext>
+  </p:extLst>
 </p:presentation>
 </file>
 
@@ -154,10 +170,9 @@
           <a:lstStyle/>
           <a:p>
             <a:r>
-              <a:rPr lang="en-US" smtClean="0"/>
+              <a:rPr lang="en-US"/>
               <a:t>Click to edit Master title style</a:t>
             </a:r>
-            <a:endParaRPr lang="en-US"/>
           </a:p>
         </p:txBody>
       </p:sp>
@@ -273,10 +288,9 @@
           </a:lstStyle>
           <a:p>
             <a:r>
-              <a:rPr lang="en-US" smtClean="0"/>
+              <a:rPr lang="en-US"/>
               <a:t>Click to edit Master subtitle style</a:t>
             </a:r>
-            <a:endParaRPr lang="en-US"/>
           </a:p>
         </p:txBody>
       </p:sp>
@@ -297,7 +311,7 @@
           <a:p>
             <a:fld id="{5BCAD085-E8A6-8845-BD4E-CB4CCA059FC4}" type="datetimeFigureOut">
               <a:rPr lang="en-US" smtClean="0"/>
-              <a:t>1/27/13</a:t>
+              <a:t>6/30/2026</a:t>
             </a:fld>
             <a:endParaRPr lang="en-US"/>
           </a:p>
@@ -339,7 +353,7 @@
           <a:p>
             <a:fld id="{C1FF6DA9-008F-8B48-92A6-B652298478BF}" type="slidenum">
               <a:rPr lang="en-US" smtClean="0"/>
-              <a:t>‹#›</a:t>
+              <a:t>‹Nr.›</a:t>
             </a:fld>
             <a:endParaRPr lang="en-US"/>
           </a:p>
@@ -391,10 +405,9 @@
           <a:lstStyle/>
           <a:p>
             <a:r>
-              <a:rPr lang="en-US" smtClean="0"/>
+              <a:rPr lang="en-US"/>
               <a:t>Click to edit Master title style</a:t>
             </a:r>
-            <a:endParaRPr lang="en-US"/>
           </a:p>
         </p:txBody>
       </p:sp>
@@ -415,38 +428,37 @@
           <a:p>
             <a:pPr lvl="0"/>
             <a:r>
-              <a:rPr lang="en-US" smtClean="0"/>
+              <a:rPr lang="en-US"/>
               <a:t>Click to edit Master text styles</a:t>
             </a:r>
           </a:p>
           <a:p>
             <a:pPr lvl="1"/>
             <a:r>
-              <a:rPr lang="en-US" smtClean="0"/>
+              <a:rPr lang="en-US"/>
               <a:t>Second level</a:t>
             </a:r>
           </a:p>
           <a:p>
             <a:pPr lvl="2"/>
             <a:r>
-              <a:rPr lang="en-US" smtClean="0"/>
+              <a:rPr lang="en-US"/>
               <a:t>Third level</a:t>
             </a:r>
           </a:p>
           <a:p>
             <a:pPr lvl="3"/>
             <a:r>
-              <a:rPr lang="en-US" smtClean="0"/>
+              <a:rPr lang="en-US"/>
               <a:t>Fourth level</a:t>
             </a:r>
           </a:p>
           <a:p>
             <a:pPr lvl="4"/>
             <a:r>
-              <a:rPr lang="en-US" smtClean="0"/>
+              <a:rPr lang="en-US"/>
               <a:t>Fifth level</a:t>
             </a:r>
-            <a:endParaRPr lang="en-US"/>
           </a:p>
         </p:txBody>
       </p:sp>
@@ -467,7 +479,7 @@
           <a:p>
             <a:fld id="{5BCAD085-E8A6-8845-BD4E-CB4CCA059FC4}" type="datetimeFigureOut">
               <a:rPr lang="en-US" smtClean="0"/>
-              <a:t>1/27/13</a:t>
+              <a:t>6/30/2026</a:t>
             </a:fld>
             <a:endParaRPr lang="en-US"/>
           </a:p>
@@ -509,7 +521,7 @@
           <a:p>
             <a:fld id="{C1FF6DA9-008F-8B48-92A6-B652298478BF}" type="slidenum">
               <a:rPr lang="en-US" smtClean="0"/>
-              <a:t>‹#›</a:t>
+              <a:t>‹Nr.›</a:t>
             </a:fld>
             <a:endParaRPr lang="en-US"/>
           </a:p>
@@ -566,10 +578,9 @@
           <a:lstStyle/>
           <a:p>
             <a:r>
-              <a:rPr lang="en-US" smtClean="0"/>
+              <a:rPr lang="en-US"/>
               <a:t>Click to edit Master title style</a:t>
             </a:r>
-            <a:endParaRPr lang="en-US"/>
           </a:p>
         </p:txBody>
       </p:sp>
@@ -595,38 +606,37 @@
           <a:p>
             <a:pPr lvl="0"/>
             <a:r>
-              <a:rPr lang="en-US" smtClean="0"/>
+              <a:rPr lang="en-US"/>
               <a:t>Click to edit Master text styles</a:t>
             </a:r>
           </a:p>
           <a:p>
             <a:pPr lvl="1"/>
             <a:r>
-              <a:rPr lang="en-US" smtClean="0"/>
+              <a:rPr lang="en-US"/>
               <a:t>Second level</a:t>
             </a:r>
           </a:p>
           <a:p>
             <a:pPr lvl="2"/>
             <a:r>
-              <a:rPr lang="en-US" smtClean="0"/>
+              <a:rPr lang="en-US"/>
               <a:t>Third level</a:t>
             </a:r>
           </a:p>
           <a:p>
             <a:pPr lvl="3"/>
             <a:r>
-              <a:rPr lang="en-US" smtClean="0"/>
+              <a:rPr lang="en-US"/>
               <a:t>Fourth level</a:t>
             </a:r>
           </a:p>
           <a:p>
             <a:pPr lvl="4"/>
             <a:r>
-              <a:rPr lang="en-US" smtClean="0"/>
+              <a:rPr lang="en-US"/>
               <a:t>Fifth level</a:t>
             </a:r>
-            <a:endParaRPr lang="en-US"/>
           </a:p>
         </p:txBody>
       </p:sp>
@@ -647,7 +657,7 @@
           <a:p>
             <a:fld id="{5BCAD085-E8A6-8845-BD4E-CB4CCA059FC4}" type="datetimeFigureOut">
               <a:rPr lang="en-US" smtClean="0"/>
-              <a:t>1/27/13</a:t>
+              <a:t>6/30/2026</a:t>
             </a:fld>
             <a:endParaRPr lang="en-US"/>
           </a:p>
@@ -689,7 +699,7 @@
           <a:p>
             <a:fld id="{C1FF6DA9-008F-8B48-92A6-B652298478BF}" type="slidenum">
               <a:rPr lang="en-US" smtClean="0"/>
-              <a:t>‹#›</a:t>
+              <a:t>‹Nr.›</a:t>
             </a:fld>
             <a:endParaRPr lang="en-US"/>
           </a:p>
@@ -741,10 +751,9 @@
           <a:lstStyle/>
           <a:p>
             <a:r>
-              <a:rPr lang="en-US" smtClean="0"/>
+              <a:rPr lang="en-US"/>
               <a:t>Click to edit Master title style</a:t>
             </a:r>
-            <a:endParaRPr lang="en-US"/>
           </a:p>
         </p:txBody>
       </p:sp>
@@ -765,38 +774,37 @@
           <a:p>
             <a:pPr lvl="0"/>
             <a:r>
-              <a:rPr lang="en-US" smtClean="0"/>
+              <a:rPr lang="en-US"/>
               <a:t>Click to edit Master text styles</a:t>
             </a:r>
           </a:p>
           <a:p>
             <a:pPr lvl="1"/>
             <a:r>
-              <a:rPr lang="en-US" smtClean="0"/>
+              <a:rPr lang="en-US"/>
               <a:t>Second level</a:t>
             </a:r>
           </a:p>
           <a:p>
             <a:pPr lvl="2"/>
             <a:r>
-              <a:rPr lang="en-US" smtClean="0"/>
+              <a:rPr lang="en-US"/>
               <a:t>Third level</a:t>
             </a:r>
           </a:p>
           <a:p>
             <a:pPr lvl="3"/>
             <a:r>
-              <a:rPr lang="en-US" smtClean="0"/>
+              <a:rPr lang="en-US"/>
               <a:t>Fourth level</a:t>
             </a:r>
           </a:p>
           <a:p>
             <a:pPr lvl="4"/>
             <a:r>
-              <a:rPr lang="en-US" smtClean="0"/>
+              <a:rPr lang="en-US"/>
               <a:t>Fifth level</a:t>
             </a:r>
-            <a:endParaRPr lang="en-US"/>
           </a:p>
         </p:txBody>
       </p:sp>
@@ -817,7 +825,7 @@
           <a:p>
             <a:fld id="{5BCAD085-E8A6-8845-BD4E-CB4CCA059FC4}" type="datetimeFigureOut">
               <a:rPr lang="en-US" smtClean="0"/>
-              <a:t>1/27/13</a:t>
+              <a:t>6/30/2026</a:t>
             </a:fld>
             <a:endParaRPr lang="en-US"/>
           </a:p>
@@ -859,7 +867,7 @@
           <a:p>
             <a:fld id="{C1FF6DA9-008F-8B48-92A6-B652298478BF}" type="slidenum">
               <a:rPr lang="en-US" smtClean="0"/>
-              <a:t>‹#›</a:t>
+              <a:t>‹Nr.›</a:t>
             </a:fld>
             <a:endParaRPr lang="en-US"/>
           </a:p>
@@ -920,10 +928,9 @@
           </a:lstStyle>
           <a:p>
             <a:r>
-              <a:rPr lang="en-US" smtClean="0"/>
+              <a:rPr lang="en-US"/>
               <a:t>Click to edit Master title style</a:t>
             </a:r>
-            <a:endParaRPr lang="en-US"/>
           </a:p>
         </p:txBody>
       </p:sp>
@@ -1040,7 +1047,7 @@
           <a:p>
             <a:pPr lvl="0"/>
             <a:r>
-              <a:rPr lang="en-US" smtClean="0"/>
+              <a:rPr lang="en-US"/>
               <a:t>Click to edit Master text styles</a:t>
             </a:r>
           </a:p>
@@ -1063,7 +1070,7 @@
           <a:p>
             <a:fld id="{5BCAD085-E8A6-8845-BD4E-CB4CCA059FC4}" type="datetimeFigureOut">
               <a:rPr lang="en-US" smtClean="0"/>
-              <a:t>1/27/13</a:t>
+              <a:t>6/30/2026</a:t>
             </a:fld>
             <a:endParaRPr lang="en-US"/>
           </a:p>
@@ -1105,7 +1112,7 @@
           <a:p>
             <a:fld id="{C1FF6DA9-008F-8B48-92A6-B652298478BF}" type="slidenum">
               <a:rPr lang="en-US" smtClean="0"/>
-              <a:t>‹#›</a:t>
+              <a:t>‹Nr.›</a:t>
             </a:fld>
             <a:endParaRPr lang="en-US"/>
           </a:p>
@@ -1157,10 +1164,9 @@
           <a:lstStyle/>
           <a:p>
             <a:r>
-              <a:rPr lang="en-US" smtClean="0"/>
+              <a:rPr lang="en-US"/>
               <a:t>Click to edit Master title style</a:t>
             </a:r>
-            <a:endParaRPr lang="en-US"/>
           </a:p>
         </p:txBody>
       </p:sp>
@@ -1214,38 +1220,37 @@
           <a:p>
             <a:pPr lvl="0"/>
             <a:r>
-              <a:rPr lang="en-US" smtClean="0"/>
+              <a:rPr lang="en-US"/>
               <a:t>Click to edit Master text styles</a:t>
             </a:r>
           </a:p>
           <a:p>
             <a:pPr lvl="1"/>
             <a:r>
-              <a:rPr lang="en-US" smtClean="0"/>
+              <a:rPr lang="en-US"/>
               <a:t>Second level</a:t>
             </a:r>
           </a:p>
           <a:p>
             <a:pPr lvl="2"/>
             <a:r>
-              <a:rPr lang="en-US" smtClean="0"/>
+              <a:rPr lang="en-US"/>
               <a:t>Third level</a:t>
             </a:r>
           </a:p>
           <a:p>
             <a:pPr lvl="3"/>
             <a:r>
-              <a:rPr lang="en-US" smtClean="0"/>
+              <a:rPr lang="en-US"/>
               <a:t>Fourth level</a:t>
             </a:r>
           </a:p>
           <a:p>
             <a:pPr lvl="4"/>
             <a:r>
-              <a:rPr lang="en-US" smtClean="0"/>
+              <a:rPr lang="en-US"/>
               <a:t>Fifth level</a:t>
             </a:r>
-            <a:endParaRPr lang="en-US"/>
           </a:p>
         </p:txBody>
       </p:sp>
@@ -1299,38 +1304,37 @@
           <a:p>
             <a:pPr lvl="0"/>
             <a:r>
-              <a:rPr lang="en-US" smtClean="0"/>
+              <a:rPr lang="en-US"/>
               <a:t>Click to edit Master text styles</a:t>
             </a:r>
           </a:p>
           <a:p>
             <a:pPr lvl="1"/>
             <a:r>
-              <a:rPr lang="en-US" smtClean="0"/>
+              <a:rPr lang="en-US"/>
               <a:t>Second level</a:t>
             </a:r>
           </a:p>
           <a:p>
             <a:pPr lvl="2"/>
             <a:r>
-              <a:rPr lang="en-US" smtClean="0"/>
+              <a:rPr lang="en-US"/>
               <a:t>Third level</a:t>
             </a:r>
           </a:p>
           <a:p>
             <a:pPr lvl="3"/>
             <a:r>
-              <a:rPr lang="en-US" smtClean="0"/>
+              <a:rPr lang="en-US"/>
               <a:t>Fourth level</a:t>
             </a:r>
           </a:p>
           <a:p>
             <a:pPr lvl="4"/>
             <a:r>
-              <a:rPr lang="en-US" smtClean="0"/>
+              <a:rPr lang="en-US"/>
               <a:t>Fifth level</a:t>
             </a:r>
-            <a:endParaRPr lang="en-US"/>
           </a:p>
         </p:txBody>
       </p:sp>
@@ -1351,7 +1355,7 @@
           <a:p>
             <a:fld id="{5BCAD085-E8A6-8845-BD4E-CB4CCA059FC4}" type="datetimeFigureOut">
               <a:rPr lang="en-US" smtClean="0"/>
-              <a:t>1/27/13</a:t>
+              <a:t>6/30/2026</a:t>
             </a:fld>
             <a:endParaRPr lang="en-US"/>
           </a:p>
@@ -1393,7 +1397,7 @@
           <a:p>
             <a:fld id="{C1FF6DA9-008F-8B48-92A6-B652298478BF}" type="slidenum">
               <a:rPr lang="en-US" smtClean="0"/>
-              <a:t>‹#›</a:t>
+              <a:t>‹Nr.›</a:t>
             </a:fld>
             <a:endParaRPr lang="en-US"/>
           </a:p>
@@ -1449,10 +1453,9 @@
           </a:lstStyle>
           <a:p>
             <a:r>
-              <a:rPr lang="en-US" smtClean="0"/>
+              <a:rPr lang="en-US"/>
               <a:t>Click to edit Master title style</a:t>
             </a:r>
-            <a:endParaRPr lang="en-US"/>
           </a:p>
         </p:txBody>
       </p:sp>
@@ -1515,7 +1518,7 @@
           <a:p>
             <a:pPr lvl="0"/>
             <a:r>
-              <a:rPr lang="en-US" smtClean="0"/>
+              <a:rPr lang="en-US"/>
               <a:t>Click to edit Master text styles</a:t>
             </a:r>
           </a:p>
@@ -1571,38 +1574,37 @@
           <a:p>
             <a:pPr lvl="0"/>
             <a:r>
-              <a:rPr lang="en-US" smtClean="0"/>
+              <a:rPr lang="en-US"/>
               <a:t>Click to edit Master text styles</a:t>
             </a:r>
           </a:p>
           <a:p>
             <a:pPr lvl="1"/>
             <a:r>
-              <a:rPr lang="en-US" smtClean="0"/>
+              <a:rPr lang="en-US"/>
               <a:t>Second level</a:t>
             </a:r>
           </a:p>
           <a:p>
             <a:pPr lvl="2"/>
             <a:r>
-              <a:rPr lang="en-US" smtClean="0"/>
+              <a:rPr lang="en-US"/>
               <a:t>Third level</a:t>
             </a:r>
           </a:p>
           <a:p>
             <a:pPr lvl="3"/>
             <a:r>
-              <a:rPr lang="en-US" smtClean="0"/>
+              <a:rPr lang="en-US"/>
               <a:t>Fourth level</a:t>
             </a:r>
           </a:p>
           <a:p>
             <a:pPr lvl="4"/>
             <a:r>
-              <a:rPr lang="en-US" smtClean="0"/>
+              <a:rPr lang="en-US"/>
               <a:t>Fifth level</a:t>
             </a:r>
-            <a:endParaRPr lang="en-US"/>
           </a:p>
         </p:txBody>
       </p:sp>
@@ -1665,7 +1667,7 @@
           <a:p>
             <a:pPr lvl="0"/>
             <a:r>
-              <a:rPr lang="en-US" smtClean="0"/>
+              <a:rPr lang="en-US"/>
               <a:t>Click to edit Master text styles</a:t>
             </a:r>
           </a:p>
@@ -1721,38 +1723,37 @@
           <a:p>
             <a:pPr lvl="0"/>
             <a:r>
-              <a:rPr lang="en-US" smtClean="0"/>
+              <a:rPr lang="en-US"/>
               <a:t>Click to edit Master text styles</a:t>
             </a:r>
           </a:p>
           <a:p>
             <a:pPr lvl="1"/>
             <a:r>
-              <a:rPr lang="en-US" smtClean="0"/>
+              <a:rPr lang="en-US"/>
               <a:t>Second level</a:t>
             </a:r>
           </a:p>
           <a:p>
             <a:pPr lvl="2"/>
             <a:r>
-              <a:rPr lang="en-US" smtClean="0"/>
+              <a:rPr lang="en-US"/>
               <a:t>Third level</a:t>
             </a:r>
           </a:p>
           <a:p>
             <a:pPr lvl="3"/>
             <a:r>
-              <a:rPr lang="en-US" smtClean="0"/>
+              <a:rPr lang="en-US"/>
               <a:t>Fourth level</a:t>
             </a:r>
           </a:p>
           <a:p>
             <a:pPr lvl="4"/>
             <a:r>
-              <a:rPr lang="en-US" smtClean="0"/>
+              <a:rPr lang="en-US"/>
               <a:t>Fifth level</a:t>
             </a:r>
-            <a:endParaRPr lang="en-US"/>
           </a:p>
         </p:txBody>
       </p:sp>
@@ -1773,7 +1774,7 @@
           <a:p>
             <a:fld id="{5BCAD085-E8A6-8845-BD4E-CB4CCA059FC4}" type="datetimeFigureOut">
               <a:rPr lang="en-US" smtClean="0"/>
-              <a:t>1/27/13</a:t>
+              <a:t>6/30/2026</a:t>
             </a:fld>
             <a:endParaRPr lang="en-US"/>
           </a:p>
@@ -1815,7 +1816,7 @@
           <a:p>
             <a:fld id="{C1FF6DA9-008F-8B48-92A6-B652298478BF}" type="slidenum">
               <a:rPr lang="en-US" smtClean="0"/>
-              <a:t>‹#›</a:t>
+              <a:t>‹Nr.›</a:t>
             </a:fld>
             <a:endParaRPr lang="en-US"/>
           </a:p>
@@ -1867,10 +1868,9 @@
           <a:lstStyle/>
           <a:p>
             <a:r>
-              <a:rPr lang="en-US" smtClean="0"/>
+              <a:rPr lang="en-US"/>
               <a:t>Click to edit Master title style</a:t>
             </a:r>
-            <a:endParaRPr lang="en-US"/>
           </a:p>
         </p:txBody>
       </p:sp>
@@ -1891,7 +1891,7 @@
           <a:p>
             <a:fld id="{5BCAD085-E8A6-8845-BD4E-CB4CCA059FC4}" type="datetimeFigureOut">
               <a:rPr lang="en-US" smtClean="0"/>
-              <a:t>1/27/13</a:t>
+              <a:t>6/30/2026</a:t>
             </a:fld>
             <a:endParaRPr lang="en-US"/>
           </a:p>
@@ -1933,7 +1933,7 @@
           <a:p>
             <a:fld id="{C1FF6DA9-008F-8B48-92A6-B652298478BF}" type="slidenum">
               <a:rPr lang="en-US" smtClean="0"/>
-              <a:t>‹#›</a:t>
+              <a:t>‹Nr.›</a:t>
             </a:fld>
             <a:endParaRPr lang="en-US"/>
           </a:p>
@@ -1986,7 +1986,7 @@
           <a:p>
             <a:fld id="{5BCAD085-E8A6-8845-BD4E-CB4CCA059FC4}" type="datetimeFigureOut">
               <a:rPr lang="en-US" smtClean="0"/>
-              <a:t>1/27/13</a:t>
+              <a:t>6/30/2026</a:t>
             </a:fld>
             <a:endParaRPr lang="en-US"/>
           </a:p>
@@ -2028,7 +2028,7 @@
           <a:p>
             <a:fld id="{C1FF6DA9-008F-8B48-92A6-B652298478BF}" type="slidenum">
               <a:rPr lang="en-US" smtClean="0"/>
-              <a:t>‹#›</a:t>
+              <a:t>‹Nr.›</a:t>
             </a:fld>
             <a:endParaRPr lang="en-US"/>
           </a:p>
@@ -2089,10 +2089,9 @@
           </a:lstStyle>
           <a:p>
             <a:r>
-              <a:rPr lang="en-US" smtClean="0"/>
+              <a:rPr lang="en-US"/>
               <a:t>Click to edit Master title style</a:t>
             </a:r>
-            <a:endParaRPr lang="en-US"/>
           </a:p>
         </p:txBody>
       </p:sp>
@@ -2146,38 +2145,37 @@
           <a:p>
             <a:pPr lvl="0"/>
             <a:r>
-              <a:rPr lang="en-US" smtClean="0"/>
+              <a:rPr lang="en-US"/>
               <a:t>Click to edit Master text styles</a:t>
             </a:r>
           </a:p>
           <a:p>
             <a:pPr lvl="1"/>
             <a:r>
-              <a:rPr lang="en-US" smtClean="0"/>
+              <a:rPr lang="en-US"/>
               <a:t>Second level</a:t>
             </a:r>
           </a:p>
           <a:p>
             <a:pPr lvl="2"/>
             <a:r>
-              <a:rPr lang="en-US" smtClean="0"/>
+              <a:rPr lang="en-US"/>
               <a:t>Third level</a:t>
             </a:r>
           </a:p>
           <a:p>
             <a:pPr lvl="3"/>
             <a:r>
-              <a:rPr lang="en-US" smtClean="0"/>
+              <a:rPr lang="en-US"/>
               <a:t>Fourth level</a:t>
             </a:r>
           </a:p>
           <a:p>
             <a:pPr lvl="4"/>
             <a:r>
-              <a:rPr lang="en-US" smtClean="0"/>
+              <a:rPr lang="en-US"/>
               <a:t>Fifth level</a:t>
             </a:r>
-            <a:endParaRPr lang="en-US"/>
           </a:p>
         </p:txBody>
       </p:sp>
@@ -2240,7 +2238,7 @@
           <a:p>
             <a:pPr lvl="0"/>
             <a:r>
-              <a:rPr lang="en-US" smtClean="0"/>
+              <a:rPr lang="en-US"/>
               <a:t>Click to edit Master text styles</a:t>
             </a:r>
           </a:p>
@@ -2263,7 +2261,7 @@
           <a:p>
             <a:fld id="{5BCAD085-E8A6-8845-BD4E-CB4CCA059FC4}" type="datetimeFigureOut">
               <a:rPr lang="en-US" smtClean="0"/>
-              <a:t>1/27/13</a:t>
+              <a:t>6/30/2026</a:t>
             </a:fld>
             <a:endParaRPr lang="en-US"/>
           </a:p>
@@ -2305,7 +2303,7 @@
           <a:p>
             <a:fld id="{C1FF6DA9-008F-8B48-92A6-B652298478BF}" type="slidenum">
               <a:rPr lang="en-US" smtClean="0"/>
-              <a:t>‹#›</a:t>
+              <a:t>‹Nr.›</a:t>
             </a:fld>
             <a:endParaRPr lang="en-US"/>
           </a:p>
@@ -2366,10 +2364,9 @@
           </a:lstStyle>
           <a:p>
             <a:r>
-              <a:rPr lang="en-US" smtClean="0"/>
+              <a:rPr lang="en-US"/>
               <a:t>Click to edit Master title style</a:t>
             </a:r>
-            <a:endParaRPr lang="en-US"/>
           </a:p>
         </p:txBody>
       </p:sp>
@@ -2493,7 +2490,7 @@
           <a:p>
             <a:pPr lvl="0"/>
             <a:r>
-              <a:rPr lang="en-US" smtClean="0"/>
+              <a:rPr lang="en-US"/>
               <a:t>Click to edit Master text styles</a:t>
             </a:r>
           </a:p>
@@ -2516,7 +2513,7 @@
           <a:p>
             <a:fld id="{5BCAD085-E8A6-8845-BD4E-CB4CCA059FC4}" type="datetimeFigureOut">
               <a:rPr lang="en-US" smtClean="0"/>
-              <a:t>1/27/13</a:t>
+              <a:t>6/30/2026</a:t>
             </a:fld>
             <a:endParaRPr lang="en-US"/>
           </a:p>
@@ -2558,7 +2555,7 @@
           <a:p>
             <a:fld id="{C1FF6DA9-008F-8B48-92A6-B652298478BF}" type="slidenum">
               <a:rPr lang="en-US" smtClean="0"/>
-              <a:t>‹#›</a:t>
+              <a:t>‹Nr.›</a:t>
             </a:fld>
             <a:endParaRPr lang="en-US"/>
           </a:p>
@@ -2625,10 +2622,9 @@
           <a:lstStyle/>
           <a:p>
             <a:r>
-              <a:rPr lang="en-US" smtClean="0"/>
+              <a:rPr lang="en-US"/>
               <a:t>Click to edit Master title style</a:t>
             </a:r>
-            <a:endParaRPr lang="en-US"/>
           </a:p>
         </p:txBody>
       </p:sp>
@@ -2659,38 +2655,37 @@
           <a:p>
             <a:pPr lvl="0"/>
             <a:r>
-              <a:rPr lang="en-US" smtClean="0"/>
+              <a:rPr lang="en-US"/>
               <a:t>Click to edit Master text styles</a:t>
             </a:r>
           </a:p>
           <a:p>
             <a:pPr lvl="1"/>
             <a:r>
-              <a:rPr lang="en-US" smtClean="0"/>
+              <a:rPr lang="en-US"/>
               <a:t>Second level</a:t>
             </a:r>
           </a:p>
           <a:p>
             <a:pPr lvl="2"/>
             <a:r>
-              <a:rPr lang="en-US" smtClean="0"/>
+              <a:rPr lang="en-US"/>
               <a:t>Third level</a:t>
             </a:r>
           </a:p>
           <a:p>
             <a:pPr lvl="3"/>
             <a:r>
-              <a:rPr lang="en-US" smtClean="0"/>
+              <a:rPr lang="en-US"/>
               <a:t>Fourth level</a:t>
             </a:r>
           </a:p>
           <a:p>
             <a:pPr lvl="4"/>
             <a:r>
-              <a:rPr lang="en-US" smtClean="0"/>
+              <a:rPr lang="en-US"/>
               <a:t>Fifth level</a:t>
             </a:r>
-            <a:endParaRPr lang="en-US"/>
           </a:p>
         </p:txBody>
       </p:sp>
@@ -2729,7 +2724,7 @@
           <a:p>
             <a:fld id="{5BCAD085-E8A6-8845-BD4E-CB4CCA059FC4}" type="datetimeFigureOut">
               <a:rPr lang="en-US" smtClean="0"/>
-              <a:t>1/27/13</a:t>
+              <a:t>6/30/2026</a:t>
             </a:fld>
             <a:endParaRPr lang="en-US"/>
           </a:p>
@@ -2807,7 +2802,7 @@
           <a:p>
             <a:fld id="{C1FF6DA9-008F-8B48-92A6-B652298478BF}" type="slidenum">
               <a:rPr lang="en-US" smtClean="0"/>
-              <a:t>‹#›</a:t>
+              <a:t>‹Nr.›</a:t>
             </a:fld>
             <a:endParaRPr lang="en-US"/>
           </a:p>
@@ -3088,7 +3083,7 @@
 </file>
 
 <file path=ppt/slides/slide1.xml><?xml version="1.0" encoding="utf-8"?>
-<p:sld xmlns:a="http://schemas.openxmlformats.org/drawingml/2006/main" xmlns:p="http://schemas.openxmlformats.org/presentationml/2006/main" xmlns:r="http://schemas.openxmlformats.org/officeDocument/2006/relationships">
+<p:sld xmlns:a="http://schemas.openxmlformats.org/drawingml/2006/main" xmlns:r="http://schemas.openxmlformats.org/officeDocument/2006/relationships" xmlns:p="http://schemas.openxmlformats.org/presentationml/2006/main">
   <p:cSld>
     <p:spTree>
       <p:nvGrpSpPr>
@@ -3096,7 +3091,14 @@
         <p:cNvGrpSpPr/>
         <p:nvPr/>
       </p:nvGrpSpPr>
-      <p:grpSpPr/>
+      <p:grpSpPr>
+        <a:xfrm>
+          <a:off x="0" y="0"/>
+          <a:ext cx="0" cy="0"/>
+          <a:chOff x="0" y="0"/>
+          <a:chExt cx="0" cy="0"/>
+        </a:xfrm>
+      </p:grpSpPr>
       <p:pic>
         <p:nvPicPr>
           <p:cNvPr id="2" name="Picture 1" descr="image-1-1.png"/>
@@ -3138,7 +3140,7 @@
           <a:noFill/>
         </p:spPr>
         <p:txBody>
-          <a:bodyPr wrap="square" lIns="18288" rIns="18288" tIns="18288" bIns="18288" anchor="t">
+          <a:bodyPr wrap="square" lIns="18288" tIns="18288" rIns="18288" bIns="18288" anchor="t">
             <a:spAutoFit/>
           </a:bodyPr>
           <a:lstStyle/>
@@ -3174,7 +3176,7 @@
           <a:noFill/>
         </p:spPr>
         <p:txBody>
-          <a:bodyPr wrap="square" lIns="18288" rIns="18288" tIns="18288" bIns="18288" anchor="t">
+          <a:bodyPr wrap="square" lIns="18288" tIns="18288" rIns="18288" bIns="18288" anchor="t">
             <a:spAutoFit/>
           </a:bodyPr>
           <a:lstStyle/>
@@ -3214,7 +3216,7 @@
           <a:noFill/>
         </p:spPr>
         <p:txBody>
-          <a:bodyPr wrap="square" lIns="18288" rIns="18288" tIns="18288" bIns="18288" anchor="t">
+          <a:bodyPr wrap="square" lIns="18288" tIns="18288" rIns="18288" bIns="18288" anchor="t">
             <a:spAutoFit/>
           </a:bodyPr>
           <a:lstStyle/>
@@ -3250,7 +3252,7 @@
           <a:noFill/>
         </p:spPr>
         <p:txBody>
-          <a:bodyPr wrap="square" lIns="18288" rIns="18288" tIns="18288" bIns="18288" anchor="t">
+          <a:bodyPr wrap="square" lIns="18288" tIns="18288" rIns="18288" bIns="18288" anchor="t">
             <a:spAutoFit/>
           </a:bodyPr>
           <a:lstStyle/>
@@ -3286,7 +3288,7 @@
           <a:noFill/>
         </p:spPr>
         <p:txBody>
-          <a:bodyPr wrap="square" lIns="18288" rIns="18288" tIns="18288" bIns="18288" anchor="t">
+          <a:bodyPr wrap="square" lIns="18288" tIns="18288" rIns="18288" bIns="18288" anchor="t">
             <a:spAutoFit/>
           </a:bodyPr>
           <a:lstStyle/>
@@ -3322,7 +3324,7 @@
           <a:noFill/>
         </p:spPr>
         <p:txBody>
-          <a:bodyPr wrap="square" lIns="18288" rIns="18288" tIns="18288" bIns="18288" anchor="t">
+          <a:bodyPr wrap="square" lIns="18288" tIns="18288" rIns="18288" bIns="18288" anchor="t">
             <a:spAutoFit/>
           </a:bodyPr>
           <a:lstStyle/>
@@ -3358,7 +3360,7 @@
           <a:noFill/>
         </p:spPr>
         <p:txBody>
-          <a:bodyPr wrap="square" lIns="18288" rIns="18288" tIns="18288" bIns="18288" anchor="t">
+          <a:bodyPr wrap="square" lIns="18288" tIns="18288" rIns="18288" bIns="18288" anchor="t">
             <a:spAutoFit/>
           </a:bodyPr>
           <a:lstStyle/>
@@ -3394,7 +3396,7 @@
           <a:noFill/>
         </p:spPr>
         <p:txBody>
-          <a:bodyPr wrap="square" lIns="18288" rIns="18288" tIns="18288" bIns="18288" anchor="t">
+          <a:bodyPr wrap="square" lIns="18288" tIns="18288" rIns="18288" bIns="18288" anchor="t">
             <a:spAutoFit/>
           </a:bodyPr>
           <a:lstStyle/>
@@ -3430,7 +3432,7 @@
           <a:noFill/>
         </p:spPr>
         <p:txBody>
-          <a:bodyPr wrap="square" lIns="18288" rIns="18288" tIns="18288" bIns="18288" anchor="t">
+          <a:bodyPr wrap="square" lIns="18288" tIns="18288" rIns="18288" bIns="18288" anchor="t">
             <a:spAutoFit/>
           </a:bodyPr>
           <a:lstStyle/>
@@ -3466,7 +3468,7 @@
           <a:noFill/>
         </p:spPr>
         <p:txBody>
-          <a:bodyPr wrap="square" lIns="18288" rIns="18288" tIns="18288" bIns="18288" anchor="t">
+          <a:bodyPr wrap="square" lIns="18288" tIns="18288" rIns="18288" bIns="18288" anchor="t">
             <a:spAutoFit/>
           </a:bodyPr>
           <a:lstStyle/>
@@ -3502,7 +3504,7 @@
           <a:noFill/>
         </p:spPr>
         <p:txBody>
-          <a:bodyPr wrap="square" lIns="18288" rIns="18288" tIns="18288" bIns="18288" anchor="t">
+          <a:bodyPr wrap="square" lIns="18288" tIns="18288" rIns="18288" bIns="18288" anchor="t">
             <a:spAutoFit/>
           </a:bodyPr>
           <a:lstStyle/>
@@ -3530,7 +3532,7 @@
 </file>
 
 <file path=ppt/slides/slide10.xml><?xml version="1.0" encoding="utf-8"?>
-<p:sld xmlns:a="http://schemas.openxmlformats.org/drawingml/2006/main" xmlns:p="http://schemas.openxmlformats.org/presentationml/2006/main" xmlns:r="http://schemas.openxmlformats.org/officeDocument/2006/relationships">
+<p:sld xmlns:a="http://schemas.openxmlformats.org/drawingml/2006/main" xmlns:r="http://schemas.openxmlformats.org/officeDocument/2006/relationships" xmlns:p="http://schemas.openxmlformats.org/presentationml/2006/main">
   <p:cSld>
     <p:spTree>
       <p:nvGrpSpPr>
@@ -3538,7 +3540,14 @@
         <p:cNvGrpSpPr/>
         <p:nvPr/>
       </p:nvGrpSpPr>
-      <p:grpSpPr/>
+      <p:grpSpPr>
+        <a:xfrm>
+          <a:off x="0" y="0"/>
+          <a:ext cx="0" cy="0"/>
+          <a:chOff x="0" y="0"/>
+          <a:chExt cx="0" cy="0"/>
+        </a:xfrm>
+      </p:grpSpPr>
       <p:sp>
         <p:nvSpPr>
           <p:cNvPr id="2" name="TextBox 1"/>
@@ -3556,7 +3565,7 @@
           <a:noFill/>
         </p:spPr>
         <p:txBody>
-          <a:bodyPr wrap="square" lIns="18288" rIns="18288" tIns="18288" bIns="18288" anchor="t">
+          <a:bodyPr wrap="square" lIns="18288" tIns="18288" rIns="18288" bIns="18288" anchor="t">
             <a:spAutoFit/>
           </a:bodyPr>
           <a:lstStyle/>
@@ -3592,7 +3601,7 @@
           <a:noFill/>
         </p:spPr>
         <p:txBody>
-          <a:bodyPr wrap="square" lIns="18288" rIns="18288" tIns="18288" bIns="18288" anchor="t">
+          <a:bodyPr wrap="square" lIns="18288" tIns="18288" rIns="18288" bIns="18288" anchor="t">
             <a:spAutoFit/>
           </a:bodyPr>
           <a:lstStyle/>
@@ -3652,7 +3661,7 @@
           <a:noFill/>
         </p:spPr>
         <p:txBody>
-          <a:bodyPr wrap="square" lIns="18288" rIns="18288" tIns="18288" bIns="18288" anchor="t">
+          <a:bodyPr wrap="square" lIns="18288" tIns="18288" rIns="18288" bIns="18288" anchor="t">
             <a:spAutoFit/>
           </a:bodyPr>
           <a:lstStyle/>
@@ -3688,7 +3697,7 @@
           <a:noFill/>
         </p:spPr>
         <p:txBody>
-          <a:bodyPr wrap="square" lIns="18288" rIns="18288" tIns="18288" bIns="18288" anchor="t">
+          <a:bodyPr wrap="square" lIns="18288" tIns="18288" rIns="18288" bIns="18288" anchor="t">
             <a:spAutoFit/>
           </a:bodyPr>
           <a:lstStyle/>
@@ -3724,7 +3733,7 @@
           <a:noFill/>
         </p:spPr>
         <p:txBody>
-          <a:bodyPr wrap="square" lIns="18288" rIns="18288" tIns="18288" bIns="18288" anchor="t">
+          <a:bodyPr wrap="square" lIns="18288" tIns="18288" rIns="18288" bIns="18288" anchor="t">
             <a:spAutoFit/>
           </a:bodyPr>
           <a:lstStyle/>
@@ -3760,7 +3769,7 @@
           <a:noFill/>
         </p:spPr>
         <p:txBody>
-          <a:bodyPr wrap="square" lIns="18288" rIns="18288" tIns="18288" bIns="18288" anchor="t">
+          <a:bodyPr wrap="square" lIns="18288" tIns="18288" rIns="18288" bIns="18288" anchor="t">
             <a:spAutoFit/>
           </a:bodyPr>
           <a:lstStyle/>
@@ -3796,7 +3805,7 @@
           <a:noFill/>
         </p:spPr>
         <p:txBody>
-          <a:bodyPr wrap="square" lIns="18288" rIns="18288" tIns="18288" bIns="18288" anchor="t">
+          <a:bodyPr wrap="square" lIns="18288" tIns="18288" rIns="18288" bIns="18288" anchor="t">
             <a:spAutoFit/>
           </a:bodyPr>
           <a:lstStyle/>
@@ -3832,7 +3841,7 @@
           <a:noFill/>
         </p:spPr>
         <p:txBody>
-          <a:bodyPr wrap="square" lIns="18288" rIns="18288" tIns="18288" bIns="18288" anchor="t">
+          <a:bodyPr wrap="square" lIns="18288" tIns="18288" rIns="18288" bIns="18288" anchor="t">
             <a:spAutoFit/>
           </a:bodyPr>
           <a:lstStyle/>
@@ -3868,7 +3877,7 @@
           <a:noFill/>
         </p:spPr>
         <p:txBody>
-          <a:bodyPr wrap="square" lIns="18288" rIns="18288" tIns="18288" bIns="18288" anchor="t">
+          <a:bodyPr wrap="square" lIns="18288" tIns="18288" rIns="18288" bIns="18288" anchor="t">
             <a:spAutoFit/>
           </a:bodyPr>
           <a:lstStyle/>
@@ -3904,7 +3913,7 @@
           <a:noFill/>
         </p:spPr>
         <p:txBody>
-          <a:bodyPr wrap="square" lIns="18288" rIns="18288" tIns="18288" bIns="18288" anchor="t">
+          <a:bodyPr wrap="square" lIns="18288" tIns="18288" rIns="18288" bIns="18288" anchor="t">
             <a:spAutoFit/>
           </a:bodyPr>
           <a:lstStyle/>
@@ -3940,7 +3949,7 @@
           <a:noFill/>
         </p:spPr>
         <p:txBody>
-          <a:bodyPr wrap="square" lIns="18288" rIns="18288" tIns="18288" bIns="18288" anchor="t">
+          <a:bodyPr wrap="square" lIns="18288" tIns="18288" rIns="18288" bIns="18288" anchor="t">
             <a:spAutoFit/>
           </a:bodyPr>
           <a:lstStyle/>
@@ -3976,7 +3985,7 @@
           <a:noFill/>
         </p:spPr>
         <p:txBody>
-          <a:bodyPr wrap="square" lIns="18288" rIns="18288" tIns="18288" bIns="18288" anchor="t">
+          <a:bodyPr wrap="square" lIns="18288" tIns="18288" rIns="18288" bIns="18288" anchor="t">
             <a:spAutoFit/>
           </a:bodyPr>
           <a:lstStyle/>
@@ -4012,7 +4021,7 @@
           <a:noFill/>
         </p:spPr>
         <p:txBody>
-          <a:bodyPr wrap="square" lIns="18288" rIns="18288" tIns="18288" bIns="18288" anchor="t">
+          <a:bodyPr wrap="square" lIns="18288" tIns="18288" rIns="18288" bIns="18288" anchor="t">
             <a:spAutoFit/>
           </a:bodyPr>
           <a:lstStyle/>
@@ -4048,7 +4057,7 @@
           <a:noFill/>
         </p:spPr>
         <p:txBody>
-          <a:bodyPr wrap="square" lIns="18288" rIns="18288" tIns="18288" bIns="18288" anchor="t">
+          <a:bodyPr wrap="square" lIns="18288" tIns="18288" rIns="18288" bIns="18288" anchor="t">
             <a:spAutoFit/>
           </a:bodyPr>
           <a:lstStyle/>
@@ -4084,7 +4093,7 @@
           <a:noFill/>
         </p:spPr>
         <p:txBody>
-          <a:bodyPr wrap="square" lIns="18288" rIns="18288" tIns="18288" bIns="18288" anchor="t">
+          <a:bodyPr wrap="square" lIns="18288" tIns="18288" rIns="18288" bIns="18288" anchor="t">
             <a:spAutoFit/>
           </a:bodyPr>
           <a:lstStyle/>
@@ -4120,7 +4129,7 @@
           <a:noFill/>
         </p:spPr>
         <p:txBody>
-          <a:bodyPr wrap="square" lIns="18288" rIns="18288" tIns="18288" bIns="18288" anchor="t">
+          <a:bodyPr wrap="square" lIns="18288" tIns="18288" rIns="18288" bIns="18288" anchor="t">
             <a:spAutoFit/>
           </a:bodyPr>
           <a:lstStyle/>
@@ -4148,7 +4157,7 @@
 </file>
 
 <file path=ppt/slides/slide2.xml><?xml version="1.0" encoding="utf-8"?>
-<p:sld xmlns:a="http://schemas.openxmlformats.org/drawingml/2006/main" xmlns:p="http://schemas.openxmlformats.org/presentationml/2006/main" xmlns:r="http://schemas.openxmlformats.org/officeDocument/2006/relationships">
+<p:sld xmlns:a="http://schemas.openxmlformats.org/drawingml/2006/main" xmlns:r="http://schemas.openxmlformats.org/officeDocument/2006/relationships" xmlns:p="http://schemas.openxmlformats.org/presentationml/2006/main">
   <p:cSld>
     <p:spTree>
       <p:nvGrpSpPr>
@@ -4156,7 +4165,14 @@
         <p:cNvGrpSpPr/>
         <p:nvPr/>
       </p:nvGrpSpPr>
-      <p:grpSpPr/>
+      <p:grpSpPr>
+        <a:xfrm>
+          <a:off x="0" y="0"/>
+          <a:ext cx="0" cy="0"/>
+          <a:chOff x="0" y="0"/>
+          <a:chExt cx="0" cy="0"/>
+        </a:xfrm>
+      </p:grpSpPr>
       <p:sp>
         <p:nvSpPr>
           <p:cNvPr id="2" name="TextBox 1"/>
@@ -4174,7 +4190,7 @@
           <a:noFill/>
         </p:spPr>
         <p:txBody>
-          <a:bodyPr wrap="square" lIns="18288" rIns="18288" tIns="18288" bIns="18288" anchor="t">
+          <a:bodyPr wrap="square" lIns="18288" tIns="18288" rIns="18288" bIns="18288" anchor="t">
             <a:spAutoFit/>
           </a:bodyPr>
           <a:lstStyle/>
@@ -4210,7 +4226,7 @@
           <a:noFill/>
         </p:spPr>
         <p:txBody>
-          <a:bodyPr wrap="square" lIns="18288" rIns="18288" tIns="18288" bIns="18288" anchor="t">
+          <a:bodyPr wrap="square" lIns="18288" tIns="18288" rIns="18288" bIns="18288" anchor="t">
             <a:spAutoFit/>
           </a:bodyPr>
           <a:lstStyle/>
@@ -4270,7 +4286,7 @@
           <a:noFill/>
         </p:spPr>
         <p:txBody>
-          <a:bodyPr wrap="square" lIns="18288" rIns="18288" tIns="18288" bIns="18288" anchor="t">
+          <a:bodyPr wrap="square" lIns="18288" tIns="18288" rIns="18288" bIns="18288" anchor="t">
             <a:spAutoFit/>
           </a:bodyPr>
           <a:lstStyle/>
@@ -4306,7 +4322,7 @@
           <a:noFill/>
         </p:spPr>
         <p:txBody>
-          <a:bodyPr wrap="square" lIns="18288" rIns="18288" tIns="18288" bIns="18288" anchor="t">
+          <a:bodyPr wrap="square" lIns="18288" tIns="18288" rIns="18288" bIns="18288" anchor="t">
             <a:spAutoFit/>
           </a:bodyPr>
           <a:lstStyle/>
@@ -4342,7 +4358,7 @@
           <a:noFill/>
         </p:spPr>
         <p:txBody>
-          <a:bodyPr wrap="square" lIns="18288" rIns="18288" tIns="18288" bIns="18288" anchor="t">
+          <a:bodyPr wrap="square" lIns="18288" tIns="18288" rIns="18288" bIns="18288" anchor="t">
             <a:spAutoFit/>
           </a:bodyPr>
           <a:lstStyle/>
@@ -4378,7 +4394,7 @@
           <a:noFill/>
         </p:spPr>
         <p:txBody>
-          <a:bodyPr wrap="square" lIns="18288" rIns="18288" tIns="18288" bIns="18288" anchor="t">
+          <a:bodyPr wrap="square" lIns="18288" tIns="18288" rIns="18288" bIns="18288" anchor="t">
             <a:spAutoFit/>
           </a:bodyPr>
           <a:lstStyle/>
@@ -4414,7 +4430,7 @@
           <a:noFill/>
         </p:spPr>
         <p:txBody>
-          <a:bodyPr wrap="square" lIns="18288" rIns="18288" tIns="18288" bIns="18288" anchor="t">
+          <a:bodyPr wrap="square" lIns="18288" tIns="18288" rIns="18288" bIns="18288" anchor="t">
             <a:spAutoFit/>
           </a:bodyPr>
           <a:lstStyle/>
@@ -4450,7 +4466,7 @@
           <a:noFill/>
         </p:spPr>
         <p:txBody>
-          <a:bodyPr wrap="square" lIns="45720" rIns="18288" tIns="0" bIns="0">
+          <a:bodyPr wrap="square" lIns="45720" tIns="0" rIns="18288" bIns="0">
             <a:spAutoFit/>
           </a:bodyPr>
           <a:lstStyle/>
@@ -4537,7 +4553,7 @@
           <a:noFill/>
         </p:spPr>
         <p:txBody>
-          <a:bodyPr wrap="square" lIns="18288" rIns="18288" tIns="18288" bIns="18288" anchor="t">
+          <a:bodyPr wrap="square" lIns="18288" tIns="18288" rIns="18288" bIns="18288" anchor="t">
             <a:spAutoFit/>
           </a:bodyPr>
           <a:lstStyle/>
@@ -4565,7 +4581,7 @@
 </file>
 
 <file path=ppt/slides/slide3.xml><?xml version="1.0" encoding="utf-8"?>
-<p:sld xmlns:a="http://schemas.openxmlformats.org/drawingml/2006/main" xmlns:p="http://schemas.openxmlformats.org/presentationml/2006/main" xmlns:r="http://schemas.openxmlformats.org/officeDocument/2006/relationships">
+<p:sld xmlns:a="http://schemas.openxmlformats.org/drawingml/2006/main" xmlns:r="http://schemas.openxmlformats.org/officeDocument/2006/relationships" xmlns:p="http://schemas.openxmlformats.org/presentationml/2006/main">
   <p:cSld>
     <p:spTree>
       <p:nvGrpSpPr>
@@ -4573,7 +4589,14 @@
         <p:cNvGrpSpPr/>
         <p:nvPr/>
       </p:nvGrpSpPr>
-      <p:grpSpPr/>
+      <p:grpSpPr>
+        <a:xfrm>
+          <a:off x="0" y="0"/>
+          <a:ext cx="0" cy="0"/>
+          <a:chOff x="0" y="0"/>
+          <a:chExt cx="0" cy="0"/>
+        </a:xfrm>
+      </p:grpSpPr>
       <p:sp>
         <p:nvSpPr>
           <p:cNvPr id="2" name="TextBox 1"/>
@@ -4591,7 +4614,7 @@
           <a:noFill/>
         </p:spPr>
         <p:txBody>
-          <a:bodyPr wrap="square" lIns="18288" rIns="18288" tIns="18288" bIns="18288" anchor="t">
+          <a:bodyPr wrap="square" lIns="18288" tIns="18288" rIns="18288" bIns="18288" anchor="t">
             <a:spAutoFit/>
           </a:bodyPr>
           <a:lstStyle/>
@@ -4627,7 +4650,7 @@
           <a:noFill/>
         </p:spPr>
         <p:txBody>
-          <a:bodyPr wrap="square" lIns="18288" rIns="18288" tIns="18288" bIns="18288" anchor="t">
+          <a:bodyPr wrap="square" lIns="18288" tIns="18288" rIns="18288" bIns="18288" anchor="t">
             <a:spAutoFit/>
           </a:bodyPr>
           <a:lstStyle/>
@@ -4687,7 +4710,7 @@
           <a:noFill/>
         </p:spPr>
         <p:txBody>
-          <a:bodyPr wrap="square" lIns="18288" rIns="18288" tIns="18288" bIns="18288" anchor="t">
+          <a:bodyPr wrap="square" lIns="18288" tIns="18288" rIns="18288" bIns="18288" anchor="t">
             <a:spAutoFit/>
           </a:bodyPr>
           <a:lstStyle/>
@@ -4723,7 +4746,7 @@
           <a:noFill/>
         </p:spPr>
         <p:txBody>
-          <a:bodyPr wrap="square" lIns="18288" rIns="18288" tIns="18288" bIns="18288" anchor="t">
+          <a:bodyPr wrap="square" lIns="18288" tIns="18288" rIns="18288" bIns="18288" anchor="t">
             <a:spAutoFit/>
           </a:bodyPr>
           <a:lstStyle/>
@@ -4759,7 +4782,7 @@
           <a:noFill/>
         </p:spPr>
         <p:txBody>
-          <a:bodyPr wrap="square" lIns="18288" rIns="18288" tIns="18288" bIns="18288" anchor="t">
+          <a:bodyPr wrap="square" lIns="18288" tIns="18288" rIns="18288" bIns="18288" anchor="t">
             <a:spAutoFit/>
           </a:bodyPr>
           <a:lstStyle/>
@@ -4795,7 +4818,7 @@
           <a:noFill/>
         </p:spPr>
         <p:txBody>
-          <a:bodyPr wrap="square" lIns="18288" rIns="18288" tIns="18288" bIns="18288" anchor="t">
+          <a:bodyPr wrap="square" lIns="18288" tIns="18288" rIns="18288" bIns="18288" anchor="t">
             <a:spAutoFit/>
           </a:bodyPr>
           <a:lstStyle/>
@@ -4831,7 +4854,7 @@
           <a:noFill/>
         </p:spPr>
         <p:txBody>
-          <a:bodyPr wrap="square" lIns="18288" rIns="18288" tIns="18288" bIns="18288" anchor="t">
+          <a:bodyPr wrap="square" lIns="18288" tIns="18288" rIns="18288" bIns="18288" anchor="t">
             <a:spAutoFit/>
           </a:bodyPr>
           <a:lstStyle/>
@@ -4867,7 +4890,7 @@
           <a:noFill/>
         </p:spPr>
         <p:txBody>
-          <a:bodyPr wrap="square" lIns="18288" rIns="18288" tIns="18288" bIns="18288" anchor="t">
+          <a:bodyPr wrap="square" lIns="18288" tIns="18288" rIns="18288" bIns="18288" anchor="t">
             <a:spAutoFit/>
           </a:bodyPr>
           <a:lstStyle/>
@@ -4903,7 +4926,7 @@
           <a:noFill/>
         </p:spPr>
         <p:txBody>
-          <a:bodyPr wrap="square" lIns="18288" rIns="18288" tIns="18288" bIns="18288" anchor="t">
+          <a:bodyPr wrap="square" lIns="18288" tIns="18288" rIns="18288" bIns="18288" anchor="t">
             <a:spAutoFit/>
           </a:bodyPr>
           <a:lstStyle/>
@@ -4939,7 +4962,7 @@
           <a:noFill/>
         </p:spPr>
         <p:txBody>
-          <a:bodyPr wrap="square" lIns="18288" rIns="18288" tIns="18288" bIns="18288" anchor="t">
+          <a:bodyPr wrap="square" lIns="18288" tIns="18288" rIns="18288" bIns="18288" anchor="t">
             <a:spAutoFit/>
           </a:bodyPr>
           <a:lstStyle/>
@@ -4975,7 +4998,7 @@
           <a:noFill/>
         </p:spPr>
         <p:txBody>
-          <a:bodyPr wrap="square" lIns="18288" rIns="18288" tIns="18288" bIns="18288" anchor="t">
+          <a:bodyPr wrap="square" lIns="18288" tIns="18288" rIns="18288" bIns="18288" anchor="t">
             <a:spAutoFit/>
           </a:bodyPr>
           <a:lstStyle/>
@@ -5011,7 +5034,7 @@
           <a:noFill/>
         </p:spPr>
         <p:txBody>
-          <a:bodyPr wrap="square" lIns="18288" rIns="18288" tIns="18288" bIns="18288" anchor="t">
+          <a:bodyPr wrap="square" lIns="18288" tIns="18288" rIns="18288" bIns="18288" anchor="t">
             <a:spAutoFit/>
           </a:bodyPr>
           <a:lstStyle/>
@@ -5047,7 +5070,7 @@
           <a:noFill/>
         </p:spPr>
         <p:txBody>
-          <a:bodyPr wrap="square" lIns="18288" rIns="18288" tIns="18288" bIns="18288" anchor="t">
+          <a:bodyPr wrap="square" lIns="18288" tIns="18288" rIns="18288" bIns="18288" anchor="t">
             <a:spAutoFit/>
           </a:bodyPr>
           <a:lstStyle/>
@@ -5083,7 +5106,7 @@
           <a:noFill/>
         </p:spPr>
         <p:txBody>
-          <a:bodyPr wrap="square" lIns="18288" rIns="18288" tIns="18288" bIns="18288" anchor="t">
+          <a:bodyPr wrap="square" lIns="18288" tIns="18288" rIns="18288" bIns="18288" anchor="t">
             <a:spAutoFit/>
           </a:bodyPr>
           <a:lstStyle/>
@@ -5119,7 +5142,7 @@
           <a:noFill/>
         </p:spPr>
         <p:txBody>
-          <a:bodyPr wrap="square" lIns="18288" rIns="18288" tIns="18288" bIns="18288" anchor="t">
+          <a:bodyPr wrap="square" lIns="18288" tIns="18288" rIns="18288" bIns="18288" anchor="t">
             <a:spAutoFit/>
           </a:bodyPr>
           <a:lstStyle/>
@@ -5155,7 +5178,7 @@
           <a:noFill/>
         </p:spPr>
         <p:txBody>
-          <a:bodyPr wrap="square" lIns="18288" rIns="18288" tIns="18288" bIns="18288" anchor="t">
+          <a:bodyPr wrap="square" lIns="18288" tIns="18288" rIns="18288" bIns="18288" anchor="t">
             <a:spAutoFit/>
           </a:bodyPr>
           <a:lstStyle/>
@@ -5191,7 +5214,7 @@
           <a:noFill/>
         </p:spPr>
         <p:txBody>
-          <a:bodyPr wrap="square" lIns="18288" rIns="18288" tIns="18288" bIns="18288" anchor="t">
+          <a:bodyPr wrap="square" lIns="18288" tIns="18288" rIns="18288" bIns="18288" anchor="t">
             <a:spAutoFit/>
           </a:bodyPr>
           <a:lstStyle/>
@@ -5227,7 +5250,7 @@
           <a:noFill/>
         </p:spPr>
         <p:txBody>
-          <a:bodyPr wrap="square" lIns="45720" rIns="18288" tIns="0" bIns="0">
+          <a:bodyPr wrap="square" lIns="45720" tIns="0" rIns="18288" bIns="0">
             <a:spAutoFit/>
           </a:bodyPr>
           <a:lstStyle/>
@@ -5298,7 +5321,7 @@
           <a:noFill/>
         </p:spPr>
         <p:txBody>
-          <a:bodyPr wrap="square" lIns="18288" rIns="18288" tIns="18288" bIns="18288" anchor="t">
+          <a:bodyPr wrap="square" lIns="18288" tIns="18288" rIns="18288" bIns="18288" anchor="t">
             <a:spAutoFit/>
           </a:bodyPr>
           <a:lstStyle/>
@@ -5326,7 +5349,7 @@
 </file>
 
 <file path=ppt/slides/slide4.xml><?xml version="1.0" encoding="utf-8"?>
-<p:sld xmlns:a="http://schemas.openxmlformats.org/drawingml/2006/main" xmlns:p="http://schemas.openxmlformats.org/presentationml/2006/main" xmlns:r="http://schemas.openxmlformats.org/officeDocument/2006/relationships">
+<p:sld xmlns:a="http://schemas.openxmlformats.org/drawingml/2006/main" xmlns:r="http://schemas.openxmlformats.org/officeDocument/2006/relationships" xmlns:p="http://schemas.openxmlformats.org/presentationml/2006/main">
   <p:cSld>
     <p:spTree>
       <p:nvGrpSpPr>
@@ -5334,7 +5357,14 @@
         <p:cNvGrpSpPr/>
         <p:nvPr/>
       </p:nvGrpSpPr>
-      <p:grpSpPr/>
+      <p:grpSpPr>
+        <a:xfrm>
+          <a:off x="0" y="0"/>
+          <a:ext cx="0" cy="0"/>
+          <a:chOff x="0" y="0"/>
+          <a:chExt cx="0" cy="0"/>
+        </a:xfrm>
+      </p:grpSpPr>
       <p:sp>
         <p:nvSpPr>
           <p:cNvPr id="2" name="TextBox 1"/>
@@ -5352,7 +5382,7 @@
           <a:noFill/>
         </p:spPr>
         <p:txBody>
-          <a:bodyPr wrap="square" lIns="18288" rIns="18288" tIns="18288" bIns="18288" anchor="t">
+          <a:bodyPr wrap="square" lIns="18288" tIns="18288" rIns="18288" bIns="18288" anchor="t">
             <a:spAutoFit/>
           </a:bodyPr>
           <a:lstStyle/>
@@ -5388,7 +5418,7 @@
           <a:noFill/>
         </p:spPr>
         <p:txBody>
-          <a:bodyPr wrap="square" lIns="18288" rIns="18288" tIns="18288" bIns="18288" anchor="t">
+          <a:bodyPr wrap="square" lIns="18288" tIns="18288" rIns="18288" bIns="18288" anchor="t">
             <a:spAutoFit/>
           </a:bodyPr>
           <a:lstStyle/>
@@ -5448,7 +5478,7 @@
           <a:noFill/>
         </p:spPr>
         <p:txBody>
-          <a:bodyPr wrap="square" lIns="18288" rIns="18288" tIns="18288" bIns="18288" anchor="t">
+          <a:bodyPr wrap="square" lIns="18288" tIns="18288" rIns="18288" bIns="18288" anchor="t">
             <a:spAutoFit/>
           </a:bodyPr>
           <a:lstStyle/>
@@ -5484,7 +5514,7 @@
           <a:noFill/>
         </p:spPr>
         <p:txBody>
-          <a:bodyPr wrap="square" lIns="18288" rIns="18288" tIns="18288" bIns="18288" anchor="t">
+          <a:bodyPr wrap="square" lIns="18288" tIns="18288" rIns="18288" bIns="18288" anchor="t">
             <a:spAutoFit/>
           </a:bodyPr>
           <a:lstStyle/>
@@ -5544,7 +5574,7 @@
           <a:noFill/>
         </p:spPr>
         <p:txBody>
-          <a:bodyPr wrap="square" lIns="18288" rIns="18288" tIns="18288" bIns="18288" anchor="t">
+          <a:bodyPr wrap="square" lIns="18288" tIns="18288" rIns="18288" bIns="18288" anchor="t">
             <a:spAutoFit/>
           </a:bodyPr>
           <a:lstStyle/>
@@ -5580,7 +5610,7 @@
           <a:noFill/>
         </p:spPr>
         <p:txBody>
-          <a:bodyPr wrap="square" lIns="45720" rIns="18288" tIns="0" bIns="0">
+          <a:bodyPr wrap="square" lIns="45720" tIns="0" rIns="18288" bIns="0">
             <a:spAutoFit/>
           </a:bodyPr>
           <a:lstStyle/>
@@ -5659,15 +5689,15 @@
         <p:spPr>
           <a:xfrm>
             <a:off x="685800" y="5623560"/>
-            <a:ext cx="8046720" cy="201168"/>
-          </a:xfrm>
-          <a:prstGeom prst="rect">
-            <a:avLst/>
-          </a:prstGeom>
-          <a:noFill/>
-        </p:spPr>
-        <p:txBody>
-          <a:bodyPr wrap="square" lIns="18288" rIns="18288" tIns="18288" bIns="18288" anchor="t">
+            <a:ext cx="8046720" cy="167738"/>
+          </a:xfrm>
+          <a:prstGeom prst="rect">
+            <a:avLst/>
+          </a:prstGeom>
+          <a:noFill/>
+        </p:spPr>
+        <p:txBody>
+          <a:bodyPr wrap="square" lIns="18288" tIns="18288" rIns="18288" bIns="18288" anchor="t">
             <a:spAutoFit/>
           </a:bodyPr>
           <a:lstStyle/>
@@ -5681,7 +5711,32 @@
               </a:defRPr>
             </a:pPr>
             <a:r>
-              <a:t>Quelle: EEA, Kalenderjahr 2025; gestrichelte Linien = WHO-2021-Jahresrichtwerte.</a:t>
+              <a:rPr dirty="0"/>
+              <a:t>Quelle: EEA, </a:t>
+            </a:r>
+            <a:r>
+              <a:rPr dirty="0" err="1"/>
+              <a:t>Kalenderjahr</a:t>
+            </a:r>
+            <a:r>
+              <a:rPr dirty="0"/>
+              <a:t> 2025; </a:t>
+            </a:r>
+            <a:r>
+              <a:rPr dirty="0" err="1"/>
+              <a:t>gestrichelte</a:t>
+            </a:r>
+            <a:r>
+              <a:rPr dirty="0"/>
+              <a:t> </a:t>
+            </a:r>
+            <a:r>
+              <a:rPr dirty="0" err="1"/>
+              <a:t>Linien</a:t>
+            </a:r>
+            <a:r>
+              <a:rPr dirty="0"/>
+              <a:t> = WHO-2021-Jahresrichtwerte.</a:t>
             </a:r>
           </a:p>
         </p:txBody>
@@ -5703,7 +5758,7 @@
           <a:noFill/>
         </p:spPr>
         <p:txBody>
-          <a:bodyPr wrap="square" lIns="18288" rIns="18288" tIns="18288" bIns="18288" anchor="t">
+          <a:bodyPr wrap="square" lIns="18288" tIns="18288" rIns="18288" bIns="18288" anchor="t">
             <a:spAutoFit/>
           </a:bodyPr>
           <a:lstStyle/>
@@ -5718,6 +5773,56 @@
             </a:pPr>
             <a:r>
               <a:t>Keine Rechtsaussage: WHO = Gesundheits-Orientierung, nicht EU-Grenzwert.</a:t>
+            </a:r>
+          </a:p>
+        </p:txBody>
+      </p:sp>
+      <p:sp>
+        <p:nvSpPr>
+          <p:cNvPr id="12" name="Textfeld 11">
+            <a:extLst>
+              <a:ext uri="{FF2B5EF4-FFF2-40B4-BE49-F238E27FC236}">
+                <a16:creationId xmlns:a16="http://schemas.microsoft.com/office/drawing/2014/main" id="{4A029C35-D66E-413A-9D6A-C539CAE9B1F3}"/>
+              </a:ext>
+            </a:extLst>
+          </p:cNvPr>
+          <p:cNvSpPr txBox="1"/>
+          <p:nvPr/>
+        </p:nvSpPr>
+        <p:spPr>
+          <a:xfrm>
+            <a:off x="622434" y="5887052"/>
+            <a:ext cx="2438488" cy="230832"/>
+          </a:xfrm>
+          <a:prstGeom prst="rect">
+            <a:avLst/>
+          </a:prstGeom>
+          <a:noFill/>
+        </p:spPr>
+        <p:txBody>
+          <a:bodyPr wrap="none" rtlCol="0">
+            <a:spAutoFit/>
+          </a:bodyPr>
+          <a:lstStyle/>
+          <a:p>
+            <a:r>
+              <a:rPr lang="en-GB" sz="900" dirty="0">
+                <a:latin typeface="Aptos"/>
+              </a:rPr>
+              <a:t>Quelle: </a:t>
+            </a:r>
+            <a:r>
+              <a:rPr lang="en-GB" sz="900" dirty="0">
+                <a:latin typeface="Aptos"/>
+                <a:hlinkClick r:id="rId4"/>
+              </a:rPr>
+              <a:t>WHO global air quality guidelines (2021</a:t>
+            </a:r>
+            <a:r>
+              <a:rPr lang="en-GB" sz="900" dirty="0">
+                <a:latin typeface="Aptos"/>
+              </a:rPr>
+              <a:t>)</a:t>
             </a:r>
           </a:p>
         </p:txBody>
@@ -5731,7 +5836,7 @@
 </file>
 
 <file path=ppt/slides/slide5.xml><?xml version="1.0" encoding="utf-8"?>
-<p:sld xmlns:a="http://schemas.openxmlformats.org/drawingml/2006/main" xmlns:p="http://schemas.openxmlformats.org/presentationml/2006/main" xmlns:r="http://schemas.openxmlformats.org/officeDocument/2006/relationships">
+<p:sld xmlns:a="http://schemas.openxmlformats.org/drawingml/2006/main" xmlns:r="http://schemas.openxmlformats.org/officeDocument/2006/relationships" xmlns:p="http://schemas.openxmlformats.org/presentationml/2006/main">
   <p:cSld>
     <p:spTree>
       <p:nvGrpSpPr>
@@ -5739,7 +5844,14 @@
         <p:cNvGrpSpPr/>
         <p:nvPr/>
       </p:nvGrpSpPr>
-      <p:grpSpPr/>
+      <p:grpSpPr>
+        <a:xfrm>
+          <a:off x="0" y="0"/>
+          <a:ext cx="0" cy="0"/>
+          <a:chOff x="0" y="0"/>
+          <a:chExt cx="0" cy="0"/>
+        </a:xfrm>
+      </p:grpSpPr>
       <p:sp>
         <p:nvSpPr>
           <p:cNvPr id="2" name="TextBox 1"/>
@@ -5757,7 +5869,7 @@
           <a:noFill/>
         </p:spPr>
         <p:txBody>
-          <a:bodyPr wrap="square" lIns="18288" rIns="18288" tIns="18288" bIns="18288" anchor="t">
+          <a:bodyPr wrap="square" lIns="18288" tIns="18288" rIns="18288" bIns="18288" anchor="t">
             <a:spAutoFit/>
           </a:bodyPr>
           <a:lstStyle/>
@@ -5793,7 +5905,7 @@
           <a:noFill/>
         </p:spPr>
         <p:txBody>
-          <a:bodyPr wrap="square" lIns="18288" rIns="18288" tIns="18288" bIns="18288" anchor="t">
+          <a:bodyPr wrap="square" lIns="18288" tIns="18288" rIns="18288" bIns="18288" anchor="t">
             <a:spAutoFit/>
           </a:bodyPr>
           <a:lstStyle/>
@@ -5853,7 +5965,7 @@
           <a:noFill/>
         </p:spPr>
         <p:txBody>
-          <a:bodyPr wrap="square" lIns="18288" rIns="18288" tIns="18288" bIns="18288" anchor="t">
+          <a:bodyPr wrap="square" lIns="18288" tIns="18288" rIns="18288" bIns="18288" anchor="t">
             <a:spAutoFit/>
           </a:bodyPr>
           <a:lstStyle/>
@@ -5889,7 +6001,7 @@
           <a:noFill/>
         </p:spPr>
         <p:txBody>
-          <a:bodyPr wrap="square" lIns="18288" rIns="18288" tIns="18288" bIns="18288" anchor="t">
+          <a:bodyPr wrap="square" lIns="18288" tIns="18288" rIns="18288" bIns="18288" anchor="t">
             <a:spAutoFit/>
           </a:bodyPr>
           <a:lstStyle/>
@@ -5949,7 +6061,7 @@
           <a:noFill/>
         </p:spPr>
         <p:txBody>
-          <a:bodyPr wrap="square" lIns="18288" rIns="18288" tIns="18288" bIns="18288" anchor="t">
+          <a:bodyPr wrap="square" lIns="18288" tIns="18288" rIns="18288" bIns="18288" anchor="t">
             <a:spAutoFit/>
           </a:bodyPr>
           <a:lstStyle/>
@@ -5985,7 +6097,7 @@
           <a:noFill/>
         </p:spPr>
         <p:txBody>
-          <a:bodyPr wrap="square" lIns="45720" rIns="18288" tIns="0" bIns="0">
+          <a:bodyPr wrap="square" lIns="45720" tIns="0" rIns="18288" bIns="0">
             <a:spAutoFit/>
           </a:bodyPr>
           <a:lstStyle/>
@@ -6072,7 +6184,7 @@
           <a:noFill/>
         </p:spPr>
         <p:txBody>
-          <a:bodyPr wrap="square" lIns="18288" rIns="18288" tIns="18288" bIns="18288" anchor="t">
+          <a:bodyPr wrap="square" lIns="18288" tIns="18288" rIns="18288" bIns="18288" anchor="t">
             <a:spAutoFit/>
           </a:bodyPr>
           <a:lstStyle/>
@@ -6100,7 +6212,7 @@
 </file>
 
 <file path=ppt/slides/slide6.xml><?xml version="1.0" encoding="utf-8"?>
-<p:sld xmlns:a="http://schemas.openxmlformats.org/drawingml/2006/main" xmlns:p="http://schemas.openxmlformats.org/presentationml/2006/main" xmlns:r="http://schemas.openxmlformats.org/officeDocument/2006/relationships">
+<p:sld xmlns:a="http://schemas.openxmlformats.org/drawingml/2006/main" xmlns:r="http://schemas.openxmlformats.org/officeDocument/2006/relationships" xmlns:p="http://schemas.openxmlformats.org/presentationml/2006/main">
   <p:cSld>
     <p:spTree>
       <p:nvGrpSpPr>
@@ -6108,7 +6220,14 @@
         <p:cNvGrpSpPr/>
         <p:nvPr/>
       </p:nvGrpSpPr>
-      <p:grpSpPr/>
+      <p:grpSpPr>
+        <a:xfrm>
+          <a:off x="0" y="0"/>
+          <a:ext cx="0" cy="0"/>
+          <a:chOff x="0" y="0"/>
+          <a:chExt cx="0" cy="0"/>
+        </a:xfrm>
+      </p:grpSpPr>
       <p:sp>
         <p:nvSpPr>
           <p:cNvPr id="2" name="TextBox 1"/>
@@ -6126,7 +6245,7 @@
           <a:noFill/>
         </p:spPr>
         <p:txBody>
-          <a:bodyPr wrap="square" lIns="18288" rIns="18288" tIns="18288" bIns="18288" anchor="t">
+          <a:bodyPr wrap="square" lIns="18288" tIns="18288" rIns="18288" bIns="18288" anchor="t">
             <a:spAutoFit/>
           </a:bodyPr>
           <a:lstStyle/>
@@ -6162,7 +6281,7 @@
           <a:noFill/>
         </p:spPr>
         <p:txBody>
-          <a:bodyPr wrap="square" lIns="18288" rIns="18288" tIns="18288" bIns="18288" anchor="t">
+          <a:bodyPr wrap="square" lIns="18288" tIns="18288" rIns="18288" bIns="18288" anchor="t">
             <a:spAutoFit/>
           </a:bodyPr>
           <a:lstStyle/>
@@ -6222,7 +6341,7 @@
           <a:noFill/>
         </p:spPr>
         <p:txBody>
-          <a:bodyPr wrap="square" lIns="18288" rIns="18288" tIns="18288" bIns="18288" anchor="t">
+          <a:bodyPr wrap="square" lIns="18288" tIns="18288" rIns="18288" bIns="18288" anchor="t">
             <a:spAutoFit/>
           </a:bodyPr>
           <a:lstStyle/>
@@ -6258,7 +6377,7 @@
           <a:noFill/>
         </p:spPr>
         <p:txBody>
-          <a:bodyPr wrap="square" lIns="18288" rIns="18288" tIns="18288" bIns="18288" anchor="t">
+          <a:bodyPr wrap="square" lIns="18288" tIns="18288" rIns="18288" bIns="18288" anchor="t">
             <a:spAutoFit/>
           </a:bodyPr>
           <a:lstStyle/>
@@ -6342,7 +6461,7 @@
           <a:noFill/>
         </p:spPr>
         <p:txBody>
-          <a:bodyPr wrap="square" lIns="18288" rIns="18288" tIns="18288" bIns="18288" anchor="t">
+          <a:bodyPr wrap="square" lIns="18288" tIns="18288" rIns="18288" bIns="18288" anchor="t">
             <a:spAutoFit/>
           </a:bodyPr>
           <a:lstStyle/>
@@ -6378,7 +6497,7 @@
           <a:noFill/>
         </p:spPr>
         <p:txBody>
-          <a:bodyPr wrap="square" lIns="45720" rIns="18288" tIns="0" bIns="0">
+          <a:bodyPr wrap="square" lIns="45720" tIns="0" rIns="18288" bIns="0">
             <a:spAutoFit/>
           </a:bodyPr>
           <a:lstStyle/>
@@ -6433,7 +6552,7 @@
           <a:noFill/>
         </p:spPr>
         <p:txBody>
-          <a:bodyPr wrap="square" lIns="18288" rIns="18288" tIns="18288" bIns="18288" anchor="t">
+          <a:bodyPr wrap="square" lIns="18288" tIns="18288" rIns="18288" bIns="18288" anchor="t">
             <a:spAutoFit/>
           </a:bodyPr>
           <a:lstStyle/>
@@ -6469,7 +6588,7 @@
           <a:noFill/>
         </p:spPr>
         <p:txBody>
-          <a:bodyPr wrap="square" lIns="45720" rIns="18288" tIns="0" bIns="0">
+          <a:bodyPr wrap="square" lIns="45720" tIns="0" rIns="18288" bIns="0">
             <a:spAutoFit/>
           </a:bodyPr>
           <a:lstStyle/>
@@ -6524,7 +6643,7 @@
           <a:noFill/>
         </p:spPr>
         <p:txBody>
-          <a:bodyPr wrap="square" lIns="18288" rIns="18288" tIns="18288" bIns="18288" anchor="t">
+          <a:bodyPr wrap="square" lIns="18288" tIns="18288" rIns="18288" bIns="18288" anchor="t">
             <a:spAutoFit/>
           </a:bodyPr>
           <a:lstStyle/>
@@ -6552,7 +6671,7 @@
 </file>
 
 <file path=ppt/slides/slide7.xml><?xml version="1.0" encoding="utf-8"?>
-<p:sld xmlns:a="http://schemas.openxmlformats.org/drawingml/2006/main" xmlns:p="http://schemas.openxmlformats.org/presentationml/2006/main" xmlns:r="http://schemas.openxmlformats.org/officeDocument/2006/relationships">
+<p:sld xmlns:a="http://schemas.openxmlformats.org/drawingml/2006/main" xmlns:r="http://schemas.openxmlformats.org/officeDocument/2006/relationships" xmlns:p="http://schemas.openxmlformats.org/presentationml/2006/main">
   <p:cSld>
     <p:spTree>
       <p:nvGrpSpPr>
@@ -6560,7 +6679,14 @@
         <p:cNvGrpSpPr/>
         <p:nvPr/>
       </p:nvGrpSpPr>
-      <p:grpSpPr/>
+      <p:grpSpPr>
+        <a:xfrm>
+          <a:off x="0" y="0"/>
+          <a:ext cx="0" cy="0"/>
+          <a:chOff x="0" y="0"/>
+          <a:chExt cx="0" cy="0"/>
+        </a:xfrm>
+      </p:grpSpPr>
       <p:sp>
         <p:nvSpPr>
           <p:cNvPr id="2" name="TextBox 1"/>
@@ -6578,7 +6704,7 @@
           <a:noFill/>
         </p:spPr>
         <p:txBody>
-          <a:bodyPr wrap="square" lIns="18288" rIns="18288" tIns="18288" bIns="18288" anchor="t">
+          <a:bodyPr wrap="square" lIns="18288" tIns="18288" rIns="18288" bIns="18288" anchor="t">
             <a:spAutoFit/>
           </a:bodyPr>
           <a:lstStyle/>
@@ -6614,7 +6740,7 @@
           <a:noFill/>
         </p:spPr>
         <p:txBody>
-          <a:bodyPr wrap="square" lIns="18288" rIns="18288" tIns="18288" bIns="18288" anchor="t">
+          <a:bodyPr wrap="square" lIns="18288" tIns="18288" rIns="18288" bIns="18288" anchor="t">
             <a:spAutoFit/>
           </a:bodyPr>
           <a:lstStyle/>
@@ -6674,7 +6800,7 @@
           <a:noFill/>
         </p:spPr>
         <p:txBody>
-          <a:bodyPr wrap="square" lIns="18288" rIns="18288" tIns="18288" bIns="18288" anchor="t">
+          <a:bodyPr wrap="square" lIns="18288" tIns="18288" rIns="18288" bIns="18288" anchor="t">
             <a:spAutoFit/>
           </a:bodyPr>
           <a:lstStyle/>
@@ -6710,7 +6836,7 @@
           <a:noFill/>
         </p:spPr>
         <p:txBody>
-          <a:bodyPr wrap="square" lIns="18288" rIns="18288" tIns="18288" bIns="18288" anchor="t">
+          <a:bodyPr wrap="square" lIns="18288" tIns="18288" rIns="18288" bIns="18288" anchor="t">
             <a:spAutoFit/>
           </a:bodyPr>
           <a:lstStyle/>
@@ -6770,7 +6896,7 @@
           <a:noFill/>
         </p:spPr>
         <p:txBody>
-          <a:bodyPr wrap="square" lIns="18288" rIns="18288" tIns="18288" bIns="18288" anchor="t">
+          <a:bodyPr wrap="square" lIns="18288" tIns="18288" rIns="18288" bIns="18288" anchor="t">
             <a:spAutoFit/>
           </a:bodyPr>
           <a:lstStyle/>
@@ -6806,7 +6932,7 @@
           <a:noFill/>
         </p:spPr>
         <p:txBody>
-          <a:bodyPr wrap="square" lIns="45720" rIns="18288" tIns="0" bIns="0">
+          <a:bodyPr wrap="square" lIns="45720" tIns="0" rIns="18288" bIns="0">
             <a:spAutoFit/>
           </a:bodyPr>
           <a:lstStyle/>
@@ -6893,7 +7019,7 @@
           <a:noFill/>
         </p:spPr>
         <p:txBody>
-          <a:bodyPr wrap="square" lIns="18288" rIns="18288" tIns="18288" bIns="18288" anchor="t">
+          <a:bodyPr wrap="square" lIns="18288" tIns="18288" rIns="18288" bIns="18288" anchor="t">
             <a:spAutoFit/>
           </a:bodyPr>
           <a:lstStyle/>
@@ -6921,7 +7047,7 @@
 </file>
 
 <file path=ppt/slides/slide8.xml><?xml version="1.0" encoding="utf-8"?>
-<p:sld xmlns:a="http://schemas.openxmlformats.org/drawingml/2006/main" xmlns:p="http://schemas.openxmlformats.org/presentationml/2006/main" xmlns:r="http://schemas.openxmlformats.org/officeDocument/2006/relationships">
+<p:sld xmlns:a="http://schemas.openxmlformats.org/drawingml/2006/main" xmlns:r="http://schemas.openxmlformats.org/officeDocument/2006/relationships" xmlns:p="http://schemas.openxmlformats.org/presentationml/2006/main">
   <p:cSld>
     <p:spTree>
       <p:nvGrpSpPr>
@@ -6929,7 +7055,14 @@
         <p:cNvGrpSpPr/>
         <p:nvPr/>
       </p:nvGrpSpPr>
-      <p:grpSpPr/>
+      <p:grpSpPr>
+        <a:xfrm>
+          <a:off x="0" y="0"/>
+          <a:ext cx="0" cy="0"/>
+          <a:chOff x="0" y="0"/>
+          <a:chExt cx="0" cy="0"/>
+        </a:xfrm>
+      </p:grpSpPr>
       <p:sp>
         <p:nvSpPr>
           <p:cNvPr id="2" name="TextBox 1"/>
@@ -6947,7 +7080,7 @@
           <a:noFill/>
         </p:spPr>
         <p:txBody>
-          <a:bodyPr wrap="square" lIns="18288" rIns="18288" tIns="18288" bIns="18288" anchor="t">
+          <a:bodyPr wrap="square" lIns="18288" tIns="18288" rIns="18288" bIns="18288" anchor="t">
             <a:spAutoFit/>
           </a:bodyPr>
           <a:lstStyle/>
@@ -6983,7 +7116,7 @@
           <a:noFill/>
         </p:spPr>
         <p:txBody>
-          <a:bodyPr wrap="square" lIns="18288" rIns="18288" tIns="18288" bIns="18288" anchor="t">
+          <a:bodyPr wrap="square" lIns="18288" tIns="18288" rIns="18288" bIns="18288" anchor="t">
             <a:spAutoFit/>
           </a:bodyPr>
           <a:lstStyle/>
@@ -7043,7 +7176,7 @@
           <a:noFill/>
         </p:spPr>
         <p:txBody>
-          <a:bodyPr wrap="square" lIns="18288" rIns="18288" tIns="18288" bIns="18288" anchor="t">
+          <a:bodyPr wrap="square" lIns="18288" tIns="18288" rIns="18288" bIns="18288" anchor="t">
             <a:spAutoFit/>
           </a:bodyPr>
           <a:lstStyle/>
@@ -7079,7 +7212,7 @@
           <a:noFill/>
         </p:spPr>
         <p:txBody>
-          <a:bodyPr wrap="square" lIns="18288" rIns="18288" tIns="18288" bIns="18288" anchor="t">
+          <a:bodyPr wrap="square" lIns="18288" tIns="18288" rIns="18288" bIns="18288" anchor="t">
             <a:spAutoFit/>
           </a:bodyPr>
           <a:lstStyle/>
@@ -7115,7 +7248,7 @@
           <a:noFill/>
         </p:spPr>
         <p:txBody>
-          <a:bodyPr wrap="square" lIns="18288" rIns="18288" tIns="18288" bIns="18288" anchor="t">
+          <a:bodyPr wrap="square" lIns="18288" tIns="18288" rIns="18288" bIns="18288" anchor="t">
             <a:spAutoFit/>
           </a:bodyPr>
           <a:lstStyle/>
@@ -7151,7 +7284,7 @@
           <a:noFill/>
         </p:spPr>
         <p:txBody>
-          <a:bodyPr wrap="square" lIns="18288" rIns="18288" tIns="18288" bIns="18288" anchor="t">
+          <a:bodyPr wrap="square" lIns="18288" tIns="18288" rIns="18288" bIns="18288" anchor="t">
             <a:spAutoFit/>
           </a:bodyPr>
           <a:lstStyle/>
@@ -7172,7 +7305,7 @@
       </p:sp>
       <p:pic>
         <p:nvPicPr>
-          <p:cNvPr id="9" name="Picture 8" descr="image-9-2.jpeg"/>
+          <p:cNvPr id="9" name="Picture 8"/>
           <p:cNvPicPr>
             <a:picLocks noChangeAspect="1"/>
           </p:cNvPicPr>
@@ -7180,14 +7313,13 @@
         </p:nvPicPr>
         <p:blipFill>
           <a:blip r:embed="rId3"/>
-          <a:stretch>
-            <a:fillRect/>
-          </a:stretch>
+          <a:srcRect/>
+          <a:stretch/>
         </p:blipFill>
         <p:spPr>
           <a:xfrm>
-            <a:off x="685800" y="2834640"/>
-            <a:ext cx="5394960" cy="2697480"/>
+            <a:off x="599970" y="2601467"/>
+            <a:ext cx="5442690" cy="3488437"/>
           </a:xfrm>
           <a:prstGeom prst="rect">
             <a:avLst/>
@@ -7211,7 +7343,7 @@
           <a:noFill/>
         </p:spPr>
         <p:txBody>
-          <a:bodyPr wrap="square" lIns="18288" rIns="18288" tIns="18288" bIns="18288" anchor="t">
+          <a:bodyPr wrap="square" lIns="18288" tIns="18288" rIns="18288" bIns="18288" anchor="t">
             <a:spAutoFit/>
           </a:bodyPr>
           <a:lstStyle/>
@@ -7247,7 +7379,7 @@
           <a:noFill/>
         </p:spPr>
         <p:txBody>
-          <a:bodyPr wrap="square" lIns="45720" rIns="18288" tIns="0" bIns="0">
+          <a:bodyPr wrap="square" lIns="45720" tIns="0" rIns="18288" bIns="0">
             <a:spAutoFit/>
           </a:bodyPr>
           <a:lstStyle/>
@@ -7334,7 +7466,7 @@
           <a:noFill/>
         </p:spPr>
         <p:txBody>
-          <a:bodyPr wrap="square" lIns="18288" rIns="18288" tIns="18288" bIns="18288" anchor="t">
+          <a:bodyPr wrap="square" lIns="18288" tIns="18288" rIns="18288" bIns="18288" anchor="t">
             <a:spAutoFit/>
           </a:bodyPr>
           <a:lstStyle/>
@@ -7370,7 +7502,7 @@
           <a:noFill/>
         </p:spPr>
         <p:txBody>
-          <a:bodyPr wrap="square" lIns="18288" rIns="18288" tIns="18288" bIns="18288" anchor="t">
+          <a:bodyPr wrap="square" lIns="18288" tIns="18288" rIns="18288" bIns="18288" anchor="t">
             <a:spAutoFit/>
           </a:bodyPr>
           <a:lstStyle/>
@@ -7397,7 +7529,7 @@
         </p:nvSpPr>
         <p:spPr>
           <a:xfrm>
-            <a:off x="685800" y="5623560"/>
+            <a:off x="685800" y="6181344"/>
             <a:ext cx="9144000" cy="201168"/>
           </a:xfrm>
           <a:prstGeom prst="rect">
@@ -7406,7 +7538,7 @@
           <a:noFill/>
         </p:spPr>
         <p:txBody>
-          <a:bodyPr wrap="square" lIns="18288" rIns="18288" tIns="18288" bIns="18288" anchor="t">
+          <a:bodyPr wrap="square" lIns="18288" tIns="18288" rIns="18288" bIns="18288" anchor="t">
             <a:spAutoFit/>
           </a:bodyPr>
           <a:lstStyle/>
@@ -7420,7 +7552,56 @@
               </a:defRPr>
             </a:pPr>
             <a:r>
-              <a:t>Die Grafik zeigt den Live-Snapshot; die Einordnung erfolgt gegen den historischen Median in Gold.</a:t>
+              <a:rPr dirty="0"/>
+              <a:t>Die </a:t>
+            </a:r>
+            <a:r>
+              <a:rPr dirty="0" err="1"/>
+              <a:t>Grafik</a:t>
+            </a:r>
+            <a:r>
+              <a:rPr dirty="0"/>
+              <a:t> </a:t>
+            </a:r>
+            <a:r>
+              <a:rPr dirty="0" err="1"/>
+              <a:t>zeigt</a:t>
+            </a:r>
+            <a:r>
+              <a:rPr dirty="0"/>
+              <a:t> den Live-Snapshot; die </a:t>
+            </a:r>
+            <a:r>
+              <a:rPr dirty="0" err="1"/>
+              <a:t>Einordnung</a:t>
+            </a:r>
+            <a:r>
+              <a:rPr dirty="0"/>
+              <a:t> </a:t>
+            </a:r>
+            <a:r>
+              <a:rPr dirty="0" err="1"/>
+              <a:t>erfolgt</a:t>
+            </a:r>
+            <a:r>
+              <a:rPr dirty="0"/>
+              <a:t> </a:t>
+            </a:r>
+            <a:r>
+              <a:rPr dirty="0" err="1"/>
+              <a:t>gegen</a:t>
+            </a:r>
+            <a:r>
+              <a:rPr dirty="0"/>
+              <a:t> den </a:t>
+            </a:r>
+            <a:r>
+              <a:rPr dirty="0" err="1"/>
+              <a:t>historischen</a:t>
+            </a:r>
+            <a:r>
+              <a:rPr dirty="0"/>
+              <a:t> Median in Gold.</a:t>
             </a:r>
           </a:p>
         </p:txBody>
@@ -7434,7 +7615,7 @@
 </file>
 
 <file path=ppt/slides/slide9.xml><?xml version="1.0" encoding="utf-8"?>
-<p:sld xmlns:a="http://schemas.openxmlformats.org/drawingml/2006/main" xmlns:p="http://schemas.openxmlformats.org/presentationml/2006/main" xmlns:r="http://schemas.openxmlformats.org/officeDocument/2006/relationships">
+<p:sld xmlns:a="http://schemas.openxmlformats.org/drawingml/2006/main" xmlns:r="http://schemas.openxmlformats.org/officeDocument/2006/relationships" xmlns:p="http://schemas.openxmlformats.org/presentationml/2006/main">
   <p:cSld>
     <p:spTree>
       <p:nvGrpSpPr>
@@ -7442,7 +7623,14 @@
         <p:cNvGrpSpPr/>
         <p:nvPr/>
       </p:nvGrpSpPr>
-      <p:grpSpPr/>
+      <p:grpSpPr>
+        <a:xfrm>
+          <a:off x="0" y="0"/>
+          <a:ext cx="0" cy="0"/>
+          <a:chOff x="0" y="0"/>
+          <a:chExt cx="0" cy="0"/>
+        </a:xfrm>
+      </p:grpSpPr>
       <p:sp>
         <p:nvSpPr>
           <p:cNvPr id="2" name="TextBox 1"/>
@@ -7460,7 +7648,7 @@
           <a:noFill/>
         </p:spPr>
         <p:txBody>
-          <a:bodyPr wrap="square" lIns="18288" rIns="18288" tIns="18288" bIns="18288" anchor="t">
+          <a:bodyPr wrap="square" lIns="18288" tIns="18288" rIns="18288" bIns="18288" anchor="t">
             <a:spAutoFit/>
           </a:bodyPr>
           <a:lstStyle/>
@@ -7496,7 +7684,7 @@
           <a:noFill/>
         </p:spPr>
         <p:txBody>
-          <a:bodyPr wrap="square" lIns="18288" rIns="18288" tIns="18288" bIns="18288" anchor="t">
+          <a:bodyPr wrap="square" lIns="18288" tIns="18288" rIns="18288" bIns="18288" anchor="t">
             <a:spAutoFit/>
           </a:bodyPr>
           <a:lstStyle/>
@@ -7556,7 +7744,7 @@
           <a:noFill/>
         </p:spPr>
         <p:txBody>
-          <a:bodyPr wrap="square" lIns="18288" rIns="18288" tIns="18288" bIns="18288" anchor="t">
+          <a:bodyPr wrap="square" lIns="18288" tIns="18288" rIns="18288" bIns="18288" anchor="t">
             <a:spAutoFit/>
           </a:bodyPr>
           <a:lstStyle/>
@@ -7592,7 +7780,7 @@
           <a:noFill/>
         </p:spPr>
         <p:txBody>
-          <a:bodyPr wrap="square" lIns="18288" rIns="18288" tIns="18288" bIns="18288" anchor="t">
+          <a:bodyPr wrap="square" lIns="18288" tIns="18288" rIns="18288" bIns="18288" anchor="t">
             <a:spAutoFit/>
           </a:bodyPr>
           <a:lstStyle/>
@@ -7628,7 +7816,7 @@
           <a:noFill/>
         </p:spPr>
         <p:txBody>
-          <a:bodyPr wrap="square" lIns="18288" rIns="18288" tIns="18288" bIns="18288" anchor="t">
+          <a:bodyPr wrap="square" lIns="18288" tIns="18288" rIns="18288" bIns="18288" anchor="t">
             <a:spAutoFit/>
           </a:bodyPr>
           <a:lstStyle/>
@@ -7664,7 +7852,7 @@
           <a:noFill/>
         </p:spPr>
         <p:txBody>
-          <a:bodyPr wrap="square" lIns="18288" rIns="18288" tIns="18288" bIns="18288" anchor="t">
+          <a:bodyPr wrap="square" lIns="18288" tIns="18288" rIns="18288" bIns="18288" anchor="t">
             <a:spAutoFit/>
           </a:bodyPr>
           <a:lstStyle/>
@@ -7700,7 +7888,7 @@
           <a:noFill/>
         </p:spPr>
         <p:txBody>
-          <a:bodyPr wrap="square" lIns="18288" rIns="18288" tIns="18288" bIns="18288" anchor="t">
+          <a:bodyPr wrap="square" lIns="18288" tIns="18288" rIns="18288" bIns="18288" anchor="t">
             <a:spAutoFit/>
           </a:bodyPr>
           <a:lstStyle/>
@@ -7736,7 +7924,7 @@
           <a:noFill/>
         </p:spPr>
         <p:txBody>
-          <a:bodyPr wrap="square" lIns="18288" rIns="18288" tIns="18288" bIns="18288" anchor="t">
+          <a:bodyPr wrap="square" lIns="18288" tIns="18288" rIns="18288" bIns="18288" anchor="t">
             <a:spAutoFit/>
           </a:bodyPr>
           <a:lstStyle/>
@@ -7772,7 +7960,7 @@
           <a:noFill/>
         </p:spPr>
         <p:txBody>
-          <a:bodyPr wrap="square" lIns="18288" rIns="18288" tIns="18288" bIns="18288" anchor="t">
+          <a:bodyPr wrap="square" lIns="18288" tIns="18288" rIns="18288" bIns="18288" anchor="t">
             <a:spAutoFit/>
           </a:bodyPr>
           <a:lstStyle/>
@@ -7808,7 +7996,7 @@
           <a:noFill/>
         </p:spPr>
         <p:txBody>
-          <a:bodyPr wrap="square" lIns="18288" rIns="18288" tIns="18288" bIns="18288" anchor="t">
+          <a:bodyPr wrap="square" lIns="18288" tIns="18288" rIns="18288" bIns="18288" anchor="t">
             <a:spAutoFit/>
           </a:bodyPr>
           <a:lstStyle/>
@@ -7844,7 +8032,7 @@
           <a:noFill/>
         </p:spPr>
         <p:txBody>
-          <a:bodyPr wrap="square" lIns="18288" rIns="18288" tIns="18288" bIns="18288" anchor="t">
+          <a:bodyPr wrap="square" lIns="18288" tIns="18288" rIns="18288" bIns="18288" anchor="t">
             <a:spAutoFit/>
           </a:bodyPr>
           <a:lstStyle/>
@@ -7880,7 +8068,7 @@
           <a:noFill/>
         </p:spPr>
         <p:txBody>
-          <a:bodyPr wrap="square" lIns="18288" rIns="18288" tIns="18288" bIns="18288" anchor="t">
+          <a:bodyPr wrap="square" lIns="18288" tIns="18288" rIns="18288" bIns="18288" anchor="t">
             <a:spAutoFit/>
           </a:bodyPr>
           <a:lstStyle/>
@@ -7916,7 +8104,7 @@
           <a:noFill/>
         </p:spPr>
         <p:txBody>
-          <a:bodyPr wrap="square" lIns="18288" rIns="18288" tIns="18288" bIns="18288" anchor="t">
+          <a:bodyPr wrap="square" lIns="18288" tIns="18288" rIns="18288" bIns="18288" anchor="t">
             <a:spAutoFit/>
           </a:bodyPr>
           <a:lstStyle/>
@@ -7952,7 +8140,7 @@
           <a:noFill/>
         </p:spPr>
         <p:txBody>
-          <a:bodyPr wrap="square" lIns="18288" rIns="18288" tIns="18288" bIns="18288" anchor="t">
+          <a:bodyPr wrap="square" lIns="18288" tIns="18288" rIns="18288" bIns="18288" anchor="t">
             <a:spAutoFit/>
           </a:bodyPr>
           <a:lstStyle/>
@@ -7988,7 +8176,7 @@
           <a:noFill/>
         </p:spPr>
         <p:txBody>
-          <a:bodyPr wrap="square" lIns="18288" rIns="18288" tIns="18288" bIns="18288" anchor="t">
+          <a:bodyPr wrap="square" lIns="18288" tIns="18288" rIns="18288" bIns="18288" anchor="t">
             <a:spAutoFit/>
           </a:bodyPr>
           <a:lstStyle/>
@@ -8024,7 +8212,7 @@
           <a:noFill/>
         </p:spPr>
         <p:txBody>
-          <a:bodyPr wrap="square" lIns="18288" rIns="18288" tIns="18288" bIns="18288" anchor="t">
+          <a:bodyPr wrap="square" lIns="18288" tIns="18288" rIns="18288" bIns="18288" anchor="t">
             <a:spAutoFit/>
           </a:bodyPr>
           <a:lstStyle/>
@@ -8051,7 +8239,7 @@
         </p:nvSpPr>
         <p:spPr>
           <a:xfrm>
-            <a:off x="868680" y="5669280"/>
+            <a:off x="868680" y="5311140"/>
             <a:ext cx="10149840" cy="411480"/>
           </a:xfrm>
           <a:prstGeom prst="rect">
@@ -8060,7 +8248,7 @@
           <a:noFill/>
         </p:spPr>
         <p:txBody>
-          <a:bodyPr wrap="square" lIns="18288" rIns="18288" tIns="18288" bIns="18288" anchor="t">
+          <a:bodyPr wrap="square" lIns="18288" tIns="18288" rIns="18288" bIns="18288" anchor="t">
             <a:spAutoFit/>
           </a:bodyPr>
           <a:lstStyle/>
@@ -8074,7 +8262,100 @@
               </a:defRPr>
             </a:pPr>
             <a:r>
-              <a:t>Besonders beim Live-vs-Median-Vergleich gilt: Er ordnet eine aktuelle Lage ein, ersetzt aber keine historische Jahresanalyse.</a:t>
+              <a:rPr dirty="0" err="1"/>
+              <a:t>Besonders</a:t>
+            </a:r>
+            <a:r>
+              <a:rPr dirty="0"/>
+              <a:t> </a:t>
+            </a:r>
+            <a:r>
+              <a:rPr dirty="0" err="1"/>
+              <a:t>beim</a:t>
+            </a:r>
+            <a:r>
+              <a:rPr dirty="0"/>
+              <a:t> Live-vs-Median-</a:t>
+            </a:r>
+            <a:r>
+              <a:rPr dirty="0" err="1"/>
+              <a:t>Vergleich</a:t>
+            </a:r>
+            <a:r>
+              <a:rPr dirty="0"/>
+              <a:t> gilt: Er </a:t>
+            </a:r>
+            <a:r>
+              <a:rPr dirty="0" err="1"/>
+              <a:t>ordnet</a:t>
+            </a:r>
+            <a:r>
+              <a:rPr dirty="0"/>
+              <a:t> </a:t>
+            </a:r>
+            <a:r>
+              <a:rPr dirty="0" err="1"/>
+              <a:t>eine</a:t>
+            </a:r>
+            <a:r>
+              <a:rPr dirty="0"/>
+              <a:t> </a:t>
+            </a:r>
+            <a:r>
+              <a:rPr dirty="0" err="1"/>
+              <a:t>aktuelle</a:t>
+            </a:r>
+            <a:r>
+              <a:rPr dirty="0"/>
+              <a:t> Lage </a:t>
+            </a:r>
+            <a:r>
+              <a:rPr dirty="0" err="1"/>
+              <a:t>ein</a:t>
+            </a:r>
+            <a:r>
+              <a:rPr dirty="0"/>
+              <a:t>, </a:t>
+            </a:r>
+            <a:r>
+              <a:rPr dirty="0" err="1"/>
+              <a:t>ersetzt</a:t>
+            </a:r>
+            <a:r>
+              <a:rPr dirty="0"/>
+              <a:t> </a:t>
+            </a:r>
+            <a:r>
+              <a:rPr dirty="0" err="1"/>
+              <a:t>aber</a:t>
+            </a:r>
+            <a:r>
+              <a:rPr dirty="0"/>
+              <a:t> </a:t>
+            </a:r>
+            <a:r>
+              <a:rPr dirty="0" err="1"/>
+              <a:t>keine</a:t>
+            </a:r>
+            <a:r>
+              <a:rPr dirty="0"/>
+              <a:t> </a:t>
+            </a:r>
+            <a:r>
+              <a:rPr dirty="0" err="1"/>
+              <a:t>historische</a:t>
+            </a:r>
+            <a:r>
+              <a:rPr dirty="0"/>
+              <a:t> </a:t>
+            </a:r>
+            <a:r>
+              <a:rPr dirty="0" err="1"/>
+              <a:t>Jahresanalyse</a:t>
+            </a:r>
+            <a:r>
+              <a:rPr dirty="0"/>
+              <a:t>.</a:t>
             </a:r>
           </a:p>
         </p:txBody>

--- a/presentation/Euro_Air_Quality_Pipeline_FH_10Folien_v2.pptx
+++ b/presentation/Euro_Air_Quality_Pipeline_FH_10Folien_v2.pptx
@@ -4,6 +4,9 @@
   <p:sldMasterIdLst>
     <p:sldMasterId id="2147483648" r:id="rId1"/>
   </p:sldMasterIdLst>
+  <p:notesMasterIdLst>
+    <p:notesMasterId r:id="rId12"/>
+  </p:notesMasterIdLst>
   <p:sldIdLst>
     <p:sldId id="256" r:id="rId2"/>
     <p:sldId id="257" r:id="rId3"/>
@@ -132,6 +135,1608 @@
 </p:presentation>
 </file>
 
+<file path=ppt/notesMasters/notesMaster1.xml><?xml version="1.0" encoding="utf-8"?>
+<p:notesMaster xmlns:a="http://schemas.openxmlformats.org/drawingml/2006/main" xmlns:r="http://schemas.openxmlformats.org/officeDocument/2006/relationships" xmlns:p="http://schemas.openxmlformats.org/presentationml/2006/main">
+  <p:cSld>
+    <p:bg>
+      <p:bgRef idx="1001">
+        <a:schemeClr val="bg1"/>
+      </p:bgRef>
+    </p:bg>
+    <p:spTree>
+      <p:nvGrpSpPr>
+        <p:cNvPr id="1" name=""/>
+        <p:cNvGrpSpPr/>
+        <p:nvPr/>
+      </p:nvGrpSpPr>
+      <p:grpSpPr>
+        <a:xfrm>
+          <a:off x="0" y="0"/>
+          <a:ext cx="0" cy="0"/>
+          <a:chOff x="0" y="0"/>
+          <a:chExt cx="0" cy="0"/>
+        </a:xfrm>
+      </p:grpSpPr>
+      <p:sp>
+        <p:nvSpPr>
+          <p:cNvPr id="2" name="Kopfzeilenplatzhalter 1"/>
+          <p:cNvSpPr>
+            <a:spLocks noGrp="1"/>
+          </p:cNvSpPr>
+          <p:nvPr>
+            <p:ph type="hdr" sz="quarter"/>
+          </p:nvPr>
+        </p:nvSpPr>
+        <p:spPr>
+          <a:xfrm>
+            <a:off x="0" y="0"/>
+            <a:ext cx="2971800" cy="458788"/>
+          </a:xfrm>
+          <a:prstGeom prst="rect">
+            <a:avLst/>
+          </a:prstGeom>
+        </p:spPr>
+        <p:txBody>
+          <a:bodyPr vert="horz" lIns="91440" tIns="45720" rIns="91440" bIns="45720" rtlCol="0"/>
+          <a:lstStyle>
+            <a:lvl1pPr algn="l">
+              <a:defRPr sz="1200"/>
+            </a:lvl1pPr>
+          </a:lstStyle>
+          <a:p>
+            <a:endParaRPr lang="en-GB"/>
+          </a:p>
+        </p:txBody>
+      </p:sp>
+      <p:sp>
+        <p:nvSpPr>
+          <p:cNvPr id="3" name="Datumsplatzhalter 2"/>
+          <p:cNvSpPr>
+            <a:spLocks noGrp="1"/>
+          </p:cNvSpPr>
+          <p:nvPr>
+            <p:ph type="dt" idx="1"/>
+          </p:nvPr>
+        </p:nvSpPr>
+        <p:spPr>
+          <a:xfrm>
+            <a:off x="3884613" y="0"/>
+            <a:ext cx="2971800" cy="458788"/>
+          </a:xfrm>
+          <a:prstGeom prst="rect">
+            <a:avLst/>
+          </a:prstGeom>
+        </p:spPr>
+        <p:txBody>
+          <a:bodyPr vert="horz" lIns="91440" tIns="45720" rIns="91440" bIns="45720" rtlCol="0"/>
+          <a:lstStyle>
+            <a:lvl1pPr algn="r">
+              <a:defRPr sz="1200"/>
+            </a:lvl1pPr>
+          </a:lstStyle>
+          <a:p>
+            <a:fld id="{AB5ACE21-4851-466A-9C8E-42C231778794}" type="datetimeFigureOut">
+              <a:rPr lang="en-GB" smtClean="0"/>
+              <a:t>01/07/2026</a:t>
+            </a:fld>
+            <a:endParaRPr lang="en-GB"/>
+          </a:p>
+        </p:txBody>
+      </p:sp>
+      <p:sp>
+        <p:nvSpPr>
+          <p:cNvPr id="4" name="Folienbildplatzhalter 3"/>
+          <p:cNvSpPr>
+            <a:spLocks noGrp="1" noRot="1" noChangeAspect="1"/>
+          </p:cNvSpPr>
+          <p:nvPr>
+            <p:ph type="sldImg" idx="2"/>
+          </p:nvPr>
+        </p:nvSpPr>
+        <p:spPr>
+          <a:xfrm>
+            <a:off x="685800" y="1143000"/>
+            <a:ext cx="5486400" cy="3086100"/>
+          </a:xfrm>
+          <a:prstGeom prst="rect">
+            <a:avLst/>
+          </a:prstGeom>
+          <a:noFill/>
+          <a:ln w="12700">
+            <a:solidFill>
+              <a:prstClr val="black"/>
+            </a:solidFill>
+          </a:ln>
+        </p:spPr>
+        <p:txBody>
+          <a:bodyPr vert="horz" lIns="91440" tIns="45720" rIns="91440" bIns="45720" rtlCol="0" anchor="ctr"/>
+          <a:lstStyle/>
+          <a:p>
+            <a:endParaRPr lang="en-GB"/>
+          </a:p>
+        </p:txBody>
+      </p:sp>
+      <p:sp>
+        <p:nvSpPr>
+          <p:cNvPr id="5" name="Notizenplatzhalter 4"/>
+          <p:cNvSpPr>
+            <a:spLocks noGrp="1"/>
+          </p:cNvSpPr>
+          <p:nvPr>
+            <p:ph type="body" sz="quarter" idx="3"/>
+          </p:nvPr>
+        </p:nvSpPr>
+        <p:spPr>
+          <a:xfrm>
+            <a:off x="685800" y="4400550"/>
+            <a:ext cx="5486400" cy="3600450"/>
+          </a:xfrm>
+          <a:prstGeom prst="rect">
+            <a:avLst/>
+          </a:prstGeom>
+        </p:spPr>
+        <p:txBody>
+          <a:bodyPr vert="horz" lIns="91440" tIns="45720" rIns="91440" bIns="45720" rtlCol="0"/>
+          <a:lstStyle/>
+          <a:p>
+            <a:pPr lvl="0"/>
+            <a:r>
+              <a:rPr lang="de-DE"/>
+              <a:t>Mastertextformat bearbeiten</a:t>
+            </a:r>
+          </a:p>
+          <a:p>
+            <a:pPr lvl="1"/>
+            <a:r>
+              <a:rPr lang="de-DE"/>
+              <a:t>Zweite Ebene</a:t>
+            </a:r>
+          </a:p>
+          <a:p>
+            <a:pPr lvl="2"/>
+            <a:r>
+              <a:rPr lang="de-DE"/>
+              <a:t>Dritte Ebene</a:t>
+            </a:r>
+          </a:p>
+          <a:p>
+            <a:pPr lvl="3"/>
+            <a:r>
+              <a:rPr lang="de-DE"/>
+              <a:t>Vierte Ebene</a:t>
+            </a:r>
+          </a:p>
+          <a:p>
+            <a:pPr lvl="4"/>
+            <a:r>
+              <a:rPr lang="de-DE"/>
+              <a:t>Fünfte Ebene</a:t>
+            </a:r>
+            <a:endParaRPr lang="en-GB"/>
+          </a:p>
+        </p:txBody>
+      </p:sp>
+      <p:sp>
+        <p:nvSpPr>
+          <p:cNvPr id="6" name="Fußzeilenplatzhalter 5"/>
+          <p:cNvSpPr>
+            <a:spLocks noGrp="1"/>
+          </p:cNvSpPr>
+          <p:nvPr>
+            <p:ph type="ftr" sz="quarter" idx="4"/>
+          </p:nvPr>
+        </p:nvSpPr>
+        <p:spPr>
+          <a:xfrm>
+            <a:off x="0" y="8685213"/>
+            <a:ext cx="2971800" cy="458787"/>
+          </a:xfrm>
+          <a:prstGeom prst="rect">
+            <a:avLst/>
+          </a:prstGeom>
+        </p:spPr>
+        <p:txBody>
+          <a:bodyPr vert="horz" lIns="91440" tIns="45720" rIns="91440" bIns="45720" rtlCol="0" anchor="b"/>
+          <a:lstStyle>
+            <a:lvl1pPr algn="l">
+              <a:defRPr sz="1200"/>
+            </a:lvl1pPr>
+          </a:lstStyle>
+          <a:p>
+            <a:endParaRPr lang="en-GB"/>
+          </a:p>
+        </p:txBody>
+      </p:sp>
+      <p:sp>
+        <p:nvSpPr>
+          <p:cNvPr id="7" name="Foliennummernplatzhalter 6"/>
+          <p:cNvSpPr>
+            <a:spLocks noGrp="1"/>
+          </p:cNvSpPr>
+          <p:nvPr>
+            <p:ph type="sldNum" sz="quarter" idx="5"/>
+          </p:nvPr>
+        </p:nvSpPr>
+        <p:spPr>
+          <a:xfrm>
+            <a:off x="3884613" y="8685213"/>
+            <a:ext cx="2971800" cy="458787"/>
+          </a:xfrm>
+          <a:prstGeom prst="rect">
+            <a:avLst/>
+          </a:prstGeom>
+        </p:spPr>
+        <p:txBody>
+          <a:bodyPr vert="horz" lIns="91440" tIns="45720" rIns="91440" bIns="45720" rtlCol="0" anchor="b"/>
+          <a:lstStyle>
+            <a:lvl1pPr algn="r">
+              <a:defRPr sz="1200"/>
+            </a:lvl1pPr>
+          </a:lstStyle>
+          <a:p>
+            <a:fld id="{C45BD0C9-3F00-46B0-87F3-0290CBDB6516}" type="slidenum">
+              <a:rPr lang="en-GB" smtClean="0"/>
+              <a:t>‹Nr.›</a:t>
+            </a:fld>
+            <a:endParaRPr lang="en-GB"/>
+          </a:p>
+        </p:txBody>
+      </p:sp>
+    </p:spTree>
+    <p:extLst>
+      <p:ext uri="{BB962C8B-B14F-4D97-AF65-F5344CB8AC3E}">
+        <p14:creationId xmlns:p14="http://schemas.microsoft.com/office/powerpoint/2010/main" val="733428335"/>
+      </p:ext>
+    </p:extLst>
+  </p:cSld>
+  <p:clrMap bg1="lt1" tx1="dk1" bg2="lt2" tx2="dk2" accent1="accent1" accent2="accent2" accent3="accent3" accent4="accent4" accent5="accent5" accent6="accent6" hlink="hlink" folHlink="folHlink"/>
+  <p:notesStyle>
+    <a:lvl1pPr marL="0" algn="l" defTabSz="914400" rtl="0" eaLnBrk="1" latinLnBrk="0" hangingPunct="1">
+      <a:defRPr sz="1200" kern="1200">
+        <a:solidFill>
+          <a:schemeClr val="tx1"/>
+        </a:solidFill>
+        <a:latin typeface="+mn-lt"/>
+        <a:ea typeface="+mn-ea"/>
+        <a:cs typeface="+mn-cs"/>
+      </a:defRPr>
+    </a:lvl1pPr>
+    <a:lvl2pPr marL="457200" algn="l" defTabSz="914400" rtl="0" eaLnBrk="1" latinLnBrk="0" hangingPunct="1">
+      <a:defRPr sz="1200" kern="1200">
+        <a:solidFill>
+          <a:schemeClr val="tx1"/>
+        </a:solidFill>
+        <a:latin typeface="+mn-lt"/>
+        <a:ea typeface="+mn-ea"/>
+        <a:cs typeface="+mn-cs"/>
+      </a:defRPr>
+    </a:lvl2pPr>
+    <a:lvl3pPr marL="914400" algn="l" defTabSz="914400" rtl="0" eaLnBrk="1" latinLnBrk="0" hangingPunct="1">
+      <a:defRPr sz="1200" kern="1200">
+        <a:solidFill>
+          <a:schemeClr val="tx1"/>
+        </a:solidFill>
+        <a:latin typeface="+mn-lt"/>
+        <a:ea typeface="+mn-ea"/>
+        <a:cs typeface="+mn-cs"/>
+      </a:defRPr>
+    </a:lvl3pPr>
+    <a:lvl4pPr marL="1371600" algn="l" defTabSz="914400" rtl="0" eaLnBrk="1" latinLnBrk="0" hangingPunct="1">
+      <a:defRPr sz="1200" kern="1200">
+        <a:solidFill>
+          <a:schemeClr val="tx1"/>
+        </a:solidFill>
+        <a:latin typeface="+mn-lt"/>
+        <a:ea typeface="+mn-ea"/>
+        <a:cs typeface="+mn-cs"/>
+      </a:defRPr>
+    </a:lvl4pPr>
+    <a:lvl5pPr marL="1828800" algn="l" defTabSz="914400" rtl="0" eaLnBrk="1" latinLnBrk="0" hangingPunct="1">
+      <a:defRPr sz="1200" kern="1200">
+        <a:solidFill>
+          <a:schemeClr val="tx1"/>
+        </a:solidFill>
+        <a:latin typeface="+mn-lt"/>
+        <a:ea typeface="+mn-ea"/>
+        <a:cs typeface="+mn-cs"/>
+      </a:defRPr>
+    </a:lvl5pPr>
+    <a:lvl6pPr marL="2286000" algn="l" defTabSz="914400" rtl="0" eaLnBrk="1" latinLnBrk="0" hangingPunct="1">
+      <a:defRPr sz="1200" kern="1200">
+        <a:solidFill>
+          <a:schemeClr val="tx1"/>
+        </a:solidFill>
+        <a:latin typeface="+mn-lt"/>
+        <a:ea typeface="+mn-ea"/>
+        <a:cs typeface="+mn-cs"/>
+      </a:defRPr>
+    </a:lvl6pPr>
+    <a:lvl7pPr marL="2743200" algn="l" defTabSz="914400" rtl="0" eaLnBrk="1" latinLnBrk="0" hangingPunct="1">
+      <a:defRPr sz="1200" kern="1200">
+        <a:solidFill>
+          <a:schemeClr val="tx1"/>
+        </a:solidFill>
+        <a:latin typeface="+mn-lt"/>
+        <a:ea typeface="+mn-ea"/>
+        <a:cs typeface="+mn-cs"/>
+      </a:defRPr>
+    </a:lvl7pPr>
+    <a:lvl8pPr marL="3200400" algn="l" defTabSz="914400" rtl="0" eaLnBrk="1" latinLnBrk="0" hangingPunct="1">
+      <a:defRPr sz="1200" kern="1200">
+        <a:solidFill>
+          <a:schemeClr val="tx1"/>
+        </a:solidFill>
+        <a:latin typeface="+mn-lt"/>
+        <a:ea typeface="+mn-ea"/>
+        <a:cs typeface="+mn-cs"/>
+      </a:defRPr>
+    </a:lvl8pPr>
+    <a:lvl9pPr marL="3657600" algn="l" defTabSz="914400" rtl="0" eaLnBrk="1" latinLnBrk="0" hangingPunct="1">
+      <a:defRPr sz="1200" kern="1200">
+        <a:solidFill>
+          <a:schemeClr val="tx1"/>
+        </a:solidFill>
+        <a:latin typeface="+mn-lt"/>
+        <a:ea typeface="+mn-ea"/>
+        <a:cs typeface="+mn-cs"/>
+      </a:defRPr>
+    </a:lvl9pPr>
+  </p:notesStyle>
+</p:notesMaster>
+</file>
+
+<file path=ppt/notesSlides/notesSlide1.xml><?xml version="1.0" encoding="utf-8"?>
+<p:notes xmlns:a="http://schemas.openxmlformats.org/drawingml/2006/main" xmlns:r="http://schemas.openxmlformats.org/officeDocument/2006/relationships" xmlns:p="http://schemas.openxmlformats.org/presentationml/2006/main">
+  <p:cSld>
+    <p:spTree>
+      <p:nvGrpSpPr>
+        <p:cNvPr id="1" name=""/>
+        <p:cNvGrpSpPr/>
+        <p:nvPr/>
+      </p:nvGrpSpPr>
+      <p:grpSpPr>
+        <a:xfrm>
+          <a:off x="0" y="0"/>
+          <a:ext cx="0" cy="0"/>
+          <a:chOff x="0" y="0"/>
+          <a:chExt cx="0" cy="0"/>
+        </a:xfrm>
+      </p:grpSpPr>
+      <p:sp>
+        <p:nvSpPr>
+          <p:cNvPr id="2" name="Folienbildplatzhalter 1"/>
+          <p:cNvSpPr>
+            <a:spLocks noGrp="1" noRot="1" noChangeAspect="1"/>
+          </p:cNvSpPr>
+          <p:nvPr>
+            <p:ph type="sldImg"/>
+          </p:nvPr>
+        </p:nvSpPr>
+        <p:spPr/>
+      </p:sp>
+      <p:sp>
+        <p:nvSpPr>
+          <p:cNvPr id="3" name="Notizenplatzhalter 2"/>
+          <p:cNvSpPr>
+            <a:spLocks noGrp="1"/>
+          </p:cNvSpPr>
+          <p:nvPr>
+            <p:ph type="body" idx="1"/>
+          </p:nvPr>
+        </p:nvSpPr>
+        <p:spPr/>
+        <p:txBody>
+          <a:bodyPr/>
+          <a:lstStyle/>
+          <a:p>
+            <a:pPr marL="0" marR="0" lvl="0" indent="0" algn="l" defTabSz="914400" rtl="0" eaLnBrk="1" fontAlgn="auto" latinLnBrk="0" hangingPunct="1">
+              <a:lnSpc>
+                <a:spcPct val="100000"/>
+              </a:lnSpc>
+              <a:spcBef>
+                <a:spcPts val="0"/>
+              </a:spcBef>
+              <a:spcAft>
+                <a:spcPts val="0"/>
+              </a:spcAft>
+              <a:buClrTx/>
+              <a:buSzTx/>
+              <a:buFontTx/>
+              <a:buNone/>
+              <a:tabLst/>
+              <a:defRPr/>
+            </a:pPr>
+            <a:r>
+              <a:rPr lang="de-DE" sz="1800" dirty="0">
+                <a:effectLst/>
+                <a:latin typeface="Aptos"/>
+                <a:ea typeface="Aptos"/>
+                <a:cs typeface="Times New Roman" panose="02020603050405020304" pitchFamily="18" charset="0"/>
+              </a:rPr>
+              <a:t>Wir zeigen heute die Luftqualität in acht europäischen Hauptstädten. Die fachliche Frage lautet: Wie hoch liegen PM2.5, PM10 und NO2 im betrachteten Datensatz, und wie lässt sich die aktuelle Lage im Verhältnis zur historischen Mess-Baseline einordnen? Technisch ist das ein Big-Data-Engineering-Projekt mit drei Quellen: EEA(European Environment Agency), Wikipedia und Open-Meteo. Die Daten werden in einer Bronze-</a:t>
+            </a:r>
+            <a:r>
+              <a:rPr lang="de-DE" sz="1800" dirty="0" err="1">
+                <a:effectLst/>
+                <a:latin typeface="Aptos"/>
+                <a:ea typeface="Aptos"/>
+                <a:cs typeface="Times New Roman" panose="02020603050405020304" pitchFamily="18" charset="0"/>
+              </a:rPr>
+              <a:t>Silver</a:t>
+            </a:r>
+            <a:r>
+              <a:rPr lang="de-DE" sz="1800" dirty="0">
+                <a:effectLst/>
+                <a:latin typeface="Aptos"/>
+                <a:ea typeface="Aptos"/>
+                <a:cs typeface="Times New Roman" panose="02020603050405020304" pitchFamily="18" charset="0"/>
+              </a:rPr>
+              <a:t>-Gold-Architektur verarbeitet. </a:t>
+            </a:r>
+            <a:endParaRPr lang="en-GB" sz="1800" dirty="0">
+              <a:effectLst/>
+              <a:latin typeface="Aptos"/>
+              <a:ea typeface="Aptos"/>
+              <a:cs typeface="Times New Roman" panose="02020603050405020304" pitchFamily="18" charset="0"/>
+            </a:endParaRPr>
+          </a:p>
+          <a:p>
+            <a:endParaRPr lang="en-GB" dirty="0"/>
+          </a:p>
+        </p:txBody>
+      </p:sp>
+      <p:sp>
+        <p:nvSpPr>
+          <p:cNvPr id="4" name="Foliennummernplatzhalter 3"/>
+          <p:cNvSpPr>
+            <a:spLocks noGrp="1"/>
+          </p:cNvSpPr>
+          <p:nvPr>
+            <p:ph type="sldNum" sz="quarter" idx="5"/>
+          </p:nvPr>
+        </p:nvSpPr>
+        <p:spPr/>
+        <p:txBody>
+          <a:bodyPr/>
+          <a:lstStyle/>
+          <a:p>
+            <a:fld id="{C45BD0C9-3F00-46B0-87F3-0290CBDB6516}" type="slidenum">
+              <a:rPr lang="en-GB" smtClean="0"/>
+              <a:t>1</a:t>
+            </a:fld>
+            <a:endParaRPr lang="en-GB"/>
+          </a:p>
+        </p:txBody>
+      </p:sp>
+    </p:spTree>
+    <p:extLst>
+      <p:ext uri="{BB962C8B-B14F-4D97-AF65-F5344CB8AC3E}">
+        <p14:creationId xmlns:p14="http://schemas.microsoft.com/office/powerpoint/2010/main" val="2452709278"/>
+      </p:ext>
+    </p:extLst>
+  </p:cSld>
+  <p:clrMapOvr>
+    <a:masterClrMapping/>
+  </p:clrMapOvr>
+</p:notes>
+</file>
+
+<file path=ppt/notesSlides/notesSlide10.xml><?xml version="1.0" encoding="utf-8"?>
+<p:notes xmlns:a="http://schemas.openxmlformats.org/drawingml/2006/main" xmlns:r="http://schemas.openxmlformats.org/officeDocument/2006/relationships" xmlns:p="http://schemas.openxmlformats.org/presentationml/2006/main">
+  <p:cSld>
+    <p:spTree>
+      <p:nvGrpSpPr>
+        <p:cNvPr id="1" name=""/>
+        <p:cNvGrpSpPr/>
+        <p:nvPr/>
+      </p:nvGrpSpPr>
+      <p:grpSpPr>
+        <a:xfrm>
+          <a:off x="0" y="0"/>
+          <a:ext cx="0" cy="0"/>
+          <a:chOff x="0" y="0"/>
+          <a:chExt cx="0" cy="0"/>
+        </a:xfrm>
+      </p:grpSpPr>
+      <p:sp>
+        <p:nvSpPr>
+          <p:cNvPr id="2" name="Folienbildplatzhalter 1"/>
+          <p:cNvSpPr>
+            <a:spLocks noGrp="1" noRot="1" noChangeAspect="1"/>
+          </p:cNvSpPr>
+          <p:nvPr>
+            <p:ph type="sldImg"/>
+          </p:nvPr>
+        </p:nvSpPr>
+        <p:spPr/>
+      </p:sp>
+      <p:sp>
+        <p:nvSpPr>
+          <p:cNvPr id="3" name="Notizenplatzhalter 2"/>
+          <p:cNvSpPr>
+            <a:spLocks noGrp="1"/>
+          </p:cNvSpPr>
+          <p:nvPr>
+            <p:ph type="body" idx="1"/>
+          </p:nvPr>
+        </p:nvSpPr>
+        <p:spPr/>
+        <p:txBody>
+          <a:bodyPr/>
+          <a:lstStyle/>
+          <a:p>
+            <a:pPr marL="0" marR="0" lvl="0" indent="0" algn="l" defTabSz="914400" rtl="0" eaLnBrk="1" fontAlgn="auto" latinLnBrk="0" hangingPunct="1">
+              <a:lnSpc>
+                <a:spcPct val="100000"/>
+              </a:lnSpc>
+              <a:spcBef>
+                <a:spcPts val="0"/>
+              </a:spcBef>
+              <a:spcAft>
+                <a:spcPts val="0"/>
+              </a:spcAft>
+              <a:buClrTx/>
+              <a:buSzTx/>
+              <a:buFontTx/>
+              <a:buNone/>
+              <a:tabLst/>
+              <a:defRPr/>
+            </a:pPr>
+            <a:r>
+              <a:rPr lang="de-DE" sz="1800" dirty="0">
+                <a:effectLst/>
+                <a:latin typeface="Aptos"/>
+                <a:ea typeface="Aptos"/>
+                <a:cs typeface="Times New Roman" panose="02020603050405020304" pitchFamily="18" charset="0"/>
+              </a:rPr>
+              <a:t>Drei Aussagen sollen hängen bleiben. Erstens: NO2 ist der klarste Befund. Alle acht Städte überschreiten den WHO-NO2-Richtwert, mit Jahresmitteln zwischen 15 und 25 Mikrogramm statt 10. Zweitens: Schadstoff schlägt Stadt. PM2.5, PM10 und NO2 zeigen unterschiedliche Muster, daher wäre eine einzige Gesamtrangliste irreführend. Drittens: Die Live-Daten werden sinnvoll eingeordnet, aber nicht mit EEA gleichgesetzt. Open-Meteo liefert aktuelle Modellwerte, die explorativ gegen den historischen EEA-Median gelesen werden. Der Code und die Ergebnisse liegen im Repository.</a:t>
+            </a:r>
+            <a:endParaRPr lang="en-GB" sz="1800">
+              <a:effectLst/>
+              <a:latin typeface="Aptos"/>
+              <a:ea typeface="Aptos"/>
+              <a:cs typeface="Times New Roman" panose="02020603050405020304" pitchFamily="18" charset="0"/>
+            </a:endParaRPr>
+          </a:p>
+          <a:p>
+            <a:endParaRPr lang="en-GB" dirty="0"/>
+          </a:p>
+        </p:txBody>
+      </p:sp>
+      <p:sp>
+        <p:nvSpPr>
+          <p:cNvPr id="4" name="Foliennummernplatzhalter 3"/>
+          <p:cNvSpPr>
+            <a:spLocks noGrp="1"/>
+          </p:cNvSpPr>
+          <p:nvPr>
+            <p:ph type="sldNum" sz="quarter" idx="5"/>
+          </p:nvPr>
+        </p:nvSpPr>
+        <p:spPr/>
+        <p:txBody>
+          <a:bodyPr/>
+          <a:lstStyle/>
+          <a:p>
+            <a:fld id="{C45BD0C9-3F00-46B0-87F3-0290CBDB6516}" type="slidenum">
+              <a:rPr lang="en-GB" smtClean="0"/>
+              <a:t>10</a:t>
+            </a:fld>
+            <a:endParaRPr lang="en-GB"/>
+          </a:p>
+        </p:txBody>
+      </p:sp>
+    </p:spTree>
+    <p:extLst>
+      <p:ext uri="{BB962C8B-B14F-4D97-AF65-F5344CB8AC3E}">
+        <p14:creationId xmlns:p14="http://schemas.microsoft.com/office/powerpoint/2010/main" val="3527128455"/>
+      </p:ext>
+    </p:extLst>
+  </p:cSld>
+  <p:clrMapOvr>
+    <a:masterClrMapping/>
+  </p:clrMapOvr>
+</p:notes>
+</file>
+
+<file path=ppt/notesSlides/notesSlide2.xml><?xml version="1.0" encoding="utf-8"?>
+<p:notes xmlns:a="http://schemas.openxmlformats.org/drawingml/2006/main" xmlns:r="http://schemas.openxmlformats.org/officeDocument/2006/relationships" xmlns:p="http://schemas.openxmlformats.org/presentationml/2006/main">
+  <p:cSld>
+    <p:spTree>
+      <p:nvGrpSpPr>
+        <p:cNvPr id="1" name=""/>
+        <p:cNvGrpSpPr/>
+        <p:nvPr/>
+      </p:nvGrpSpPr>
+      <p:grpSpPr>
+        <a:xfrm>
+          <a:off x="0" y="0"/>
+          <a:ext cx="0" cy="0"/>
+          <a:chOff x="0" y="0"/>
+          <a:chExt cx="0" cy="0"/>
+        </a:xfrm>
+      </p:grpSpPr>
+      <p:sp>
+        <p:nvSpPr>
+          <p:cNvPr id="2" name="Folienbildplatzhalter 1"/>
+          <p:cNvSpPr>
+            <a:spLocks noGrp="1" noRot="1" noChangeAspect="1"/>
+          </p:cNvSpPr>
+          <p:nvPr>
+            <p:ph type="sldImg"/>
+          </p:nvPr>
+        </p:nvSpPr>
+        <p:spPr/>
+      </p:sp>
+      <p:sp>
+        <p:nvSpPr>
+          <p:cNvPr id="3" name="Notizenplatzhalter 2"/>
+          <p:cNvSpPr>
+            <a:spLocks noGrp="1"/>
+          </p:cNvSpPr>
+          <p:nvPr>
+            <p:ph type="body" idx="1"/>
+          </p:nvPr>
+        </p:nvSpPr>
+        <p:spPr/>
+        <p:txBody>
+          <a:bodyPr/>
+          <a:lstStyle/>
+          <a:p>
+            <a:pPr marL="0" marR="0" lvl="0" indent="0" algn="l" defTabSz="914400" rtl="0" eaLnBrk="1" fontAlgn="auto" latinLnBrk="0" hangingPunct="1">
+              <a:lnSpc>
+                <a:spcPct val="100000"/>
+              </a:lnSpc>
+              <a:spcBef>
+                <a:spcPts val="0"/>
+              </a:spcBef>
+              <a:spcAft>
+                <a:spcPts val="0"/>
+              </a:spcAft>
+              <a:buClrTx/>
+              <a:buSzTx/>
+              <a:buFontTx/>
+              <a:buNone/>
+              <a:tabLst/>
+              <a:defRPr/>
+            </a:pPr>
+            <a:r>
+              <a:rPr lang="de-DE" sz="1800" dirty="0">
+                <a:effectLst/>
+                <a:latin typeface="Aptos"/>
+                <a:ea typeface="Aptos"/>
+                <a:cs typeface="Times New Roman" panose="02020603050405020304" pitchFamily="18" charset="0"/>
+              </a:rPr>
+              <a:t>Unsere technische Umsetzung folgt direkt aus der Fragestellung. Für robuste Aussagen brauchen wir historische Messdaten; dafür nutzen wir die validierten EEA-Werte. Für Stadtkontext, etwa Bevölkerungsdichte, verwenden wir Wikipedia als Web-</a:t>
+            </a:r>
+            <a:r>
+              <a:rPr lang="de-DE" sz="1800" dirty="0" err="1">
+                <a:effectLst/>
+                <a:latin typeface="Aptos"/>
+                <a:ea typeface="Aptos"/>
+                <a:cs typeface="Times New Roman" panose="02020603050405020304" pitchFamily="18" charset="0"/>
+              </a:rPr>
+              <a:t>Scraping</a:t>
+            </a:r>
+            <a:r>
+              <a:rPr lang="de-DE" sz="1800" dirty="0">
+                <a:effectLst/>
+                <a:latin typeface="Aptos"/>
+                <a:ea typeface="Aptos"/>
+                <a:cs typeface="Times New Roman" panose="02020603050405020304" pitchFamily="18" charset="0"/>
+              </a:rPr>
+              <a:t>-Quelle. Open-Meteo ergänzt aktuelle Modellwerte und bildet den Live-Pfad. Kafka und Spark sind hier nicht Selbstzweck: Sie zeigen, dass aktuelle Ereignisse in dieselbe Pipeline aufgenommen und gegen eine historische Baseline eingeordnet werden können. Bronze, </a:t>
+            </a:r>
+            <a:r>
+              <a:rPr lang="de-DE" sz="1800" dirty="0" err="1">
+                <a:effectLst/>
+                <a:latin typeface="Aptos"/>
+                <a:ea typeface="Aptos"/>
+                <a:cs typeface="Times New Roman" panose="02020603050405020304" pitchFamily="18" charset="0"/>
+              </a:rPr>
+              <a:t>Silver</a:t>
+            </a:r>
+            <a:r>
+              <a:rPr lang="de-DE" sz="1800" dirty="0">
+                <a:effectLst/>
+                <a:latin typeface="Aptos"/>
+                <a:ea typeface="Aptos"/>
+                <a:cs typeface="Times New Roman" panose="02020603050405020304" pitchFamily="18" charset="0"/>
+              </a:rPr>
+              <a:t> und Gold trennen Rohdaten, Bereinigung und analysefertige Ergebnisse.</a:t>
+            </a:r>
+            <a:endParaRPr lang="en-GB" sz="1800" dirty="0">
+              <a:effectLst/>
+              <a:latin typeface="Aptos"/>
+              <a:ea typeface="Aptos"/>
+              <a:cs typeface="Times New Roman" panose="02020603050405020304" pitchFamily="18" charset="0"/>
+            </a:endParaRPr>
+          </a:p>
+          <a:p>
+            <a:endParaRPr lang="en-GB" dirty="0"/>
+          </a:p>
+        </p:txBody>
+      </p:sp>
+      <p:sp>
+        <p:nvSpPr>
+          <p:cNvPr id="4" name="Foliennummernplatzhalter 3"/>
+          <p:cNvSpPr>
+            <a:spLocks noGrp="1"/>
+          </p:cNvSpPr>
+          <p:nvPr>
+            <p:ph type="sldNum" sz="quarter" idx="5"/>
+          </p:nvPr>
+        </p:nvSpPr>
+        <p:spPr/>
+        <p:txBody>
+          <a:bodyPr/>
+          <a:lstStyle/>
+          <a:p>
+            <a:fld id="{C45BD0C9-3F00-46B0-87F3-0290CBDB6516}" type="slidenum">
+              <a:rPr lang="en-GB" smtClean="0"/>
+              <a:t>2</a:t>
+            </a:fld>
+            <a:endParaRPr lang="en-GB"/>
+          </a:p>
+        </p:txBody>
+      </p:sp>
+    </p:spTree>
+    <p:extLst>
+      <p:ext uri="{BB962C8B-B14F-4D97-AF65-F5344CB8AC3E}">
+        <p14:creationId xmlns:p14="http://schemas.microsoft.com/office/powerpoint/2010/main" val="511276872"/>
+      </p:ext>
+    </p:extLst>
+  </p:cSld>
+  <p:clrMapOvr>
+    <a:masterClrMapping/>
+  </p:clrMapOvr>
+</p:notes>
+</file>
+
+<file path=ppt/notesSlides/notesSlide3.xml><?xml version="1.0" encoding="utf-8"?>
+<p:notes xmlns:a="http://schemas.openxmlformats.org/drawingml/2006/main" xmlns:r="http://schemas.openxmlformats.org/officeDocument/2006/relationships" xmlns:p="http://schemas.openxmlformats.org/presentationml/2006/main">
+  <p:cSld>
+    <p:spTree>
+      <p:nvGrpSpPr>
+        <p:cNvPr id="1" name=""/>
+        <p:cNvGrpSpPr/>
+        <p:nvPr/>
+      </p:nvGrpSpPr>
+      <p:grpSpPr>
+        <a:xfrm>
+          <a:off x="0" y="0"/>
+          <a:ext cx="0" cy="0"/>
+          <a:chOff x="0" y="0"/>
+          <a:chExt cx="0" cy="0"/>
+        </a:xfrm>
+      </p:grpSpPr>
+      <p:sp>
+        <p:nvSpPr>
+          <p:cNvPr id="2" name="Folienbildplatzhalter 1"/>
+          <p:cNvSpPr>
+            <a:spLocks noGrp="1" noRot="1" noChangeAspect="1"/>
+          </p:cNvSpPr>
+          <p:nvPr>
+            <p:ph type="sldImg"/>
+          </p:nvPr>
+        </p:nvSpPr>
+        <p:spPr/>
+      </p:sp>
+      <p:sp>
+        <p:nvSpPr>
+          <p:cNvPr id="3" name="Notizenplatzhalter 2"/>
+          <p:cNvSpPr>
+            <a:spLocks noGrp="1"/>
+          </p:cNvSpPr>
+          <p:nvPr>
+            <p:ph type="body" idx="1"/>
+          </p:nvPr>
+        </p:nvSpPr>
+        <p:spPr/>
+        <p:txBody>
+          <a:bodyPr/>
+          <a:lstStyle/>
+          <a:p>
+            <a:pPr marL="0" marR="0" lvl="0" indent="0" algn="l" defTabSz="914400" rtl="0" eaLnBrk="1" fontAlgn="auto" latinLnBrk="0" hangingPunct="1">
+              <a:lnSpc>
+                <a:spcPct val="100000"/>
+              </a:lnSpc>
+              <a:spcBef>
+                <a:spcPts val="0"/>
+              </a:spcBef>
+              <a:spcAft>
+                <a:spcPts val="0"/>
+              </a:spcAft>
+              <a:buClrTx/>
+              <a:buSzTx/>
+              <a:buFontTx/>
+              <a:buNone/>
+              <a:tabLst/>
+              <a:defRPr/>
+            </a:pPr>
+            <a:r>
+              <a:rPr lang="de-DE" sz="1800" dirty="0">
+                <a:effectLst/>
+                <a:latin typeface="Aptos"/>
+                <a:ea typeface="Aptos"/>
+                <a:cs typeface="Times New Roman" panose="02020603050405020304" pitchFamily="18" charset="0"/>
+              </a:rPr>
+              <a:t>Die Datengrundlage ist bewusst zuerst sichtbar gemacht, bevor wir interpretieren. Wir betrachten acht Städte, das vollständige Kalenderjahr 2025 und drei Schadstoffe. Historisch stehen dahinter 2,35 Millionen validierte EEA-Stundenwerte, die zu 7.938 Tagesmitteln in der Gold-Schicht verdichtet wurden. Zusätzlich gibt es 192 Open-Meteo-Liveevents, also 8 Städte mal 24 Stunden. Die drei Quellen haben unterschiedliche Rollen: EEA ist die Messbasis, Wikipedia liefert Kontext, Open-Meteo liefert aktuelle Modellwerte. Diese Quellen werden nicht unkritisch gleichgesetzt.</a:t>
+            </a:r>
+            <a:endParaRPr lang="en-GB" sz="1800" dirty="0">
+              <a:effectLst/>
+              <a:latin typeface="Aptos"/>
+              <a:ea typeface="Aptos"/>
+              <a:cs typeface="Times New Roman" panose="02020603050405020304" pitchFamily="18" charset="0"/>
+            </a:endParaRPr>
+          </a:p>
+          <a:p>
+            <a:endParaRPr lang="en-GB" dirty="0"/>
+          </a:p>
+        </p:txBody>
+      </p:sp>
+      <p:sp>
+        <p:nvSpPr>
+          <p:cNvPr id="4" name="Foliennummernplatzhalter 3"/>
+          <p:cNvSpPr>
+            <a:spLocks noGrp="1"/>
+          </p:cNvSpPr>
+          <p:nvPr>
+            <p:ph type="sldNum" sz="quarter" idx="5"/>
+          </p:nvPr>
+        </p:nvSpPr>
+        <p:spPr/>
+        <p:txBody>
+          <a:bodyPr/>
+          <a:lstStyle/>
+          <a:p>
+            <a:fld id="{C45BD0C9-3F00-46B0-87F3-0290CBDB6516}" type="slidenum">
+              <a:rPr lang="en-GB" smtClean="0"/>
+              <a:t>3</a:t>
+            </a:fld>
+            <a:endParaRPr lang="en-GB"/>
+          </a:p>
+        </p:txBody>
+      </p:sp>
+    </p:spTree>
+    <p:extLst>
+      <p:ext uri="{BB962C8B-B14F-4D97-AF65-F5344CB8AC3E}">
+        <p14:creationId xmlns:p14="http://schemas.microsoft.com/office/powerpoint/2010/main" val="3660742834"/>
+      </p:ext>
+    </p:extLst>
+  </p:cSld>
+  <p:clrMapOvr>
+    <a:masterClrMapping/>
+  </p:clrMapOvr>
+</p:notes>
+</file>
+
+<file path=ppt/notesSlides/notesSlide4.xml><?xml version="1.0" encoding="utf-8"?>
+<p:notes xmlns:a="http://schemas.openxmlformats.org/drawingml/2006/main" xmlns:r="http://schemas.openxmlformats.org/officeDocument/2006/relationships" xmlns:p="http://schemas.openxmlformats.org/presentationml/2006/main">
+  <p:cSld>
+    <p:spTree>
+      <p:nvGrpSpPr>
+        <p:cNvPr id="1" name=""/>
+        <p:cNvGrpSpPr/>
+        <p:nvPr/>
+      </p:nvGrpSpPr>
+      <p:grpSpPr>
+        <a:xfrm>
+          <a:off x="0" y="0"/>
+          <a:ext cx="0" cy="0"/>
+          <a:chOff x="0" y="0"/>
+          <a:chExt cx="0" cy="0"/>
+        </a:xfrm>
+      </p:grpSpPr>
+      <p:sp>
+        <p:nvSpPr>
+          <p:cNvPr id="2" name="Folienbildplatzhalter 1"/>
+          <p:cNvSpPr>
+            <a:spLocks noGrp="1" noRot="1" noChangeAspect="1"/>
+          </p:cNvSpPr>
+          <p:nvPr>
+            <p:ph type="sldImg"/>
+          </p:nvPr>
+        </p:nvSpPr>
+        <p:spPr/>
+      </p:sp>
+      <p:sp>
+        <p:nvSpPr>
+          <p:cNvPr id="3" name="Notizenplatzhalter 2"/>
+          <p:cNvSpPr>
+            <a:spLocks noGrp="1"/>
+          </p:cNvSpPr>
+          <p:nvPr>
+            <p:ph type="body" idx="1"/>
+          </p:nvPr>
+        </p:nvSpPr>
+        <p:spPr/>
+        <p:txBody>
+          <a:bodyPr/>
+          <a:lstStyle/>
+          <a:p>
+            <a:pPr marL="0" marR="0" lvl="0" indent="0" algn="l" defTabSz="914400" rtl="0" eaLnBrk="1" fontAlgn="auto" latinLnBrk="0" hangingPunct="1">
+              <a:lnSpc>
+                <a:spcPct val="100000"/>
+              </a:lnSpc>
+              <a:spcBef>
+                <a:spcPts val="0"/>
+              </a:spcBef>
+              <a:spcAft>
+                <a:spcPts val="0"/>
+              </a:spcAft>
+              <a:buClrTx/>
+              <a:buSzTx/>
+              <a:buFontTx/>
+              <a:buNone/>
+              <a:tabLst/>
+              <a:defRPr/>
+            </a:pPr>
+            <a:r>
+              <a:rPr lang="de-DE" sz="1800" dirty="0">
+                <a:effectLst/>
+                <a:latin typeface="Aptos"/>
+                <a:ea typeface="Aptos"/>
+                <a:cs typeface="Times New Roman" panose="02020603050405020304" pitchFamily="18" charset="0"/>
+              </a:rPr>
+              <a:t>Der erste Befund ist der klarste: Alle acht Städte liegen beim Jahresmittel für NO2 über dem WHO-2021-Richtwert von 10 Mikrogramm pro Kubikmeter. Die Spannweite reicht von 15,3 bis 25,0 Mikrogramm, also ungefähr das 1,5- bis 2,5-Fache der WHO-Empfehlung. Auch PM2.5 liegt bei allen Städten mit validierter PM2.5-Referenz über dem WHO-Wert von 5. Wichtig ist die Einschränkung bei Rom: Dort fehlen validierte EEA-Werte für PM2.5 und PM10. Diese Lücke wird offengelegt, nicht aufgefüllt.</a:t>
+            </a:r>
+            <a:endParaRPr lang="en-GB" sz="1800" dirty="0">
+              <a:effectLst/>
+              <a:latin typeface="Aptos"/>
+              <a:ea typeface="Aptos"/>
+              <a:cs typeface="Times New Roman" panose="02020603050405020304" pitchFamily="18" charset="0"/>
+            </a:endParaRPr>
+          </a:p>
+          <a:p>
+            <a:endParaRPr lang="en-GB" dirty="0"/>
+          </a:p>
+        </p:txBody>
+      </p:sp>
+      <p:sp>
+        <p:nvSpPr>
+          <p:cNvPr id="4" name="Foliennummernplatzhalter 3"/>
+          <p:cNvSpPr>
+            <a:spLocks noGrp="1"/>
+          </p:cNvSpPr>
+          <p:nvPr>
+            <p:ph type="sldNum" sz="quarter" idx="5"/>
+          </p:nvPr>
+        </p:nvSpPr>
+        <p:spPr/>
+        <p:txBody>
+          <a:bodyPr/>
+          <a:lstStyle/>
+          <a:p>
+            <a:fld id="{C45BD0C9-3F00-46B0-87F3-0290CBDB6516}" type="slidenum">
+              <a:rPr lang="en-GB" smtClean="0"/>
+              <a:t>4</a:t>
+            </a:fld>
+            <a:endParaRPr lang="en-GB"/>
+          </a:p>
+        </p:txBody>
+      </p:sp>
+    </p:spTree>
+    <p:extLst>
+      <p:ext uri="{BB962C8B-B14F-4D97-AF65-F5344CB8AC3E}">
+        <p14:creationId xmlns:p14="http://schemas.microsoft.com/office/powerpoint/2010/main" val="2193709881"/>
+      </p:ext>
+    </p:extLst>
+  </p:cSld>
+  <p:clrMapOvr>
+    <a:masterClrMapping/>
+  </p:clrMapOvr>
+</p:notes>
+</file>
+
+<file path=ppt/notesSlides/notesSlide5.xml><?xml version="1.0" encoding="utf-8"?>
+<p:notes xmlns:a="http://schemas.openxmlformats.org/drawingml/2006/main" xmlns:r="http://schemas.openxmlformats.org/officeDocument/2006/relationships" xmlns:p="http://schemas.openxmlformats.org/presentationml/2006/main">
+  <p:cSld>
+    <p:spTree>
+      <p:nvGrpSpPr>
+        <p:cNvPr id="1" name=""/>
+        <p:cNvGrpSpPr/>
+        <p:nvPr/>
+      </p:nvGrpSpPr>
+      <p:grpSpPr>
+        <a:xfrm>
+          <a:off x="0" y="0"/>
+          <a:ext cx="0" cy="0"/>
+          <a:chOff x="0" y="0"/>
+          <a:chExt cx="0" cy="0"/>
+        </a:xfrm>
+      </p:grpSpPr>
+      <p:sp>
+        <p:nvSpPr>
+          <p:cNvPr id="2" name="Folienbildplatzhalter 1"/>
+          <p:cNvSpPr>
+            <a:spLocks noGrp="1" noRot="1" noChangeAspect="1"/>
+          </p:cNvSpPr>
+          <p:nvPr>
+            <p:ph type="sldImg"/>
+          </p:nvPr>
+        </p:nvSpPr>
+        <p:spPr/>
+      </p:sp>
+      <p:sp>
+        <p:nvSpPr>
+          <p:cNvPr id="3" name="Notizenplatzhalter 2"/>
+          <p:cNvSpPr>
+            <a:spLocks noGrp="1"/>
+          </p:cNvSpPr>
+          <p:nvPr>
+            <p:ph type="body" idx="1"/>
+          </p:nvPr>
+        </p:nvSpPr>
+        <p:spPr/>
+        <p:txBody>
+          <a:bodyPr/>
+          <a:lstStyle/>
+          <a:p>
+            <a:pPr marL="0" marR="0" lvl="0" indent="0" algn="l" defTabSz="914400" rtl="0" eaLnBrk="1" fontAlgn="auto" latinLnBrk="0" hangingPunct="1">
+              <a:lnSpc>
+                <a:spcPct val="100000"/>
+              </a:lnSpc>
+              <a:spcBef>
+                <a:spcPts val="0"/>
+              </a:spcBef>
+              <a:spcAft>
+                <a:spcPts val="0"/>
+              </a:spcAft>
+              <a:buClrTx/>
+              <a:buSzTx/>
+              <a:buFontTx/>
+              <a:buNone/>
+              <a:tabLst/>
+              <a:defRPr/>
+            </a:pPr>
+            <a:r>
+              <a:rPr lang="de-DE" sz="1800" dirty="0">
+                <a:effectLst/>
+                <a:latin typeface="Aptos"/>
+                <a:ea typeface="Aptos"/>
+                <a:cs typeface="Times New Roman" panose="02020603050405020304" pitchFamily="18" charset="0"/>
+              </a:rPr>
+              <a:t>Beim Feinstaub PM2.5 liegen Warschau und Prag mit etwa 14,7 beziehungsweise 14,5 Mikrogramm pro Kubikmeter an der Spitze. Am unteren Ende stehen Madrid, Amsterdam und Wien mit ungefähr 9 bis 10 Mikrogramm. Trotzdem liegen alle vergleichbaren Städte deutlich über dem WHO-Wert von 5. Die Fehlerbalken sind hier wesentlich: Sie zeigen die Schwankung der Tageswerte. Kleine Unterschiede zwischen benachbarten Städten dürfen daher nicht als sichere Rangunterschiede überinterpretiert werden. Die Aussage bleibt deskriptiv und auf den betrachteten Datensatz begrenzt.</a:t>
+            </a:r>
+            <a:endParaRPr lang="en-GB" sz="1800" dirty="0">
+              <a:effectLst/>
+              <a:latin typeface="Aptos"/>
+              <a:ea typeface="Aptos"/>
+              <a:cs typeface="Times New Roman" panose="02020603050405020304" pitchFamily="18" charset="0"/>
+            </a:endParaRPr>
+          </a:p>
+          <a:p>
+            <a:endParaRPr lang="en-GB" dirty="0"/>
+          </a:p>
+        </p:txBody>
+      </p:sp>
+      <p:sp>
+        <p:nvSpPr>
+          <p:cNvPr id="4" name="Foliennummernplatzhalter 3"/>
+          <p:cNvSpPr>
+            <a:spLocks noGrp="1"/>
+          </p:cNvSpPr>
+          <p:nvPr>
+            <p:ph type="sldNum" sz="quarter" idx="5"/>
+          </p:nvPr>
+        </p:nvSpPr>
+        <p:spPr/>
+        <p:txBody>
+          <a:bodyPr/>
+          <a:lstStyle/>
+          <a:p>
+            <a:fld id="{C45BD0C9-3F00-46B0-87F3-0290CBDB6516}" type="slidenum">
+              <a:rPr lang="en-GB" smtClean="0"/>
+              <a:t>5</a:t>
+            </a:fld>
+            <a:endParaRPr lang="en-GB"/>
+          </a:p>
+        </p:txBody>
+      </p:sp>
+    </p:spTree>
+    <p:extLst>
+      <p:ext uri="{BB962C8B-B14F-4D97-AF65-F5344CB8AC3E}">
+        <p14:creationId xmlns:p14="http://schemas.microsoft.com/office/powerpoint/2010/main" val="3991136891"/>
+      </p:ext>
+    </p:extLst>
+  </p:cSld>
+  <p:clrMapOvr>
+    <a:masterClrMapping/>
+  </p:clrMapOvr>
+</p:notes>
+</file>
+
+<file path=ppt/notesSlides/notesSlide6.xml><?xml version="1.0" encoding="utf-8"?>
+<p:notes xmlns:a="http://schemas.openxmlformats.org/drawingml/2006/main" xmlns:r="http://schemas.openxmlformats.org/officeDocument/2006/relationships" xmlns:p="http://schemas.openxmlformats.org/presentationml/2006/main">
+  <p:cSld>
+    <p:spTree>
+      <p:nvGrpSpPr>
+        <p:cNvPr id="1" name=""/>
+        <p:cNvGrpSpPr/>
+        <p:nvPr/>
+      </p:nvGrpSpPr>
+      <p:grpSpPr>
+        <a:xfrm>
+          <a:off x="0" y="0"/>
+          <a:ext cx="0" cy="0"/>
+          <a:chOff x="0" y="0"/>
+          <a:chExt cx="0" cy="0"/>
+        </a:xfrm>
+      </p:grpSpPr>
+      <p:sp>
+        <p:nvSpPr>
+          <p:cNvPr id="2" name="Folienbildplatzhalter 1"/>
+          <p:cNvSpPr>
+            <a:spLocks noGrp="1" noRot="1" noChangeAspect="1"/>
+          </p:cNvSpPr>
+          <p:nvPr>
+            <p:ph type="sldImg"/>
+          </p:nvPr>
+        </p:nvSpPr>
+        <p:spPr/>
+      </p:sp>
+      <p:sp>
+        <p:nvSpPr>
+          <p:cNvPr id="3" name="Notizenplatzhalter 2"/>
+          <p:cNvSpPr>
+            <a:spLocks noGrp="1"/>
+          </p:cNvSpPr>
+          <p:nvPr>
+            <p:ph type="body" idx="1"/>
+          </p:nvPr>
+        </p:nvSpPr>
+        <p:spPr/>
+        <p:txBody>
+          <a:bodyPr/>
+          <a:lstStyle/>
+          <a:p>
+            <a:pPr marL="0" marR="0" lvl="0" indent="0" algn="l" defTabSz="914400" rtl="0" eaLnBrk="1" fontAlgn="auto" latinLnBrk="0" hangingPunct="1">
+              <a:lnSpc>
+                <a:spcPct val="100000"/>
+              </a:lnSpc>
+              <a:spcBef>
+                <a:spcPts val="0"/>
+              </a:spcBef>
+              <a:spcAft>
+                <a:spcPts val="0"/>
+              </a:spcAft>
+              <a:buClrTx/>
+              <a:buSzTx/>
+              <a:buFontTx/>
+              <a:buNone/>
+              <a:tabLst/>
+              <a:defRPr/>
+            </a:pPr>
+            <a:r>
+              <a:rPr lang="de-DE" sz="1800" dirty="0">
+                <a:effectLst/>
+                <a:latin typeface="Aptos"/>
+                <a:ea typeface="Aptos"/>
+                <a:cs typeface="Times New Roman" panose="02020603050405020304" pitchFamily="18" charset="0"/>
+              </a:rPr>
+              <a:t>Die Mittelwerte erzählen nur einen Teil der Geschichte. Die Boxplots zeigen, dass der Median bei jedem Schadstoff bereits über dem WHO-Richtwert liegt. Es handelt sich also nicht nur um einzelne Ausreißer. Gleichzeitig zeigen die langen Oberschwänze stark belastete Tage. Die Zeitreihe macht sichtbar, dass PM2.5-Spitzen besonders im Winter auftreten. Eine plausible fachliche Einordnung sind Heizen und Inversionswetterlagen. Das ist aber kein kausaler Nachweis, sondern eine vorsichtige Interpretation eines bekannten Musters. Fehlende Tage werden nicht interpoliert. Anmerkung: Madrid Saharastaub.</a:t>
+            </a:r>
+            <a:endParaRPr lang="en-GB" sz="1800" dirty="0">
+              <a:effectLst/>
+              <a:latin typeface="Aptos"/>
+              <a:ea typeface="Aptos"/>
+              <a:cs typeface="Times New Roman" panose="02020603050405020304" pitchFamily="18" charset="0"/>
+            </a:endParaRPr>
+          </a:p>
+          <a:p>
+            <a:endParaRPr lang="en-GB" dirty="0"/>
+          </a:p>
+        </p:txBody>
+      </p:sp>
+      <p:sp>
+        <p:nvSpPr>
+          <p:cNvPr id="4" name="Foliennummernplatzhalter 3"/>
+          <p:cNvSpPr>
+            <a:spLocks noGrp="1"/>
+          </p:cNvSpPr>
+          <p:nvPr>
+            <p:ph type="sldNum" sz="quarter" idx="5"/>
+          </p:nvPr>
+        </p:nvSpPr>
+        <p:spPr/>
+        <p:txBody>
+          <a:bodyPr/>
+          <a:lstStyle/>
+          <a:p>
+            <a:fld id="{C45BD0C9-3F00-46B0-87F3-0290CBDB6516}" type="slidenum">
+              <a:rPr lang="en-GB" smtClean="0"/>
+              <a:t>6</a:t>
+            </a:fld>
+            <a:endParaRPr lang="en-GB"/>
+          </a:p>
+        </p:txBody>
+      </p:sp>
+    </p:spTree>
+    <p:extLst>
+      <p:ext uri="{BB962C8B-B14F-4D97-AF65-F5344CB8AC3E}">
+        <p14:creationId xmlns:p14="http://schemas.microsoft.com/office/powerpoint/2010/main" val="709806244"/>
+      </p:ext>
+    </p:extLst>
+  </p:cSld>
+  <p:clrMapOvr>
+    <a:masterClrMapping/>
+  </p:clrMapOvr>
+</p:notes>
+</file>
+
+<file path=ppt/notesSlides/notesSlide7.xml><?xml version="1.0" encoding="utf-8"?>
+<p:notes xmlns:a="http://schemas.openxmlformats.org/drawingml/2006/main" xmlns:r="http://schemas.openxmlformats.org/officeDocument/2006/relationships" xmlns:p="http://schemas.openxmlformats.org/presentationml/2006/main">
+  <p:cSld>
+    <p:spTree>
+      <p:nvGrpSpPr>
+        <p:cNvPr id="1" name=""/>
+        <p:cNvGrpSpPr/>
+        <p:nvPr/>
+      </p:nvGrpSpPr>
+      <p:grpSpPr>
+        <a:xfrm>
+          <a:off x="0" y="0"/>
+          <a:ext cx="0" cy="0"/>
+          <a:chOff x="0" y="0"/>
+          <a:chExt cx="0" cy="0"/>
+        </a:xfrm>
+      </p:grpSpPr>
+      <p:sp>
+        <p:nvSpPr>
+          <p:cNvPr id="2" name="Folienbildplatzhalter 1"/>
+          <p:cNvSpPr>
+            <a:spLocks noGrp="1" noRot="1" noChangeAspect="1"/>
+          </p:cNvSpPr>
+          <p:nvPr>
+            <p:ph type="sldImg"/>
+          </p:nvPr>
+        </p:nvSpPr>
+        <p:spPr/>
+      </p:sp>
+      <p:sp>
+        <p:nvSpPr>
+          <p:cNvPr id="3" name="Notizenplatzhalter 2"/>
+          <p:cNvSpPr>
+            <a:spLocks noGrp="1"/>
+          </p:cNvSpPr>
+          <p:nvPr>
+            <p:ph type="body" idx="1"/>
+          </p:nvPr>
+        </p:nvSpPr>
+        <p:spPr/>
+        <p:txBody>
+          <a:bodyPr/>
+          <a:lstStyle/>
+          <a:p>
+            <a:pPr marL="0" marR="0" lvl="0" indent="0" algn="l" defTabSz="914400" rtl="0" eaLnBrk="1" fontAlgn="auto" latinLnBrk="0" hangingPunct="1">
+              <a:lnSpc>
+                <a:spcPct val="100000"/>
+              </a:lnSpc>
+              <a:spcBef>
+                <a:spcPts val="0"/>
+              </a:spcBef>
+              <a:spcAft>
+                <a:spcPts val="0"/>
+              </a:spcAft>
+              <a:buClrTx/>
+              <a:buSzTx/>
+              <a:buFontTx/>
+              <a:buNone/>
+              <a:tabLst/>
+              <a:defRPr/>
+            </a:pPr>
+            <a:r>
+              <a:rPr lang="de-DE" sz="1800" dirty="0">
+                <a:effectLst/>
+                <a:latin typeface="Aptos"/>
+                <a:ea typeface="Aptos"/>
+                <a:cs typeface="Times New Roman" panose="02020603050405020304" pitchFamily="18" charset="0"/>
+              </a:rPr>
+              <a:t>Hier verknüpfen wir zwei Quellen: Bevölkerungsdichte aus Wikipedia und PM2.5 aus EEA-Messdaten. Die naheliegende Vermutung wäre: dichtere Städte haben höhere Belastung. Der Zusammenhang ist in unserem Datensatz aber nicht robust. Über alle vergleichbaren Städte liegt die Korrelation ungefähr bei minus 0,23, ohne Paris kippt sie auf etwa minus 0,95. Paris ist ein Sonderfall, weil Wikipedia Paris als Kernkommune mit rund 105 Quadratkilometern führt. Diese Flächenabgrenzung ist mit den anderen Städten nicht direkt vergleichbar. Deshalb keine Kausalbehauptung.</a:t>
+            </a:r>
+            <a:endParaRPr lang="en-GB" sz="1800" dirty="0">
+              <a:effectLst/>
+              <a:latin typeface="Aptos"/>
+              <a:ea typeface="Aptos"/>
+              <a:cs typeface="Times New Roman" panose="02020603050405020304" pitchFamily="18" charset="0"/>
+            </a:endParaRPr>
+          </a:p>
+          <a:p>
+            <a:endParaRPr lang="en-GB" dirty="0"/>
+          </a:p>
+        </p:txBody>
+      </p:sp>
+      <p:sp>
+        <p:nvSpPr>
+          <p:cNvPr id="4" name="Foliennummernplatzhalter 3"/>
+          <p:cNvSpPr>
+            <a:spLocks noGrp="1"/>
+          </p:cNvSpPr>
+          <p:nvPr>
+            <p:ph type="sldNum" sz="quarter" idx="5"/>
+          </p:nvPr>
+        </p:nvSpPr>
+        <p:spPr/>
+        <p:txBody>
+          <a:bodyPr/>
+          <a:lstStyle/>
+          <a:p>
+            <a:fld id="{C45BD0C9-3F00-46B0-87F3-0290CBDB6516}" type="slidenum">
+              <a:rPr lang="en-GB" smtClean="0"/>
+              <a:t>7</a:t>
+            </a:fld>
+            <a:endParaRPr lang="en-GB"/>
+          </a:p>
+        </p:txBody>
+      </p:sp>
+    </p:spTree>
+    <p:extLst>
+      <p:ext uri="{BB962C8B-B14F-4D97-AF65-F5344CB8AC3E}">
+        <p14:creationId xmlns:p14="http://schemas.microsoft.com/office/powerpoint/2010/main" val="233140577"/>
+      </p:ext>
+    </p:extLst>
+  </p:cSld>
+  <p:clrMapOvr>
+    <a:masterClrMapping/>
+  </p:clrMapOvr>
+</p:notes>
+</file>
+
+<file path=ppt/notesSlides/notesSlide8.xml><?xml version="1.0" encoding="utf-8"?>
+<p:notes xmlns:a="http://schemas.openxmlformats.org/drawingml/2006/main" xmlns:r="http://schemas.openxmlformats.org/officeDocument/2006/relationships" xmlns:p="http://schemas.openxmlformats.org/presentationml/2006/main">
+  <p:cSld>
+    <p:spTree>
+      <p:nvGrpSpPr>
+        <p:cNvPr id="1" name=""/>
+        <p:cNvGrpSpPr/>
+        <p:nvPr/>
+      </p:nvGrpSpPr>
+      <p:grpSpPr>
+        <a:xfrm>
+          <a:off x="0" y="0"/>
+          <a:ext cx="0" cy="0"/>
+          <a:chOff x="0" y="0"/>
+          <a:chExt cx="0" cy="0"/>
+        </a:xfrm>
+      </p:grpSpPr>
+      <p:sp>
+        <p:nvSpPr>
+          <p:cNvPr id="2" name="Folienbildplatzhalter 1"/>
+          <p:cNvSpPr>
+            <a:spLocks noGrp="1" noRot="1" noChangeAspect="1"/>
+          </p:cNvSpPr>
+          <p:nvPr>
+            <p:ph type="sldImg"/>
+          </p:nvPr>
+        </p:nvSpPr>
+        <p:spPr/>
+      </p:sp>
+      <p:sp>
+        <p:nvSpPr>
+          <p:cNvPr id="3" name="Notizenplatzhalter 2"/>
+          <p:cNvSpPr>
+            <a:spLocks noGrp="1"/>
+          </p:cNvSpPr>
+          <p:nvPr>
+            <p:ph type="body" idx="1"/>
+          </p:nvPr>
+        </p:nvSpPr>
+        <p:spPr/>
+        <p:txBody>
+          <a:bodyPr/>
+          <a:lstStyle/>
+          <a:p>
+            <a:pPr marL="0" marR="0" lvl="0" indent="0" algn="l" defTabSz="914400" rtl="0" eaLnBrk="1" fontAlgn="auto" latinLnBrk="0" hangingPunct="1">
+              <a:lnSpc>
+                <a:spcPct val="100000"/>
+              </a:lnSpc>
+              <a:spcBef>
+                <a:spcPts val="0"/>
+              </a:spcBef>
+              <a:spcAft>
+                <a:spcPts val="0"/>
+              </a:spcAft>
+              <a:buClrTx/>
+              <a:buSzTx/>
+              <a:buFontTx/>
+              <a:buNone/>
+              <a:tabLst/>
+              <a:defRPr/>
+            </a:pPr>
+            <a:r>
+              <a:rPr lang="de-DE" sz="1800" dirty="0">
+                <a:effectLst/>
+                <a:latin typeface="Aptos"/>
+                <a:ea typeface="Aptos"/>
+                <a:cs typeface="Times New Roman" panose="02020603050405020304" pitchFamily="18" charset="0"/>
+              </a:rPr>
+              <a:t>Diese Folie verbindet die historische Analyse mit dem Live-Pfad. Aus den EEA-Tageswerten bilden wir je Stadt und Schadstoff den historischen Median für 2025. Die aktuellen Open-Meteo-Modellwerte werden über Kafka erzeugt, von Spark gelesen und anschließend gegen diesen Median eingeordnet. Positive Abweichungen bedeuten: Der aktuelle Modellwert liegt über der historischen Median-Baseline. Negative Abweichungen bedeuten: Er liegt darunter. Es gibt 24 mögliche Paare, davon 22 mit historischer Referenz und 2 ohne Referenz, nämlich Rom bei PM2.5 und PM10. Der Vergleich bleibt explorativ.</a:t>
+            </a:r>
+            <a:endParaRPr lang="en-GB" sz="1800" dirty="0">
+              <a:effectLst/>
+              <a:latin typeface="Aptos"/>
+              <a:ea typeface="Aptos"/>
+              <a:cs typeface="Times New Roman" panose="02020603050405020304" pitchFamily="18" charset="0"/>
+            </a:endParaRPr>
+          </a:p>
+          <a:p>
+            <a:endParaRPr lang="en-GB" dirty="0"/>
+          </a:p>
+        </p:txBody>
+      </p:sp>
+      <p:sp>
+        <p:nvSpPr>
+          <p:cNvPr id="4" name="Foliennummernplatzhalter 3"/>
+          <p:cNvSpPr>
+            <a:spLocks noGrp="1"/>
+          </p:cNvSpPr>
+          <p:nvPr>
+            <p:ph type="sldNum" sz="quarter" idx="5"/>
+          </p:nvPr>
+        </p:nvSpPr>
+        <p:spPr/>
+        <p:txBody>
+          <a:bodyPr/>
+          <a:lstStyle/>
+          <a:p>
+            <a:fld id="{C45BD0C9-3F00-46B0-87F3-0290CBDB6516}" type="slidenum">
+              <a:rPr lang="en-GB" smtClean="0"/>
+              <a:t>8</a:t>
+            </a:fld>
+            <a:endParaRPr lang="en-GB"/>
+          </a:p>
+        </p:txBody>
+      </p:sp>
+    </p:spTree>
+    <p:extLst>
+      <p:ext uri="{BB962C8B-B14F-4D97-AF65-F5344CB8AC3E}">
+        <p14:creationId xmlns:p14="http://schemas.microsoft.com/office/powerpoint/2010/main" val="2204799165"/>
+      </p:ext>
+    </p:extLst>
+  </p:cSld>
+  <p:clrMapOvr>
+    <a:masterClrMapping/>
+  </p:clrMapOvr>
+</p:notes>
+</file>
+
+<file path=ppt/notesSlides/notesSlide9.xml><?xml version="1.0" encoding="utf-8"?>
+<p:notes xmlns:a="http://schemas.openxmlformats.org/drawingml/2006/main" xmlns:r="http://schemas.openxmlformats.org/officeDocument/2006/relationships" xmlns:p="http://schemas.openxmlformats.org/presentationml/2006/main">
+  <p:cSld>
+    <p:spTree>
+      <p:nvGrpSpPr>
+        <p:cNvPr id="1" name=""/>
+        <p:cNvGrpSpPr/>
+        <p:nvPr/>
+      </p:nvGrpSpPr>
+      <p:grpSpPr>
+        <a:xfrm>
+          <a:off x="0" y="0"/>
+          <a:ext cx="0" cy="0"/>
+          <a:chOff x="0" y="0"/>
+          <a:chExt cx="0" cy="0"/>
+        </a:xfrm>
+      </p:grpSpPr>
+      <p:sp>
+        <p:nvSpPr>
+          <p:cNvPr id="2" name="Folienbildplatzhalter 1"/>
+          <p:cNvSpPr>
+            <a:spLocks noGrp="1" noRot="1" noChangeAspect="1"/>
+          </p:cNvSpPr>
+          <p:nvPr>
+            <p:ph type="sldImg"/>
+          </p:nvPr>
+        </p:nvSpPr>
+        <p:spPr/>
+      </p:sp>
+      <p:sp>
+        <p:nvSpPr>
+          <p:cNvPr id="3" name="Notizenplatzhalter 2"/>
+          <p:cNvSpPr>
+            <a:spLocks noGrp="1"/>
+          </p:cNvSpPr>
+          <p:nvPr>
+            <p:ph type="body" idx="1"/>
+          </p:nvPr>
+        </p:nvSpPr>
+        <p:spPr/>
+        <p:txBody>
+          <a:bodyPr/>
+          <a:lstStyle/>
+          <a:p>
+            <a:pPr marL="0" marR="0" lvl="0" indent="0" algn="l" defTabSz="914400" rtl="0" eaLnBrk="1" fontAlgn="auto" latinLnBrk="0" hangingPunct="1">
+              <a:lnSpc>
+                <a:spcPct val="100000"/>
+              </a:lnSpc>
+              <a:spcBef>
+                <a:spcPts val="0"/>
+              </a:spcBef>
+              <a:spcAft>
+                <a:spcPts val="0"/>
+              </a:spcAft>
+              <a:buClrTx/>
+              <a:buSzTx/>
+              <a:buFontTx/>
+              <a:buNone/>
+              <a:tabLst/>
+              <a:defRPr/>
+            </a:pPr>
+            <a:r>
+              <a:rPr lang="de-DE" sz="1800" dirty="0">
+                <a:effectLst/>
+                <a:latin typeface="Aptos"/>
+                <a:ea typeface="Aptos"/>
+                <a:cs typeface="Times New Roman" panose="02020603050405020304" pitchFamily="18" charset="0"/>
+              </a:rPr>
+              <a:t>Diese Folie ist methodisch wichtig. Erstens: Wir beschreiben Muster, behaupten aber keine Ursachen. Zweitens: Es gibt keine pauschale Rangliste der Städte, weil sich die Reihenfolge je Schadstoff ändert. Drittens: Datenlücken bleiben Datenlücken; Rom wird bei fehlenden PM-Werten nicht geschätzt. Viertens: EEA und Open-Meteo werden sauber getrennt. EEA sind historische Messdaten, Open-Meteo sind aktuelle Modellwerte. Besonders der Live-</a:t>
+            </a:r>
+            <a:r>
+              <a:rPr lang="de-DE" sz="1800" dirty="0" err="1">
+                <a:effectLst/>
+                <a:latin typeface="Aptos"/>
+                <a:ea typeface="Aptos"/>
+                <a:cs typeface="Times New Roman" panose="02020603050405020304" pitchFamily="18" charset="0"/>
+              </a:rPr>
+              <a:t>vs</a:t>
+            </a:r>
+            <a:r>
+              <a:rPr lang="de-DE" sz="1800" dirty="0">
+                <a:effectLst/>
+                <a:latin typeface="Aptos"/>
+                <a:ea typeface="Aptos"/>
+                <a:cs typeface="Times New Roman" panose="02020603050405020304" pitchFamily="18" charset="0"/>
+              </a:rPr>
+              <a:t>-Median-Vergleich ist daher eine Lageeinordnung, aber kein Ersatz für eine historische Jahresanalyse.</a:t>
+            </a:r>
+            <a:endParaRPr lang="en-GB" sz="1800" dirty="0">
+              <a:effectLst/>
+              <a:latin typeface="Aptos"/>
+              <a:ea typeface="Aptos"/>
+              <a:cs typeface="Times New Roman" panose="02020603050405020304" pitchFamily="18" charset="0"/>
+            </a:endParaRPr>
+          </a:p>
+          <a:p>
+            <a:endParaRPr lang="en-GB" dirty="0"/>
+          </a:p>
+        </p:txBody>
+      </p:sp>
+      <p:sp>
+        <p:nvSpPr>
+          <p:cNvPr id="4" name="Foliennummernplatzhalter 3"/>
+          <p:cNvSpPr>
+            <a:spLocks noGrp="1"/>
+          </p:cNvSpPr>
+          <p:nvPr>
+            <p:ph type="sldNum" sz="quarter" idx="5"/>
+          </p:nvPr>
+        </p:nvSpPr>
+        <p:spPr/>
+        <p:txBody>
+          <a:bodyPr/>
+          <a:lstStyle/>
+          <a:p>
+            <a:fld id="{C45BD0C9-3F00-46B0-87F3-0290CBDB6516}" type="slidenum">
+              <a:rPr lang="en-GB" smtClean="0"/>
+              <a:t>9</a:t>
+            </a:fld>
+            <a:endParaRPr lang="en-GB"/>
+          </a:p>
+        </p:txBody>
+      </p:sp>
+    </p:spTree>
+    <p:extLst>
+      <p:ext uri="{BB962C8B-B14F-4D97-AF65-F5344CB8AC3E}">
+        <p14:creationId xmlns:p14="http://schemas.microsoft.com/office/powerpoint/2010/main" val="995642335"/>
+      </p:ext>
+    </p:extLst>
+  </p:cSld>
+  <p:clrMapOvr>
+    <a:masterClrMapping/>
+  </p:clrMapOvr>
+</p:notes>
+</file>
+
 <file path=ppt/slideLayouts/slideLayout1.xml><?xml version="1.0" encoding="utf-8"?>
 <p:sldLayout xmlns:a="http://schemas.openxmlformats.org/drawingml/2006/main" xmlns:r="http://schemas.openxmlformats.org/officeDocument/2006/relationships" xmlns:p="http://schemas.openxmlformats.org/presentationml/2006/main" type="title" preserve="1">
   <p:cSld name="Title Slide">
@@ -311,7 +1916,7 @@
           <a:p>
             <a:fld id="{5BCAD085-E8A6-8845-BD4E-CB4CCA059FC4}" type="datetimeFigureOut">
               <a:rPr lang="en-US" smtClean="0"/>
-              <a:t>6/30/2026</a:t>
+              <a:t>7/1/2026</a:t>
             </a:fld>
             <a:endParaRPr lang="en-US"/>
           </a:p>
@@ -479,7 +2084,7 @@
           <a:p>
             <a:fld id="{5BCAD085-E8A6-8845-BD4E-CB4CCA059FC4}" type="datetimeFigureOut">
               <a:rPr lang="en-US" smtClean="0"/>
-              <a:t>6/30/2026</a:t>
+              <a:t>7/1/2026</a:t>
             </a:fld>
             <a:endParaRPr lang="en-US"/>
           </a:p>
@@ -657,7 +2262,7 @@
           <a:p>
             <a:fld id="{5BCAD085-E8A6-8845-BD4E-CB4CCA059FC4}" type="datetimeFigureOut">
               <a:rPr lang="en-US" smtClean="0"/>
-              <a:t>6/30/2026</a:t>
+              <a:t>7/1/2026</a:t>
             </a:fld>
             <a:endParaRPr lang="en-US"/>
           </a:p>
@@ -825,7 +2430,7 @@
           <a:p>
             <a:fld id="{5BCAD085-E8A6-8845-BD4E-CB4CCA059FC4}" type="datetimeFigureOut">
               <a:rPr lang="en-US" smtClean="0"/>
-              <a:t>6/30/2026</a:t>
+              <a:t>7/1/2026</a:t>
             </a:fld>
             <a:endParaRPr lang="en-US"/>
           </a:p>
@@ -1070,7 +2675,7 @@
           <a:p>
             <a:fld id="{5BCAD085-E8A6-8845-BD4E-CB4CCA059FC4}" type="datetimeFigureOut">
               <a:rPr lang="en-US" smtClean="0"/>
-              <a:t>6/30/2026</a:t>
+              <a:t>7/1/2026</a:t>
             </a:fld>
             <a:endParaRPr lang="en-US"/>
           </a:p>
@@ -1355,7 +2960,7 @@
           <a:p>
             <a:fld id="{5BCAD085-E8A6-8845-BD4E-CB4CCA059FC4}" type="datetimeFigureOut">
               <a:rPr lang="en-US" smtClean="0"/>
-              <a:t>6/30/2026</a:t>
+              <a:t>7/1/2026</a:t>
             </a:fld>
             <a:endParaRPr lang="en-US"/>
           </a:p>
@@ -1774,7 +3379,7 @@
           <a:p>
             <a:fld id="{5BCAD085-E8A6-8845-BD4E-CB4CCA059FC4}" type="datetimeFigureOut">
               <a:rPr lang="en-US" smtClean="0"/>
-              <a:t>6/30/2026</a:t>
+              <a:t>7/1/2026</a:t>
             </a:fld>
             <a:endParaRPr lang="en-US"/>
           </a:p>
@@ -1891,7 +3496,7 @@
           <a:p>
             <a:fld id="{5BCAD085-E8A6-8845-BD4E-CB4CCA059FC4}" type="datetimeFigureOut">
               <a:rPr lang="en-US" smtClean="0"/>
-              <a:t>6/30/2026</a:t>
+              <a:t>7/1/2026</a:t>
             </a:fld>
             <a:endParaRPr lang="en-US"/>
           </a:p>
@@ -1986,7 +3591,7 @@
           <a:p>
             <a:fld id="{5BCAD085-E8A6-8845-BD4E-CB4CCA059FC4}" type="datetimeFigureOut">
               <a:rPr lang="en-US" smtClean="0"/>
-              <a:t>6/30/2026</a:t>
+              <a:t>7/1/2026</a:t>
             </a:fld>
             <a:endParaRPr lang="en-US"/>
           </a:p>
@@ -2261,7 +3866,7 @@
           <a:p>
             <a:fld id="{5BCAD085-E8A6-8845-BD4E-CB4CCA059FC4}" type="datetimeFigureOut">
               <a:rPr lang="en-US" smtClean="0"/>
-              <a:t>6/30/2026</a:t>
+              <a:t>7/1/2026</a:t>
             </a:fld>
             <a:endParaRPr lang="en-US"/>
           </a:p>
@@ -2513,7 +4118,7 @@
           <a:p>
             <a:fld id="{5BCAD085-E8A6-8845-BD4E-CB4CCA059FC4}" type="datetimeFigureOut">
               <a:rPr lang="en-US" smtClean="0"/>
-              <a:t>6/30/2026</a:t>
+              <a:t>7/1/2026</a:t>
             </a:fld>
             <a:endParaRPr lang="en-US"/>
           </a:p>
@@ -2724,7 +4329,7 @@
           <a:p>
             <a:fld id="{5BCAD085-E8A6-8845-BD4E-CB4CCA059FC4}" type="datetimeFigureOut">
               <a:rPr lang="en-US" smtClean="0"/>
-              <a:t>6/30/2026</a:t>
+              <a:t>7/1/2026</a:t>
             </a:fld>
             <a:endParaRPr lang="en-US"/>
           </a:p>
@@ -3108,7 +4713,7 @@
           <p:nvPr/>
         </p:nvPicPr>
         <p:blipFill>
-          <a:blip r:embed="rId2"/>
+          <a:blip r:embed="rId3"/>
           <a:stretch>
             <a:fillRect/>
           </a:stretch>
@@ -3629,7 +5234,7 @@
           <p:nvPr/>
         </p:nvPicPr>
         <p:blipFill>
-          <a:blip r:embed="rId2"/>
+          <a:blip r:embed="rId3"/>
           <a:stretch>
             <a:fillRect/>
           </a:stretch>
@@ -4254,7 +5859,7 @@
           <p:nvPr/>
         </p:nvPicPr>
         <p:blipFill>
-          <a:blip r:embed="rId2"/>
+          <a:blip r:embed="rId3"/>
           <a:stretch>
             <a:fillRect/>
           </a:stretch>
@@ -4678,7 +6283,7 @@
           <p:nvPr/>
         </p:nvPicPr>
         <p:blipFill>
-          <a:blip r:embed="rId2"/>
+          <a:blip r:embed="rId3"/>
           <a:stretch>
             <a:fillRect/>
           </a:stretch>
@@ -5446,7 +7051,7 @@
           <p:nvPr/>
         </p:nvPicPr>
         <p:blipFill>
-          <a:blip r:embed="rId2"/>
+          <a:blip r:embed="rId3"/>
           <a:stretch>
             <a:fillRect/>
           </a:stretch>
@@ -5542,7 +7147,7 @@
           <p:nvPr/>
         </p:nvPicPr>
         <p:blipFill>
-          <a:blip r:embed="rId3"/>
+          <a:blip r:embed="rId4"/>
           <a:stretch>
             <a:fillRect/>
           </a:stretch>
@@ -5814,7 +7419,7 @@
             <a:r>
               <a:rPr lang="en-GB" sz="900" dirty="0">
                 <a:latin typeface="Aptos"/>
-                <a:hlinkClick r:id="rId4"/>
+                <a:hlinkClick r:id="rId5"/>
               </a:rPr>
               <a:t>WHO global air quality guidelines (2021</a:t>
             </a:r>
@@ -5933,7 +7538,7 @@
           <p:nvPr/>
         </p:nvPicPr>
         <p:blipFill>
-          <a:blip r:embed="rId2"/>
+          <a:blip r:embed="rId3"/>
           <a:stretch>
             <a:fillRect/>
           </a:stretch>
@@ -6029,7 +7634,7 @@
           <p:nvPr/>
         </p:nvPicPr>
         <p:blipFill>
-          <a:blip r:embed="rId3"/>
+          <a:blip r:embed="rId4"/>
           <a:stretch>
             <a:fillRect/>
           </a:stretch>
@@ -6309,7 +7914,7 @@
           <p:nvPr/>
         </p:nvPicPr>
         <p:blipFill>
-          <a:blip r:embed="rId2"/>
+          <a:blip r:embed="rId3"/>
           <a:stretch>
             <a:fillRect/>
           </a:stretch>
@@ -6405,7 +8010,7 @@
           <p:nvPr/>
         </p:nvPicPr>
         <p:blipFill>
-          <a:blip r:embed="rId3"/>
+          <a:blip r:embed="rId4"/>
           <a:stretch>
             <a:fillRect/>
           </a:stretch>
@@ -6429,7 +8034,7 @@
           <p:nvPr/>
         </p:nvPicPr>
         <p:blipFill>
-          <a:blip r:embed="rId4"/>
+          <a:blip r:embed="rId5"/>
           <a:stretch>
             <a:fillRect/>
           </a:stretch>
@@ -6768,7 +8373,7 @@
           <p:nvPr/>
         </p:nvPicPr>
         <p:blipFill>
-          <a:blip r:embed="rId2"/>
+          <a:blip r:embed="rId3"/>
           <a:stretch>
             <a:fillRect/>
           </a:stretch>
@@ -6864,7 +8469,7 @@
           <p:nvPr/>
         </p:nvPicPr>
         <p:blipFill>
-          <a:blip r:embed="rId3"/>
+          <a:blip r:embed="rId4"/>
           <a:stretch>
             <a:fillRect/>
           </a:stretch>
@@ -7144,7 +8749,7 @@
           <p:nvPr/>
         </p:nvPicPr>
         <p:blipFill>
-          <a:blip r:embed="rId2"/>
+          <a:blip r:embed="rId3"/>
           <a:stretch>
             <a:fillRect/>
           </a:stretch>
@@ -7312,7 +8917,7 @@
           <p:nvPr/>
         </p:nvPicPr>
         <p:blipFill>
-          <a:blip r:embed="rId3"/>
+          <a:blip r:embed="rId4"/>
           <a:srcRect/>
           <a:stretch/>
         </p:blipFill>
@@ -7712,7 +9317,7 @@
           <p:nvPr/>
         </p:nvPicPr>
         <p:blipFill>
-          <a:blip r:embed="rId2"/>
+          <a:blip r:embed="rId3"/>
           <a:stretch>
             <a:fillRect/>
           </a:stretch>
@@ -8686,4 +10291,299 @@
   </a:objectDefaults>
   <a:extraClrSchemeLst/>
 </a:theme>
+</file>
+
+<file path=ppt/theme/theme2.xml><?xml version="1.0" encoding="utf-8"?>
+<a:theme xmlns:a="http://schemas.openxmlformats.org/drawingml/2006/main" name="Office">
+  <a:themeElements>
+    <a:clrScheme name="Office">
+      <a:dk1>
+        <a:sysClr val="windowText" lastClr="000000"/>
+      </a:dk1>
+      <a:lt1>
+        <a:sysClr val="window" lastClr="FFFFFF"/>
+      </a:lt1>
+      <a:dk2>
+        <a:srgbClr val="44546A"/>
+      </a:dk2>
+      <a:lt2>
+        <a:srgbClr val="E7E6E6"/>
+      </a:lt2>
+      <a:accent1>
+        <a:srgbClr val="4472C4"/>
+      </a:accent1>
+      <a:accent2>
+        <a:srgbClr val="ED7D31"/>
+      </a:accent2>
+      <a:accent3>
+        <a:srgbClr val="A5A5A5"/>
+      </a:accent3>
+      <a:accent4>
+        <a:srgbClr val="FFC000"/>
+      </a:accent4>
+      <a:accent5>
+        <a:srgbClr val="5B9BD5"/>
+      </a:accent5>
+      <a:accent6>
+        <a:srgbClr val="70AD47"/>
+      </a:accent6>
+      <a:hlink>
+        <a:srgbClr val="0563C1"/>
+      </a:hlink>
+      <a:folHlink>
+        <a:srgbClr val="954F72"/>
+      </a:folHlink>
+    </a:clrScheme>
+    <a:fontScheme name="Office">
+      <a:majorFont>
+        <a:latin typeface="Calibri Light" panose="020F0302020204030204"/>
+        <a:ea typeface=""/>
+        <a:cs typeface=""/>
+        <a:font script="Jpan" typeface="游ゴシック Light"/>
+        <a:font script="Hang" typeface="맑은 고딕"/>
+        <a:font script="Hans" typeface="等线 Light"/>
+        <a:font script="Hant" typeface="新細明體"/>
+        <a:font script="Arab" typeface="Times New Roman"/>
+        <a:font script="Hebr" typeface="Times New Roman"/>
+        <a:font script="Thai" typeface="Angsana New"/>
+        <a:font script="Ethi" typeface="Nyala"/>
+        <a:font script="Beng" typeface="Vrinda"/>
+        <a:font script="Gujr" typeface="Shruti"/>
+        <a:font script="Khmr" typeface="MoolBoran"/>
+        <a:font script="Knda" typeface="Tunga"/>
+        <a:font script="Guru" typeface="Raavi"/>
+        <a:font script="Cans" typeface="Euphemia"/>
+        <a:font script="Cher" typeface="Plantagenet Cherokee"/>
+        <a:font script="Yiii" typeface="Microsoft Yi Baiti"/>
+        <a:font script="Tibt" typeface="Microsoft Himalaya"/>
+        <a:font script="Thaa" typeface="MV Boli"/>
+        <a:font script="Deva" typeface="Mangal"/>
+        <a:font script="Telu" typeface="Gautami"/>
+        <a:font script="Taml" typeface="Latha"/>
+        <a:font script="Syrc" typeface="Estrangelo Edessa"/>
+        <a:font script="Orya" typeface="Kalinga"/>
+        <a:font script="Mlym" typeface="Kartika"/>
+        <a:font script="Laoo" typeface="DokChampa"/>
+        <a:font script="Sinh" typeface="Iskoola Pota"/>
+        <a:font script="Mong" typeface="Mongolian Baiti"/>
+        <a:font script="Viet" typeface="Times New Roman"/>
+        <a:font script="Uigh" typeface="Microsoft Uighur"/>
+        <a:font script="Geor" typeface="Sylfaen"/>
+        <a:font script="Armn" typeface="Arial"/>
+        <a:font script="Bugi" typeface="Leelawadee UI"/>
+        <a:font script="Bopo" typeface="Microsoft JhengHei"/>
+        <a:font script="Java" typeface="Javanese Text"/>
+        <a:font script="Lisu" typeface="Segoe UI"/>
+        <a:font script="Mymr" typeface="Myanmar Text"/>
+        <a:font script="Nkoo" typeface="Ebrima"/>
+        <a:font script="Olck" typeface="Nirmala UI"/>
+        <a:font script="Osma" typeface="Ebrima"/>
+        <a:font script="Phag" typeface="Phagspa"/>
+        <a:font script="Syrn" typeface="Estrangelo Edessa"/>
+        <a:font script="Syrj" typeface="Estrangelo Edessa"/>
+        <a:font script="Syre" typeface="Estrangelo Edessa"/>
+        <a:font script="Sora" typeface="Nirmala UI"/>
+        <a:font script="Tale" typeface="Microsoft Tai Le"/>
+        <a:font script="Talu" typeface="Microsoft New Tai Lue"/>
+        <a:font script="Tfng" typeface="Ebrima"/>
+      </a:majorFont>
+      <a:minorFont>
+        <a:latin typeface="Calibri" panose="020F0502020204030204"/>
+        <a:ea typeface=""/>
+        <a:cs typeface=""/>
+        <a:font script="Jpan" typeface="游ゴシック"/>
+        <a:font script="Hang" typeface="맑은 고딕"/>
+        <a:font script="Hans" typeface="等线"/>
+        <a:font script="Hant" typeface="新細明體"/>
+        <a:font script="Arab" typeface="Arial"/>
+        <a:font script="Hebr" typeface="Arial"/>
+        <a:font script="Thai" typeface="Cordia New"/>
+        <a:font script="Ethi" typeface="Nyala"/>
+        <a:font script="Beng" typeface="Vrinda"/>
+        <a:font script="Gujr" typeface="Shruti"/>
+        <a:font script="Khmr" typeface="DaunPenh"/>
+        <a:font script="Knda" typeface="Tunga"/>
+        <a:font script="Guru" typeface="Raavi"/>
+        <a:font script="Cans" typeface="Euphemia"/>
+        <a:font script="Cher" typeface="Plantagenet Cherokee"/>
+        <a:font script="Yiii" typeface="Microsoft Yi Baiti"/>
+        <a:font script="Tibt" typeface="Microsoft Himalaya"/>
+        <a:font script="Thaa" typeface="MV Boli"/>
+        <a:font script="Deva" typeface="Mangal"/>
+        <a:font script="Telu" typeface="Gautami"/>
+        <a:font script="Taml" typeface="Latha"/>
+        <a:font script="Syrc" typeface="Estrangelo Edessa"/>
+        <a:font script="Orya" typeface="Kalinga"/>
+        <a:font script="Mlym" typeface="Kartika"/>
+        <a:font script="Laoo" typeface="DokChampa"/>
+        <a:font script="Sinh" typeface="Iskoola Pota"/>
+        <a:font script="Mong" typeface="Mongolian Baiti"/>
+        <a:font script="Viet" typeface="Arial"/>
+        <a:font script="Uigh" typeface="Microsoft Uighur"/>
+        <a:font script="Geor" typeface="Sylfaen"/>
+        <a:font script="Armn" typeface="Arial"/>
+        <a:font script="Bugi" typeface="Leelawadee UI"/>
+        <a:font script="Bopo" typeface="Microsoft JhengHei"/>
+        <a:font script="Java" typeface="Javanese Text"/>
+        <a:font script="Lisu" typeface="Segoe UI"/>
+        <a:font script="Mymr" typeface="Myanmar Text"/>
+        <a:font script="Nkoo" typeface="Ebrima"/>
+        <a:font script="Olck" typeface="Nirmala UI"/>
+        <a:font script="Osma" typeface="Ebrima"/>
+        <a:font script="Phag" typeface="Phagspa"/>
+        <a:font script="Syrn" typeface="Estrangelo Edessa"/>
+        <a:font script="Syrj" typeface="Estrangelo Edessa"/>
+        <a:font script="Syre" typeface="Estrangelo Edessa"/>
+        <a:font script="Sora" typeface="Nirmala UI"/>
+        <a:font script="Tale" typeface="Microsoft Tai Le"/>
+        <a:font script="Talu" typeface="Microsoft New Tai Lue"/>
+        <a:font script="Tfng" typeface="Ebrima"/>
+      </a:minorFont>
+    </a:fontScheme>
+    <a:fmtScheme name="Office">
+      <a:fillStyleLst>
+        <a:solidFill>
+          <a:schemeClr val="phClr"/>
+        </a:solidFill>
+        <a:gradFill rotWithShape="1">
+          <a:gsLst>
+            <a:gs pos="0">
+              <a:schemeClr val="phClr">
+                <a:lumMod val="110000"/>
+                <a:satMod val="105000"/>
+                <a:tint val="67000"/>
+              </a:schemeClr>
+            </a:gs>
+            <a:gs pos="50000">
+              <a:schemeClr val="phClr">
+                <a:lumMod val="105000"/>
+                <a:satMod val="103000"/>
+                <a:tint val="73000"/>
+              </a:schemeClr>
+            </a:gs>
+            <a:gs pos="100000">
+              <a:schemeClr val="phClr">
+                <a:lumMod val="105000"/>
+                <a:satMod val="109000"/>
+                <a:tint val="81000"/>
+              </a:schemeClr>
+            </a:gs>
+          </a:gsLst>
+          <a:lin ang="5400000" scaled="0"/>
+        </a:gradFill>
+        <a:gradFill rotWithShape="1">
+          <a:gsLst>
+            <a:gs pos="0">
+              <a:schemeClr val="phClr">
+                <a:satMod val="103000"/>
+                <a:lumMod val="102000"/>
+                <a:tint val="94000"/>
+              </a:schemeClr>
+            </a:gs>
+            <a:gs pos="50000">
+              <a:schemeClr val="phClr">
+                <a:satMod val="110000"/>
+                <a:lumMod val="100000"/>
+                <a:shade val="100000"/>
+              </a:schemeClr>
+            </a:gs>
+            <a:gs pos="100000">
+              <a:schemeClr val="phClr">
+                <a:lumMod val="99000"/>
+                <a:satMod val="120000"/>
+                <a:shade val="78000"/>
+              </a:schemeClr>
+            </a:gs>
+          </a:gsLst>
+          <a:lin ang="5400000" scaled="0"/>
+        </a:gradFill>
+      </a:fillStyleLst>
+      <a:lnStyleLst>
+        <a:ln w="6350" cap="flat" cmpd="sng" algn="ctr">
+          <a:solidFill>
+            <a:schemeClr val="phClr"/>
+          </a:solidFill>
+          <a:prstDash val="solid"/>
+          <a:miter lim="800000"/>
+        </a:ln>
+        <a:ln w="12700" cap="flat" cmpd="sng" algn="ctr">
+          <a:solidFill>
+            <a:schemeClr val="phClr"/>
+          </a:solidFill>
+          <a:prstDash val="solid"/>
+          <a:miter lim="800000"/>
+        </a:ln>
+        <a:ln w="19050" cap="flat" cmpd="sng" algn="ctr">
+          <a:solidFill>
+            <a:schemeClr val="phClr"/>
+          </a:solidFill>
+          <a:prstDash val="solid"/>
+          <a:miter lim="800000"/>
+        </a:ln>
+      </a:lnStyleLst>
+      <a:effectStyleLst>
+        <a:effectStyle>
+          <a:effectLst/>
+        </a:effectStyle>
+        <a:effectStyle>
+          <a:effectLst/>
+        </a:effectStyle>
+        <a:effectStyle>
+          <a:effectLst>
+            <a:outerShdw blurRad="57150" dist="19050" dir="5400000" algn="ctr" rotWithShape="0">
+              <a:srgbClr val="000000">
+                <a:alpha val="63000"/>
+              </a:srgbClr>
+            </a:outerShdw>
+          </a:effectLst>
+        </a:effectStyle>
+      </a:effectStyleLst>
+      <a:bgFillStyleLst>
+        <a:solidFill>
+          <a:schemeClr val="phClr"/>
+        </a:solidFill>
+        <a:solidFill>
+          <a:schemeClr val="phClr">
+            <a:tint val="95000"/>
+            <a:satMod val="170000"/>
+          </a:schemeClr>
+        </a:solidFill>
+        <a:gradFill rotWithShape="1">
+          <a:gsLst>
+            <a:gs pos="0">
+              <a:schemeClr val="phClr">
+                <a:tint val="93000"/>
+                <a:satMod val="150000"/>
+                <a:shade val="98000"/>
+                <a:lumMod val="102000"/>
+              </a:schemeClr>
+            </a:gs>
+            <a:gs pos="50000">
+              <a:schemeClr val="phClr">
+                <a:tint val="98000"/>
+                <a:satMod val="130000"/>
+                <a:shade val="90000"/>
+                <a:lumMod val="103000"/>
+              </a:schemeClr>
+            </a:gs>
+            <a:gs pos="100000">
+              <a:schemeClr val="phClr">
+                <a:shade val="63000"/>
+                <a:satMod val="120000"/>
+              </a:schemeClr>
+            </a:gs>
+          </a:gsLst>
+          <a:lin ang="5400000" scaled="0"/>
+        </a:gradFill>
+      </a:bgFillStyleLst>
+    </a:fmtScheme>
+  </a:themeElements>
+  <a:objectDefaults/>
+  <a:extraClrSchemeLst/>
+  <a:extLst>
+    <a:ext uri="{05A4C25C-085E-4340-85A3-A5531E510DB2}">
+      <thm15:themeFamily xmlns:thm15="http://schemas.microsoft.com/office/thememl/2012/main" name="Office Theme" id="{62F939B6-93AF-4DB8-9C6B-D6C7DFDC589F}" vid="{4A3C46E8-61CC-4603-A589-7422A47A8E4A}"/>
+    </a:ext>
+  </a:extLst>
+</a:theme>
 </file>
--- a/presentation/Euro_Air_Quality_Pipeline_FH_10Folien_v2.pptx
+++ b/presentation/Euro_Air_Quality_Pipeline_FH_10Folien_v2.pptx
@@ -683,22 +683,49 @@
               <a:defRPr/>
             </a:pPr>
             <a:r>
-              <a:rPr lang="de-DE" sz="1800" dirty="0">
-                <a:effectLst/>
-                <a:latin typeface="Aptos"/>
-                <a:ea typeface="Aptos"/>
-                <a:cs typeface="Times New Roman" panose="02020603050405020304" pitchFamily="18" charset="0"/>
-              </a:rPr>
-              <a:t>Drei Aussagen sollen hängen bleiben. Erstens: NO2 ist der klarste Befund. Alle acht Städte überschreiten den WHO-NO2-Richtwert, mit Jahresmitteln zwischen 15 und 25 Mikrogramm statt 10. Zweitens: Schadstoff schlägt Stadt. PM2.5, PM10 und NO2 zeigen unterschiedliche Muster, daher wäre eine einzige Gesamtrangliste irreführend. Drittens: Die Live-Daten werden sinnvoll eingeordnet, aber nicht mit EEA gleichgesetzt. Open-Meteo liefert aktuelle Modellwerte, die explorativ gegen den historischen EEA-Median gelesen werden. Der Code und die Ergebnisse liegen im Repository.</a:t>
-            </a:r>
-            <a:endParaRPr lang="en-GB" sz="1800">
-              <a:effectLst/>
-              <a:latin typeface="Aptos"/>
-              <a:ea typeface="Aptos"/>
-              <a:cs typeface="Times New Roman" panose="02020603050405020304" pitchFamily="18" charset="0"/>
-            </a:endParaRPr>
-          </a:p>
-          <a:p>
+              <a:rPr lang="de-DE" sz="2800" dirty="0"/>
+              <a:t>Drei Aussagen sollen hängen bleiben. Erstens: </a:t>
+            </a:r>
+            <a:r>
+              <a:rPr lang="de-DE" sz="2800" b="1" dirty="0"/>
+              <a:t>NO₂ ist der klarste Befund.</a:t>
+            </a:r>
+            <a:r>
+              <a:rPr lang="de-DE" sz="2800" dirty="0"/>
+              <a:t> Alle acht Städte überschreiten den WHO-2021-Jahresrichtwert für NO₂ von </a:t>
+            </a:r>
+            <a:r>
+              <a:rPr lang="de-DE" sz="2800" b="1" dirty="0"/>
+              <a:t>10 µg/m³</a:t>
+            </a:r>
+            <a:r>
+              <a:rPr lang="de-DE" sz="2800" dirty="0"/>
+              <a:t>. Die Jahresmittel liegen zwischen </a:t>
+            </a:r>
+            <a:r>
+              <a:rPr lang="de-DE" sz="2800" b="1" dirty="0"/>
+              <a:t>15 und 25 µg/m³</a:t>
+            </a:r>
+            <a:r>
+              <a:rPr lang="de-DE" sz="2800" dirty="0"/>
+              <a:t>. Zweitens: </a:t>
+            </a:r>
+            <a:r>
+              <a:rPr lang="de-DE" sz="2800" b="1" dirty="0"/>
+              <a:t>Der Schadstoff ist entscheidender als die Stadt.</a:t>
+            </a:r>
+            <a:r>
+              <a:rPr lang="de-DE" sz="2800" dirty="0"/>
+              <a:t> PM2.5, PM10 und NO₂ zeigen unterschiedliche Muster und Rangfolgen. Deshalb wäre eine einzige Gesamtrangliste der Städte methodisch irreführend. Drittens: </a:t>
+            </a:r>
+            <a:r>
+              <a:rPr lang="de-DE" sz="2800" b="1" dirty="0"/>
+              <a:t>Die Live-Daten werden eingeordnet, aber nicht den EEA-Messdaten gleichgesetzt.</a:t>
+            </a:r>
+            <a:r>
+              <a:rPr lang="de-DE" sz="2800" dirty="0"/>
+              <a:t> Open-Meteo liefert aktuelle Modellwerte, die explorativ dem historischen EEA-Median der Tagesmittelwerte gegenübergestellt werden. Der Vergleich dient der Einordnung des aktuellen Zustands und nicht als direkter Vergleich zwischen Modell- und Messdaten. Der vollständige Code sowie alle Ergebnisse sind im GitHub-Repository dokumentiert.</a:t>
+            </a:r>
             <a:endParaRPr lang="en-GB" dirty="0"/>
           </a:p>
         </p:txBody>
@@ -1545,22 +1572,17 @@
               <a:defRPr/>
             </a:pPr>
             <a:r>
-              <a:rPr lang="de-DE" sz="1800" dirty="0">
-                <a:effectLst/>
-                <a:latin typeface="Aptos"/>
-                <a:ea typeface="Aptos"/>
-                <a:cs typeface="Times New Roman" panose="02020603050405020304" pitchFamily="18" charset="0"/>
-              </a:rPr>
-              <a:t>Diese Folie verbindet die historische Analyse mit dem Live-Pfad. Aus den EEA-Tageswerten bilden wir je Stadt und Schadstoff den historischen Median für 2025. Die aktuellen Open-Meteo-Modellwerte werden über Kafka erzeugt, von Spark gelesen und anschließend gegen diesen Median eingeordnet. Positive Abweichungen bedeuten: Der aktuelle Modellwert liegt über der historischen Median-Baseline. Negative Abweichungen bedeuten: Er liegt darunter. Es gibt 24 mögliche Paare, davon 22 mit historischer Referenz und 2 ohne Referenz, nämlich Rom bei PM2.5 und PM10. Der Vergleich bleibt explorativ.</a:t>
-            </a:r>
-            <a:endParaRPr lang="en-GB" sz="1800" dirty="0">
-              <a:effectLst/>
-              <a:latin typeface="Aptos"/>
-              <a:ea typeface="Aptos"/>
-              <a:cs typeface="Times New Roman" panose="02020603050405020304" pitchFamily="18" charset="0"/>
-            </a:endParaRPr>
-          </a:p>
-          <a:p>
+              <a:rPr lang="de-DE" sz="2800" dirty="0"/>
+              <a:t>Aus den historischen EEA-Tageswerten berechnen wir für jede Stadt und jeden Schadstoff den </a:t>
+            </a:r>
+            <a:r>
+              <a:rPr lang="de-DE" sz="2800" b="1" dirty="0"/>
+              <a:t>Median der Tagesmittelwerte</a:t>
+            </a:r>
+            <a:r>
+              <a:rPr lang="de-DE" sz="2800" dirty="0"/>
+              <a:t> für das Jahr 2025. Die aktuellen Open-Meteo-Modellwerte werden über die Open-Meteo-API abgerufen, als Events über Kafka übertragen, von Spark Structured Streaming verarbeitet und anschließend dem historischen Median gegenübergestellt. Positive Abweichungen bedeuten, dass der aktuelle Modellwert über der historischen Median-Baseline liegt. Negative Abweichungen bedeuten, dass er darunter liegt. Insgesamt gibt es 24 mögliche Stadt-Schadstoff-Kombinationen. Für 22 davon ist ein historischer Vergleich möglich; für Rom fehlen bei PM2.5 und PM10 historische EEA-Referenzdaten. Deshalb existieren dort keine Vergleichswerte. Der Vergleich dient ausschließlich der explorativen Einordnung und stellt keinen direkten Vergleich von Messwerten und Modellwerten dar.</a:t>
+            </a:r>
             <a:endParaRPr lang="en-GB" dirty="0"/>
           </a:p>
         </p:txBody>
@@ -1663,40 +1685,17 @@
               <a:defRPr/>
             </a:pPr>
             <a:r>
-              <a:rPr lang="de-DE" sz="1800" dirty="0">
-                <a:effectLst/>
-                <a:latin typeface="Aptos"/>
-                <a:ea typeface="Aptos"/>
-                <a:cs typeface="Times New Roman" panose="02020603050405020304" pitchFamily="18" charset="0"/>
-              </a:rPr>
-              <a:t>Diese Folie ist methodisch wichtig. Erstens: Wir beschreiben Muster, behaupten aber keine Ursachen. Zweitens: Es gibt keine pauschale Rangliste der Städte, weil sich die Reihenfolge je Schadstoff ändert. Drittens: Datenlücken bleiben Datenlücken; Rom wird bei fehlenden PM-Werten nicht geschätzt. Viertens: EEA und Open-Meteo werden sauber getrennt. EEA sind historische Messdaten, Open-Meteo sind aktuelle Modellwerte. Besonders der Live-</a:t>
-            </a:r>
-            <a:r>
-              <a:rPr lang="de-DE" sz="1800" dirty="0" err="1">
-                <a:effectLst/>
-                <a:latin typeface="Aptos"/>
-                <a:ea typeface="Aptos"/>
-                <a:cs typeface="Times New Roman" panose="02020603050405020304" pitchFamily="18" charset="0"/>
-              </a:rPr>
-              <a:t>vs</a:t>
-            </a:r>
-            <a:r>
-              <a:rPr lang="de-DE" sz="1800" dirty="0">
-                <a:effectLst/>
-                <a:latin typeface="Aptos"/>
-                <a:ea typeface="Aptos"/>
-                <a:cs typeface="Times New Roman" panose="02020603050405020304" pitchFamily="18" charset="0"/>
-              </a:rPr>
-              <a:t>-Median-Vergleich ist daher eine Lageeinordnung, aber kein Ersatz für eine historische Jahresanalyse.</a:t>
-            </a:r>
-            <a:endParaRPr lang="en-GB" sz="1800" dirty="0">
-              <a:effectLst/>
-              <a:latin typeface="Aptos"/>
-              <a:ea typeface="Aptos"/>
-              <a:cs typeface="Times New Roman" panose="02020603050405020304" pitchFamily="18" charset="0"/>
-            </a:endParaRPr>
-          </a:p>
-          <a:p>
+              <a:rPr lang="de-DE" sz="2800" b="1" dirty="0"/>
+              <a:t>Vier Punkte sind für die Interpretation wichtig.</a:t>
+            </a:r>
+            <a:r>
+              <a:rPr lang="de-DE" sz="2800" dirty="0"/>
+              <a:t> Erstens: Wir beschreiben Muster in den Daten, behaupten jedoch keine kausalen Zusammenhänge. Zweitens: Es gibt keine pauschale Rangliste der Städte, weil sich die Rangfolgen je nach Schadstoff unterscheiden. Drittens: Datenlücken bleiben Datenlücken. Für Rom werden die fehlenden historischen EEA-Werte für PM2.5 und PM10 weder geschätzt noch ergänzt, sondern transparent ausgewiesen. Viertens: EEA- und Open-Meteo-Daten werden methodisch strikt getrennt. Die EEA liefert historische Messdaten, Open-Meteo aktuelle Modellwerte. </a:t>
+            </a:r>
+            <a:r>
+              <a:rPr lang="de-DE" sz="2800"/>
+              <a:t>Der Live-vs.-Median-Vergleich dient daher ausschließlich der explorativen Einordnung des aktuellen Zustands und ersetzt keine historische Analyse auf Basis von Messdaten.</a:t>
+            </a:r>
             <a:endParaRPr lang="en-GB" dirty="0"/>
           </a:p>
         </p:txBody>
@@ -7207,7 +7206,7 @@
         <p:spPr>
           <a:xfrm>
             <a:off x="7726679" y="1783080"/>
-            <a:ext cx="3840480" cy="2834640"/>
+            <a:ext cx="3840480" cy="3339376"/>
           </a:xfrm>
           <a:prstGeom prst="rect">
             <a:avLst/>
@@ -7232,7 +7231,48 @@
               </a:defRPr>
             </a:pPr>
             <a:r>
-              <a:t>▸  Alle acht Städte liegen bei NO2 über dem WHO-2021-Jahresrichtwert von 10 µg/m³.</a:t>
+              <a:rPr dirty="0"/>
+              <a:t>▸  Alle </a:t>
+            </a:r>
+            <a:r>
+              <a:rPr dirty="0" err="1"/>
+              <a:t>acht</a:t>
+            </a:r>
+            <a:r>
+              <a:rPr dirty="0"/>
+              <a:t> </a:t>
+            </a:r>
+            <a:r>
+              <a:rPr dirty="0" err="1"/>
+              <a:t>Städte</a:t>
+            </a:r>
+            <a:r>
+              <a:rPr dirty="0"/>
+              <a:t> </a:t>
+            </a:r>
+            <a:r>
+              <a:rPr dirty="0" err="1"/>
+              <a:t>liegen</a:t>
+            </a:r>
+            <a:r>
+              <a:rPr dirty="0"/>
+              <a:t> </a:t>
+            </a:r>
+            <a:r>
+              <a:rPr dirty="0" err="1"/>
+              <a:t>bei</a:t>
+            </a:r>
+            <a:r>
+              <a:rPr dirty="0"/>
+              <a:t> NO2 </a:t>
+            </a:r>
+            <a:r>
+              <a:rPr dirty="0" err="1"/>
+              <a:t>über</a:t>
+            </a:r>
+            <a:r>
+              <a:rPr dirty="0"/>
+              <a:t> dem WHO-2021-Jahresrichtwert von 10 µg/m³.</a:t>
             </a:r>
           </a:p>
           <a:p>
@@ -7248,7 +7288,24 @@
               </a:defRPr>
             </a:pPr>
             <a:r>
-              <a:t>▸  NO2-Spanne: 15,3 bis 25,0 µg/m³ - etwa 1,5× bis 2,5× über WHO.</a:t>
+              <a:rPr dirty="0"/>
+              <a:t>▸  NO2-Spanne: 15,3 bis 25,0 µg/m³ - </a:t>
+            </a:r>
+            <a:r>
+              <a:rPr dirty="0" err="1"/>
+              <a:t>etwa</a:t>
+            </a:r>
+            <a:r>
+              <a:rPr dirty="0"/>
+              <a:t> 1,5× bis 2,5× </a:t>
+            </a:r>
+            <a:r>
+              <a:rPr dirty="0" err="1"/>
+              <a:t>über</a:t>
+            </a:r>
+            <a:r>
+              <a:rPr dirty="0"/>
+              <a:t> WHO.</a:t>
             </a:r>
           </a:p>
           <a:p>
@@ -7264,7 +7321,83 @@
               </a:defRPr>
             </a:pPr>
             <a:r>
-              <a:t>▸  PM2.5 liegt bei allen Städten mit validierter PM2.5-Referenz über WHO 5.</a:t>
+              <a:rPr dirty="0"/>
+              <a:t>▸  PM2.5 </a:t>
+            </a:r>
+            <a:r>
+              <a:rPr dirty="0" err="1"/>
+              <a:t>liegt</a:t>
+            </a:r>
+            <a:r>
+              <a:rPr dirty="0"/>
+              <a:t> </a:t>
+            </a:r>
+            <a:r>
+              <a:rPr dirty="0" err="1"/>
+              <a:t>bei</a:t>
+            </a:r>
+            <a:r>
+              <a:rPr dirty="0"/>
+              <a:t> </a:t>
+            </a:r>
+            <a:r>
+              <a:rPr dirty="0" err="1"/>
+              <a:t>allen</a:t>
+            </a:r>
+            <a:r>
+              <a:rPr dirty="0"/>
+              <a:t> </a:t>
+            </a:r>
+            <a:r>
+              <a:rPr dirty="0" err="1"/>
+              <a:t>Städten</a:t>
+            </a:r>
+            <a:r>
+              <a:rPr dirty="0"/>
+              <a:t> </a:t>
+            </a:r>
+            <a:r>
+              <a:rPr dirty="0" err="1"/>
+              <a:t>mit</a:t>
+            </a:r>
+            <a:r>
+              <a:rPr dirty="0"/>
+              <a:t> </a:t>
+            </a:r>
+            <a:r>
+              <a:rPr dirty="0" err="1"/>
+              <a:t>validierter</a:t>
+            </a:r>
+            <a:r>
+              <a:rPr dirty="0"/>
+              <a:t> PM2.5-Referenz </a:t>
+            </a:r>
+            <a:r>
+              <a:rPr dirty="0" err="1"/>
+              <a:t>über</a:t>
+            </a:r>
+            <a:r>
+              <a:rPr dirty="0"/>
+              <a:t> </a:t>
+            </a:r>
+            <a:br>
+              <a:rPr lang="de-DE" dirty="0"/>
+            </a:br>
+            <a:r>
+              <a:rPr dirty="0"/>
+              <a:t>WHO 5</a:t>
+            </a:r>
+            <a:r>
+              <a:rPr lang="de-DE" dirty="0"/>
+              <a:t> </a:t>
+            </a:r>
+            <a:r>
+              <a:rPr lang="en-GB" dirty="0"/>
+              <a:t>µg/m³</a:t>
+            </a:r>
+            <a:r>
+              <a:rPr dirty="0"/>
+              <a:t>.</a:t>
             </a:r>
           </a:p>
           <a:p>
@@ -7280,7 +7413,56 @@
               </a:defRPr>
             </a:pPr>
             <a:r>
-              <a:t>▸  Rom: keine validierten PM2.5/PM10-Werte in der EEA-Historie - die Lücke bleibt sichtbar.</a:t>
+              <a:rPr dirty="0"/>
+              <a:t>▸  Rom: </a:t>
+            </a:r>
+            <a:r>
+              <a:rPr dirty="0" err="1"/>
+              <a:t>keine</a:t>
+            </a:r>
+            <a:r>
+              <a:rPr dirty="0"/>
+              <a:t> </a:t>
+            </a:r>
+            <a:r>
+              <a:rPr dirty="0" err="1"/>
+              <a:t>validierten</a:t>
+            </a:r>
+            <a:r>
+              <a:rPr dirty="0"/>
+              <a:t> PM2.5/PM10-Werte in der EEA-</a:t>
+            </a:r>
+            <a:r>
+              <a:rPr dirty="0" err="1"/>
+              <a:t>Historie</a:t>
+            </a:r>
+            <a:r>
+              <a:rPr dirty="0"/>
+              <a:t> - die </a:t>
+            </a:r>
+            <a:r>
+              <a:rPr dirty="0" err="1"/>
+              <a:t>Lücke</a:t>
+            </a:r>
+            <a:r>
+              <a:rPr dirty="0"/>
+              <a:t> </a:t>
+            </a:r>
+            <a:r>
+              <a:rPr dirty="0" err="1"/>
+              <a:t>bleibt</a:t>
+            </a:r>
+            <a:r>
+              <a:rPr dirty="0"/>
+              <a:t> </a:t>
+            </a:r>
+            <a:r>
+              <a:rPr dirty="0" err="1"/>
+              <a:t>sichtbar</a:t>
+            </a:r>
+            <a:r>
+              <a:rPr dirty="0"/>
+              <a:t>.</a:t>
             </a:r>
           </a:p>
         </p:txBody>
@@ -7694,7 +7876,7 @@
         <p:spPr>
           <a:xfrm>
             <a:off x="7726679" y="1783080"/>
-            <a:ext cx="3840480" cy="3017520"/>
+            <a:ext cx="3840480" cy="2700739"/>
           </a:xfrm>
           <a:prstGeom prst="rect">
             <a:avLst/>
@@ -7719,7 +7901,32 @@
               </a:defRPr>
             </a:pPr>
             <a:r>
-              <a:t>▸  Höchste PM2.5-Mittel: Warschau 14,7 und Prag 14,5 µg/m³.</a:t>
+              <a:rPr dirty="0"/>
+              <a:t>▸  </a:t>
+            </a:r>
+            <a:r>
+              <a:rPr dirty="0" err="1"/>
+              <a:t>Höchste</a:t>
+            </a:r>
+            <a:r>
+              <a:rPr dirty="0"/>
+              <a:t> PM2.5-Mittel: </a:t>
+            </a:r>
+            <a:r>
+              <a:rPr dirty="0" err="1"/>
+              <a:t>Warschau</a:t>
+            </a:r>
+            <a:r>
+              <a:rPr dirty="0"/>
+              <a:t> 14,7 und </a:t>
+            </a:r>
+            <a:r>
+              <a:rPr dirty="0" err="1"/>
+              <a:t>Prag</a:t>
+            </a:r>
+            <a:r>
+              <a:rPr dirty="0"/>
+              <a:t> 14,5 µg/m³.</a:t>
             </a:r>
           </a:p>
           <a:p>
@@ -7735,7 +7942,16 @@
               </a:defRPr>
             </a:pPr>
             <a:r>
-              <a:t>▸  Niedrigste PM2.5-Mittel: Madrid 9,3, Amsterdam 9,5, Wien 9,8 µg/m³.</a:t>
+              <a:rPr dirty="0"/>
+              <a:t>▸  </a:t>
+            </a:r>
+            <a:r>
+              <a:rPr dirty="0" err="1"/>
+              <a:t>Niedrigste</a:t>
+            </a:r>
+            <a:r>
+              <a:rPr dirty="0"/>
+              <a:t> PM2.5-Mittel: Madrid 9,3, Amsterdam 9,5, Wien 9,8 µg/m³.</a:t>
             </a:r>
           </a:p>
           <a:p>
@@ -7751,7 +7967,56 @@
               </a:defRPr>
             </a:pPr>
             <a:r>
-              <a:t>▸  Alle vergleichbaren Städte liegen deutlich über WHO 5.</a:t>
+              <a:rPr dirty="0"/>
+              <a:t>▸  Alle </a:t>
+            </a:r>
+            <a:r>
+              <a:rPr dirty="0" err="1"/>
+              <a:t>vergleichbaren</a:t>
+            </a:r>
+            <a:r>
+              <a:rPr dirty="0"/>
+              <a:t> </a:t>
+            </a:r>
+            <a:r>
+              <a:rPr dirty="0" err="1"/>
+              <a:t>Städte</a:t>
+            </a:r>
+            <a:r>
+              <a:rPr dirty="0"/>
+              <a:t> </a:t>
+            </a:r>
+            <a:r>
+              <a:rPr dirty="0" err="1"/>
+              <a:t>liegen</a:t>
+            </a:r>
+            <a:r>
+              <a:rPr dirty="0"/>
+              <a:t> </a:t>
+            </a:r>
+            <a:r>
+              <a:rPr dirty="0" err="1"/>
+              <a:t>deutlich</a:t>
+            </a:r>
+            <a:r>
+              <a:rPr dirty="0"/>
+              <a:t> </a:t>
+            </a:r>
+            <a:r>
+              <a:rPr dirty="0" err="1"/>
+              <a:t>über</a:t>
+            </a:r>
+            <a:r>
+              <a:rPr dirty="0"/>
+              <a:t> WHO 5</a:t>
+            </a:r>
+            <a:r>
+              <a:rPr lang="en-GB" dirty="0"/>
+              <a:t> µg/m³</a:t>
+            </a:r>
+            <a:r>
+              <a:rPr dirty="0"/>
+              <a:t>.</a:t>
             </a:r>
           </a:p>
           <a:p>
@@ -7767,7 +8032,80 @@
               </a:defRPr>
             </a:pPr>
             <a:r>
-              <a:t>▸  Fehlerbalken zeigen starke Tag-zu-Tag-Streuung; kleine Rangunterschiede nicht überinterpretieren.</a:t>
+              <a:rPr dirty="0"/>
+              <a:t>▸  </a:t>
+            </a:r>
+            <a:r>
+              <a:rPr dirty="0" err="1"/>
+              <a:t>Fehlerbalken</a:t>
+            </a:r>
+            <a:r>
+              <a:rPr dirty="0"/>
+              <a:t> </a:t>
+            </a:r>
+            <a:r>
+              <a:rPr dirty="0" err="1"/>
+              <a:t>zeigen</a:t>
+            </a:r>
+            <a:r>
+              <a:rPr dirty="0"/>
+              <a:t> </a:t>
+            </a:r>
+            <a:r>
+              <a:rPr dirty="0" err="1"/>
+              <a:t>starke</a:t>
+            </a:r>
+            <a:r>
+              <a:rPr dirty="0"/>
+              <a:t> Tag-</a:t>
+            </a:r>
+            <a:r>
+              <a:rPr dirty="0" err="1"/>
+              <a:t>zu</a:t>
+            </a:r>
+            <a:r>
+              <a:rPr dirty="0"/>
+              <a:t>-Tag-</a:t>
+            </a:r>
+            <a:r>
+              <a:rPr dirty="0" err="1"/>
+              <a:t>Streuung</a:t>
+            </a:r>
+            <a:r>
+              <a:rPr dirty="0"/>
+              <a:t>; </a:t>
+            </a:r>
+            <a:r>
+              <a:rPr dirty="0" err="1"/>
+              <a:t>kleine</a:t>
+            </a:r>
+            <a:r>
+              <a:rPr dirty="0"/>
+              <a:t> </a:t>
+            </a:r>
+            <a:r>
+              <a:rPr dirty="0" err="1"/>
+              <a:t>Rangunterschiede</a:t>
+            </a:r>
+            <a:r>
+              <a:rPr dirty="0"/>
+              <a:t> </a:t>
+            </a:r>
+            <a:r>
+              <a:rPr dirty="0" err="1"/>
+              <a:t>nicht</a:t>
+            </a:r>
+            <a:r>
+              <a:rPr dirty="0"/>
+              <a:t> </a:t>
+            </a:r>
+            <a:r>
+              <a:rPr dirty="0" err="1"/>
+              <a:t>überinterpretieren</a:t>
+            </a:r>
+            <a:r>
+              <a:rPr dirty="0"/>
+              <a:t>.</a:t>
             </a:r>
           </a:p>
         </p:txBody>
